--- a/SPICE_Solver_Presentation.pptx
+++ b/SPICE_Solver_Presentation.pptx
@@ -4,6 +4,9 @@
   <p:sldMasterIdLst>
     <p:sldMasterId id="2147483648" r:id="rId1"/>
   </p:sldMasterIdLst>
+  <p:notesMasterIdLst>
+    <p:notesMasterId r:id="rId19"/>
+  </p:notesMasterIdLst>
   <p:sldIdLst>
     <p:sldId id="256" r:id="rId2"/>
     <p:sldId id="257" r:id="rId3"/>
@@ -23,10 +26,7 @@
     <p:sldId id="271" r:id="rId17"/>
     <p:sldId id="272" r:id="rId18"/>
   </p:sldIdLst>
-  <p:notesMasterIdLst>
-    <p:notesMasterId r:id="rId19"/>
-  </p:notesMasterIdLst>
-  <p:sldSz cx="9144000" cy="5143500"/>
+  <p:sldSz cx="9144000" cy="5143500" type="screen16x9"/>
   <p:notesSz cx="5143500" cy="9144000"/>
   <p:defaultTextStyle>
     <a:lvl1pPr marL="0" algn="l" defTabSz="914400" rtl="0" eaLnBrk="1" latinLnBrk="0" hangingPunct="1">
@@ -123,21 +123,21 @@
   <p:extLst>
     <p:ext uri="{521415D9-36F7-43E2-AB2F-B90AF26B5E84}">
       <p14:sectionLst xmlns:p14="http://schemas.microsoft.com/office/powerpoint/2010/main">
-        <p14:section name="Opening" id="{b3cd3c60-46a0-0489-4ffa-d4d85ead13c6}">
+        <p14:section name="Opening" id="{B3CD3C60-46A0-0489-4FFA-D4D85EAD13C6}">
           <p14:sldIdLst>
             <p14:sldId id="256"/>
             <p14:sldId id="257"/>
             <p14:sldId id="258"/>
           </p14:sldIdLst>
         </p14:section>
-        <p14:section name="Foundations" id="{17eff815-0d43-274d-8f6b-5af932dd0082}">
+        <p14:section name="Foundations" id="{17EFF815-0D43-274D-8F6B-5AF932DD0082}">
           <p14:sldIdLst>
             <p14:sldId id="259"/>
             <p14:sldId id="260"/>
             <p14:sldId id="261"/>
           </p14:sldIdLst>
         </p14:section>
-        <p14:section name="The mathematics" id="{d99cbdc8-7cc9-3ff9-9bcc-7c73ecaa16ad}">
+        <p14:section name="The mathematics" id="{D99CBDC8-7CC9-3FF9-9BCC-7C73ECAA16AD}">
           <p14:sldIdLst>
             <p14:sldId id="262"/>
             <p14:sldId id="263"/>
@@ -147,13 +147,13 @@
             <p14:sldId id="267"/>
           </p14:sldIdLst>
         </p14:section>
-        <p14:section name="Devices and proof" id="{42f42833-91db-7a25-78fb-49f08f0a7989}">
+        <p14:section name="Devices and proof" id="{42F42833-91DB-7A25-78FB-49F08F0A7989}">
           <p14:sldIdLst>
             <p14:sldId id="268"/>
             <p14:sldId id="269"/>
           </p14:sldIdLst>
         </p14:section>
-        <p14:section name="Engineering and close" id="{1457ffed-52d6-d321-fa30-d4b93e9e2b69}">
+        <p14:section name="Engineering and close" id="{1457FFED-52D6-D321-FA30-D4B93E9E2B69}">
           <p14:sldIdLst>
             <p14:sldId id="270"/>
             <p14:sldId id="271"/>
@@ -170,9 +170,11 @@
 </file>
 
 <file path=ppt/charts/chart1.xml><?xml version="1.0" encoding="utf-8"?>
-<c:chartSpace xmlns:c="http://schemas.openxmlformats.org/drawingml/2006/chart" xmlns:a="http://schemas.openxmlformats.org/drawingml/2006/main" xmlns:r="http://schemas.openxmlformats.org/officeDocument/2006/relationships">
+<c:chartSpace xmlns:c="http://schemas.openxmlformats.org/drawingml/2006/chart" xmlns:a="http://schemas.openxmlformats.org/drawingml/2006/main" xmlns:r="http://schemas.openxmlformats.org/officeDocument/2006/relationships" xmlns:c16r2="http://schemas.microsoft.com/office/drawing/2015/06/chart">
   <c:date1904 val="0"/>
+  <c:lang val="en-US"/>
   <c:roundedCorners val="1"/>
+  <c:style val="2"/>
   <c:chart>
     <c:title>
       <c:tx>
@@ -189,7 +191,7 @@
               </a:defRPr>
             </a:pPr>
             <a:r>
-              <a:rPr sz="1300" b="0" i="0" u="none" strike="noStrike">
+              <a:rPr lang="en-GB" sz="1300" b="0" i="0" u="none" strike="noStrike">
                 <a:solidFill>
                   <a:srgbClr val="1C1C1C"/>
                 </a:solidFill>
@@ -200,13 +202,13 @@
           </a:p>
         </c:rich>
       </c:tx>
-      <c:layout/>
       <c:overlay val="0"/>
     </c:title>
     <c:autoTitleDeleted val="0"/>
     <c:plotArea>
       <c:layout/>
       <c:lineChart>
+        <c:grouping val="standard"/>
         <c:varyColors val="0"/>
         <c:ser>
           <c:idx val="0"/>
@@ -223,9 +225,6 @@
             </c:strRef>
           </c:tx>
           <c:spPr>
-            <a:solidFill>
-              <a:srgbClr val="1F5F7A"/>
-            </a:solidFill>
             <a:ln w="38100" cap="flat">
               <a:solidFill>
                 <a:srgbClr val="1F5F7A"/>
@@ -235,31 +234,6 @@
             </a:ln>
             <a:effectLst/>
           </c:spPr>
-          <c:invertIfNegative val="0"/>
-          <c:dLbls>
-            <c:numFmt formatCode="#,##0" sourceLinked="0"/>
-            <c:txPr>
-              <a:bodyPr/>
-              <a:lstStyle/>
-              <a:p>
-                <a:pPr>
-                  <a:defRPr b="0" i="0" strike="noStrike" sz="1200" u="none">
-                    <a:solidFill>
-                      <a:srgbClr val="000000"/>
-                    </a:solidFill>
-                    <a:latin typeface="Arial"/>
-                  </a:defRPr>
-                </a:pPr>
-              </a:p>
-            </c:txPr>
-            <c:showLegendKey val="0"/>
-            <c:showVal val="0"/>
-            <c:showCatName val="0"/>
-            <c:showSerName val="0"/>
-            <c:showPercent val="0"/>
-            <c:showBubbleSize val="0"/>
-            <c:showLeaderLines val="0"/>
-          </c:dLbls>
           <c:marker>
             <c:symbol val="circle"/>
             <c:size val="7"/>
@@ -278,41 +252,39 @@
             </c:spPr>
           </c:marker>
           <c:cat>
-            <c:multiLvlStrRef>
+            <c:strRef>
               <c:f>Sheet1!$A$2:$A$10</c:f>
-              <c:multiLvlStrCache>
+              <c:strCache>
                 <c:ptCount val="9"/>
-                <c:lvl>
-                  <c:pt idx="0">
-                    <c:v>10</c:v>
-                  </c:pt>
-                  <c:pt idx="1">
-                    <c:v>32</c:v>
-                  </c:pt>
-                  <c:pt idx="2">
-                    <c:v>100</c:v>
-                  </c:pt>
-                  <c:pt idx="3">
-                    <c:v>316</c:v>
-                  </c:pt>
-                  <c:pt idx="4">
-                    <c:v>1k</c:v>
-                  </c:pt>
-                  <c:pt idx="5">
-                    <c:v>3.2k</c:v>
-                  </c:pt>
-                  <c:pt idx="6">
-                    <c:v>10k</c:v>
-                  </c:pt>
-                  <c:pt idx="7">
-                    <c:v>32k</c:v>
-                  </c:pt>
-                  <c:pt idx="8">
-                    <c:v>100k</c:v>
-                  </c:pt>
-                </c:lvl>
-              </c:multiLvlStrCache>
-            </c:multiLvlStrRef>
+                <c:pt idx="0">
+                  <c:v>10</c:v>
+                </c:pt>
+                <c:pt idx="1">
+                  <c:v>32</c:v>
+                </c:pt>
+                <c:pt idx="2">
+                  <c:v>100</c:v>
+                </c:pt>
+                <c:pt idx="3">
+                  <c:v>316</c:v>
+                </c:pt>
+                <c:pt idx="4">
+                  <c:v>1k</c:v>
+                </c:pt>
+                <c:pt idx="5">
+                  <c:v>3.2k</c:v>
+                </c:pt>
+                <c:pt idx="6">
+                  <c:v>10k</c:v>
+                </c:pt>
+                <c:pt idx="7">
+                  <c:v>32k</c:v>
+                </c:pt>
+                <c:pt idx="8">
+                  <c:v>100k</c:v>
+                </c:pt>
+              </c:strCache>
+            </c:strRef>
           </c:cat>
           <c:val>
             <c:numRef>
@@ -351,35 +323,24 @@
             </c:numRef>
           </c:val>
           <c:smooth val="0"/>
+          <c:extLst>
+            <c:ext xmlns:c16="http://schemas.microsoft.com/office/drawing/2014/chart" uri="{C3380CC4-5D6E-409C-BE32-E72D297353CC}">
+              <c16:uniqueId val="{00000000-5188-4394-B219-77F262C06B09}"/>
+            </c:ext>
+          </c:extLst>
         </c:ser>
         <c:dLbls>
-          <c:numFmt formatCode="#,##0" sourceLinked="0"/>
-          <c:txPr>
-            <a:bodyPr/>
-            <a:lstStyle/>
-            <a:p>
-              <a:pPr>
-                <a:defRPr b="0" i="0" strike="noStrike" sz="1200" u="none">
-                  <a:solidFill>
-                    <a:srgbClr val="000000"/>
-                  </a:solidFill>
-                  <a:latin typeface="Arial"/>
-                </a:defRPr>
-              </a:pPr>
-            </a:p>
-          </c:txPr>
           <c:showLegendKey val="0"/>
           <c:showVal val="0"/>
           <c:showCatName val="0"/>
           <c:showSerName val="0"/>
           <c:showPercent val="0"/>
           <c:showBubbleSize val="0"/>
-          <c:showLeaderLines val="0"/>
         </c:dLbls>
         <c:marker val="1"/>
+        <c:smooth val="0"/>
         <c:axId val="2094734554"/>
         <c:axId val="2094734552"/>
-        <c:axId val="2094734556"/>
       </c:lineChart>
       <c:catAx>
         <c:axId val="2094734554"/>
@@ -403,7 +364,7 @@
                   </a:defRPr>
                 </a:pPr>
                 <a:r>
-                  <a:rPr sz="1100" b="0" i="0" u="none" strike="noStrike">
+                  <a:rPr lang="en-AU" sz="1100" b="0" i="0" u="none" strike="noStrike">
                     <a:solidFill>
                       <a:srgbClr val="66696B"/>
                     </a:solidFill>
@@ -414,7 +375,6 @@
               </a:p>
             </c:rich>
           </c:tx>
-          <c:layout/>
           <c:overlay val="0"/>
         </c:title>
         <c:numFmt formatCode="General" sourceLinked="1"/>
@@ -449,6 +409,7 @@
         <c:crosses val="autoZero"/>
         <c:auto val="1"/>
         <c:lblAlgn val="ctr"/>
+        <c:lblOffset val="100"/>
         <c:noMultiLvlLbl val="1"/>
       </c:catAx>
       <c:valAx>
@@ -486,7 +447,7 @@
                   </a:defRPr>
                 </a:pPr>
                 <a:r>
-                  <a:rPr sz="1100" b="0" i="0" u="none" strike="noStrike">
+                  <a:rPr lang="en-AU" sz="1100" b="0" i="0" u="none" strike="noStrike">
                     <a:solidFill>
                       <a:srgbClr val="66696B"/>
                     </a:solidFill>
@@ -497,7 +458,6 @@
               </a:p>
             </c:rich>
           </c:tx>
-          <c:layout/>
           <c:overlay val="0"/>
         </c:title>
         <c:numFmt formatCode="General" sourceLinked="0"/>
@@ -543,6 +503,7 @@
     </c:plotArea>
     <c:plotVisOnly val="1"/>
     <c:dispBlanksAs val="span"/>
+    <c:showDLblsOverMax val="1"/>
   </c:chart>
   <c:spPr>
     <a:noFill/>
@@ -558,9 +519,11 @@
 </file>
 
 <file path=ppt/charts/chart2.xml><?xml version="1.0" encoding="utf-8"?>
-<c:chartSpace xmlns:c="http://schemas.openxmlformats.org/drawingml/2006/chart" xmlns:a="http://schemas.openxmlformats.org/drawingml/2006/main" xmlns:r="http://schemas.openxmlformats.org/officeDocument/2006/relationships">
+<c:chartSpace xmlns:c="http://schemas.openxmlformats.org/drawingml/2006/chart" xmlns:a="http://schemas.openxmlformats.org/drawingml/2006/main" xmlns:r="http://schemas.openxmlformats.org/officeDocument/2006/relationships" xmlns:c16r2="http://schemas.microsoft.com/office/drawing/2015/06/chart">
   <c:date1904 val="0"/>
+  <c:lang val="en-US"/>
   <c:roundedCorners val="1"/>
+  <c:style val="2"/>
   <c:chart>
     <c:title>
       <c:tx>
@@ -577,7 +540,7 @@
               </a:defRPr>
             </a:pPr>
             <a:r>
-              <a:rPr sz="1300" b="0" i="0" u="none" strike="noStrike">
+              <a:rPr lang="en-GB" sz="1300" b="0" i="0" u="none" strike="noStrike">
                 <a:solidFill>
                   <a:srgbClr val="1C1C1C"/>
                 </a:solidFill>
@@ -588,13 +551,13 @@
           </a:p>
         </c:rich>
       </c:tx>
-      <c:layout/>
       <c:overlay val="0"/>
     </c:title>
     <c:autoTitleDeleted val="0"/>
     <c:plotArea>
       <c:layout/>
       <c:lineChart>
+        <c:grouping val="standard"/>
         <c:varyColors val="0"/>
         <c:ser>
           <c:idx val="0"/>
@@ -611,9 +574,6 @@
             </c:strRef>
           </c:tx>
           <c:spPr>
-            <a:solidFill>
-              <a:srgbClr val="1F5F7A"/>
-            </a:solidFill>
             <a:ln w="38100" cap="flat">
               <a:solidFill>
                 <a:srgbClr val="1F5F7A"/>
@@ -623,31 +583,6 @@
             </a:ln>
             <a:effectLst/>
           </c:spPr>
-          <c:invertIfNegative val="0"/>
-          <c:dLbls>
-            <c:numFmt formatCode="#,##0" sourceLinked="0"/>
-            <c:txPr>
-              <a:bodyPr/>
-              <a:lstStyle/>
-              <a:p>
-                <a:pPr>
-                  <a:defRPr b="0" i="0" strike="noStrike" sz="1200" u="none">
-                    <a:solidFill>
-                      <a:srgbClr val="000000"/>
-                    </a:solidFill>
-                    <a:latin typeface="Arial"/>
-                  </a:defRPr>
-                </a:pPr>
-              </a:p>
-            </c:txPr>
-            <c:showLegendKey val="0"/>
-            <c:showVal val="0"/>
-            <c:showCatName val="0"/>
-            <c:showSerName val="0"/>
-            <c:showPercent val="0"/>
-            <c:showBubbleSize val="0"/>
-            <c:showLeaderLines val="0"/>
-          </c:dLbls>
           <c:marker>
             <c:symbol val="circle"/>
             <c:size val="8"/>
@@ -666,26 +601,24 @@
             </c:spPr>
           </c:marker>
           <c:cat>
-            <c:multiLvlStrRef>
+            <c:strRef>
               <c:f>Sheet1!$A$2:$A$5</c:f>
-              <c:multiLvlStrCache>
+              <c:strCache>
                 <c:ptCount val="4"/>
-                <c:lvl>
-                  <c:pt idx="0">
-                    <c:v>200 µs</c:v>
-                  </c:pt>
-                  <c:pt idx="1">
-                    <c:v>100 µs</c:v>
-                  </c:pt>
-                  <c:pt idx="2">
-                    <c:v>50 µs</c:v>
-                  </c:pt>
-                  <c:pt idx="3">
-                    <c:v>10 µs</c:v>
-                  </c:pt>
-                </c:lvl>
-              </c:multiLvlStrCache>
-            </c:multiLvlStrRef>
+                <c:pt idx="0">
+                  <c:v>200 µs</c:v>
+                </c:pt>
+                <c:pt idx="1">
+                  <c:v>100 µs</c:v>
+                </c:pt>
+                <c:pt idx="2">
+                  <c:v>50 µs</c:v>
+                </c:pt>
+                <c:pt idx="3">
+                  <c:v>10 µs</c:v>
+                </c:pt>
+              </c:strCache>
+            </c:strRef>
           </c:cat>
           <c:val>
             <c:numRef>
@@ -694,21 +627,26 @@
                 <c:formatCode>General</c:formatCode>
                 <c:ptCount val="4"/>
                 <c:pt idx="0">
-                  <c:v>0.034</c:v>
+                  <c:v>3.4000000000000002E-2</c:v>
                 </c:pt>
                 <c:pt idx="1">
-                  <c:v>0.0177</c:v>
+                  <c:v>1.77E-2</c:v>
                 </c:pt>
                 <c:pt idx="2">
-                  <c:v>0.00901</c:v>
+                  <c:v>9.0100000000000006E-3</c:v>
                 </c:pt>
                 <c:pt idx="3">
-                  <c:v>0.00183</c:v>
+                  <c:v>1.83E-3</c:v>
                 </c:pt>
               </c:numCache>
             </c:numRef>
           </c:val>
           <c:smooth val="0"/>
+          <c:extLst>
+            <c:ext xmlns:c16="http://schemas.microsoft.com/office/drawing/2014/chart" uri="{C3380CC4-5D6E-409C-BE32-E72D297353CC}">
+              <c16:uniqueId val="{00000000-02EA-472C-BF49-285C9D740B83}"/>
+            </c:ext>
+          </c:extLst>
         </c:ser>
         <c:ser>
           <c:idx val="1"/>
@@ -725,9 +663,6 @@
             </c:strRef>
           </c:tx>
           <c:spPr>
-            <a:solidFill>
-              <a:srgbClr val="9B2C2C"/>
-            </a:solidFill>
             <a:ln w="38100" cap="flat">
               <a:solidFill>
                 <a:srgbClr val="9B2C2C"/>
@@ -737,31 +672,6 @@
             </a:ln>
             <a:effectLst/>
           </c:spPr>
-          <c:invertIfNegative val="0"/>
-          <c:dLbls>
-            <c:numFmt formatCode="#,##0" sourceLinked="0"/>
-            <c:txPr>
-              <a:bodyPr/>
-              <a:lstStyle/>
-              <a:p>
-                <a:pPr>
-                  <a:defRPr b="0" i="0" strike="noStrike" sz="1200" u="none">
-                    <a:solidFill>
-                      <a:srgbClr val="000000"/>
-                    </a:solidFill>
-                    <a:latin typeface="Arial"/>
-                  </a:defRPr>
-                </a:pPr>
-              </a:p>
-            </c:txPr>
-            <c:showLegendKey val="0"/>
-            <c:showVal val="0"/>
-            <c:showCatName val="0"/>
-            <c:showSerName val="0"/>
-            <c:showPercent val="0"/>
-            <c:showBubbleSize val="0"/>
-            <c:showLeaderLines val="0"/>
-          </c:dLbls>
           <c:marker>
             <c:symbol val="circle"/>
             <c:size val="8"/>
@@ -780,26 +690,24 @@
             </c:spPr>
           </c:marker>
           <c:cat>
-            <c:multiLvlStrRef>
+            <c:strRef>
               <c:f>Sheet1!$A$2:$A$5</c:f>
-              <c:multiLvlStrCache>
+              <c:strCache>
                 <c:ptCount val="4"/>
-                <c:lvl>
-                  <c:pt idx="0">
-                    <c:v>200 µs</c:v>
-                  </c:pt>
-                  <c:pt idx="1">
-                    <c:v>100 µs</c:v>
-                  </c:pt>
-                  <c:pt idx="2">
-                    <c:v>50 µs</c:v>
-                  </c:pt>
-                  <c:pt idx="3">
-                    <c:v>10 µs</c:v>
-                  </c:pt>
-                </c:lvl>
-              </c:multiLvlStrCache>
-            </c:multiLvlStrRef>
+                <c:pt idx="0">
+                  <c:v>200 µs</c:v>
+                </c:pt>
+                <c:pt idx="1">
+                  <c:v>100 µs</c:v>
+                </c:pt>
+                <c:pt idx="2">
+                  <c:v>50 µs</c:v>
+                </c:pt>
+                <c:pt idx="3">
+                  <c:v>10 µs</c:v>
+                </c:pt>
+              </c:strCache>
+            </c:strRef>
           </c:cat>
           <c:val>
             <c:numRef>
@@ -808,50 +716,39 @@
                 <c:formatCode>General</c:formatCode>
                 <c:ptCount val="4"/>
                 <c:pt idx="0">
-                  <c:v>0.00123</c:v>
+                  <c:v>1.23E-3</c:v>
                 </c:pt>
                 <c:pt idx="1">
-                  <c:v>0.000307</c:v>
+                  <c:v>3.0699999999999998E-4</c:v>
                 </c:pt>
                 <c:pt idx="2">
-                  <c:v>0.0000767</c:v>
+                  <c:v>7.6699999999999994E-5</c:v>
                 </c:pt>
                 <c:pt idx="3">
-                  <c:v>0.00000307</c:v>
+                  <c:v>3.0699999999999998E-6</c:v>
                 </c:pt>
               </c:numCache>
             </c:numRef>
           </c:val>
           <c:smooth val="0"/>
+          <c:extLst>
+            <c:ext xmlns:c16="http://schemas.microsoft.com/office/drawing/2014/chart" uri="{C3380CC4-5D6E-409C-BE32-E72D297353CC}">
+              <c16:uniqueId val="{00000001-02EA-472C-BF49-285C9D740B83}"/>
+            </c:ext>
+          </c:extLst>
         </c:ser>
         <c:dLbls>
-          <c:numFmt formatCode="#,##0" sourceLinked="0"/>
-          <c:txPr>
-            <a:bodyPr/>
-            <a:lstStyle/>
-            <a:p>
-              <a:pPr>
-                <a:defRPr b="0" i="0" strike="noStrike" sz="1200" u="none">
-                  <a:solidFill>
-                    <a:srgbClr val="000000"/>
-                  </a:solidFill>
-                  <a:latin typeface="Arial"/>
-                </a:defRPr>
-              </a:pPr>
-            </a:p>
-          </c:txPr>
           <c:showLegendKey val="0"/>
           <c:showVal val="0"/>
           <c:showCatName val="0"/>
           <c:showSerName val="0"/>
           <c:showPercent val="0"/>
           <c:showBubbleSize val="0"/>
-          <c:showLeaderLines val="0"/>
         </c:dLbls>
         <c:marker val="1"/>
+        <c:smooth val="0"/>
         <c:axId val="2094734554"/>
         <c:axId val="2094734552"/>
-        <c:axId val="2094734556"/>
       </c:lineChart>
       <c:catAx>
         <c:axId val="2094734554"/>
@@ -892,6 +789,7 @@
         <c:crosses val="autoZero"/>
         <c:auto val="1"/>
         <c:lblAlgn val="ctr"/>
+        <c:lblOffset val="100"/>
         <c:noMultiLvlLbl val="1"/>
       </c:catAx>
       <c:valAx>
@@ -900,7 +798,7 @@
           <c:logBase val="10"/>
           <c:orientation val="minMax"/>
           <c:max val="0.1"/>
-          <c:min val="0.000001"/>
+          <c:min val="9.9999999999999995E-7"/>
         </c:scaling>
         <c:delete val="0"/>
         <c:axPos val="l"/>
@@ -977,6 +875,7 @@
     </c:legend>
     <c:plotVisOnly val="1"/>
     <c:dispBlanksAs val="span"/>
+    <c:showDLblsOverMax val="1"/>
   </c:chart>
   <c:spPr>
     <a:noFill/>
@@ -992,9 +891,11 @@
 </file>
 
 <file path=ppt/charts/chart3.xml><?xml version="1.0" encoding="utf-8"?>
-<c:chartSpace xmlns:c="http://schemas.openxmlformats.org/drawingml/2006/chart" xmlns:a="http://schemas.openxmlformats.org/drawingml/2006/main" xmlns:r="http://schemas.openxmlformats.org/officeDocument/2006/relationships">
+<c:chartSpace xmlns:c="http://schemas.openxmlformats.org/drawingml/2006/chart" xmlns:a="http://schemas.openxmlformats.org/drawingml/2006/main" xmlns:r="http://schemas.openxmlformats.org/officeDocument/2006/relationships" xmlns:c16r2="http://schemas.microsoft.com/office/drawing/2015/06/chart">
   <c:date1904 val="0"/>
+  <c:lang val="en-US"/>
   <c:roundedCorners val="1"/>
+  <c:style val="2"/>
   <c:chart>
     <c:title>
       <c:tx>
@@ -1011,7 +912,7 @@
               </a:defRPr>
             </a:pPr>
             <a:r>
-              <a:rPr sz="1300" b="0" i="0" u="none" strike="noStrike">
+              <a:rPr lang="en-AU" sz="1300" b="0" i="0" u="none" strike="noStrike">
                 <a:solidFill>
                   <a:srgbClr val="1C1C1C"/>
                 </a:solidFill>
@@ -1022,13 +923,13 @@
           </a:p>
         </c:rich>
       </c:tx>
-      <c:layout/>
       <c:overlay val="0"/>
     </c:title>
     <c:autoTitleDeleted val="0"/>
     <c:plotArea>
       <c:layout/>
       <c:lineChart>
+        <c:grouping val="standard"/>
         <c:varyColors val="0"/>
         <c:ser>
           <c:idx val="0"/>
@@ -1045,9 +946,6 @@
             </c:strRef>
           </c:tx>
           <c:spPr>
-            <a:solidFill>
-              <a:srgbClr val="9B2C2C"/>
-            </a:solidFill>
             <a:ln w="38100" cap="flat">
               <a:solidFill>
                 <a:srgbClr val="9B2C2C"/>
@@ -1057,31 +955,6 @@
             </a:ln>
             <a:effectLst/>
           </c:spPr>
-          <c:invertIfNegative val="0"/>
-          <c:dLbls>
-            <c:numFmt formatCode="#,##0" sourceLinked="0"/>
-            <c:txPr>
-              <a:bodyPr/>
-              <a:lstStyle/>
-              <a:p>
-                <a:pPr>
-                  <a:defRPr b="0" i="0" strike="noStrike" sz="1200" u="none">
-                    <a:solidFill>
-                      <a:srgbClr val="000000"/>
-                    </a:solidFill>
-                    <a:latin typeface="Arial"/>
-                  </a:defRPr>
-                </a:pPr>
-              </a:p>
-            </c:txPr>
-            <c:showLegendKey val="0"/>
-            <c:showVal val="0"/>
-            <c:showCatName val="0"/>
-            <c:showSerName val="0"/>
-            <c:showPercent val="0"/>
-            <c:showBubbleSize val="0"/>
-            <c:showLeaderLines val="0"/>
-          </c:dLbls>
           <c:marker>
             <c:symbol val="circle"/>
             <c:size val="8"/>
@@ -1100,47 +973,45 @@
             </c:spPr>
           </c:marker>
           <c:cat>
-            <c:multiLvlStrRef>
+            <c:strRef>
               <c:f>Sheet1!$A$2:$A$12</c:f>
-              <c:multiLvlStrCache>
+              <c:strCache>
                 <c:ptCount val="11"/>
-                <c:lvl>
-                  <c:pt idx="0">
-                    <c:v>1</c:v>
-                  </c:pt>
-                  <c:pt idx="1">
-                    <c:v>2</c:v>
-                  </c:pt>
-                  <c:pt idx="2">
-                    <c:v>3</c:v>
-                  </c:pt>
-                  <c:pt idx="3">
-                    <c:v>4</c:v>
-                  </c:pt>
-                  <c:pt idx="4">
-                    <c:v>5</c:v>
-                  </c:pt>
-                  <c:pt idx="5">
-                    <c:v>6</c:v>
-                  </c:pt>
-                  <c:pt idx="6">
-                    <c:v>7</c:v>
-                  </c:pt>
-                  <c:pt idx="7">
-                    <c:v>8</c:v>
-                  </c:pt>
-                  <c:pt idx="8">
-                    <c:v>9</c:v>
-                  </c:pt>
-                  <c:pt idx="9">
-                    <c:v>10</c:v>
-                  </c:pt>
-                  <c:pt idx="10">
-                    <c:v>11</c:v>
-                  </c:pt>
-                </c:lvl>
-              </c:multiLvlStrCache>
-            </c:multiLvlStrRef>
+                <c:pt idx="0">
+                  <c:v>1</c:v>
+                </c:pt>
+                <c:pt idx="1">
+                  <c:v>2</c:v>
+                </c:pt>
+                <c:pt idx="2">
+                  <c:v>3</c:v>
+                </c:pt>
+                <c:pt idx="3">
+                  <c:v>4</c:v>
+                </c:pt>
+                <c:pt idx="4">
+                  <c:v>5</c:v>
+                </c:pt>
+                <c:pt idx="5">
+                  <c:v>6</c:v>
+                </c:pt>
+                <c:pt idx="6">
+                  <c:v>7</c:v>
+                </c:pt>
+                <c:pt idx="7">
+                  <c:v>8</c:v>
+                </c:pt>
+                <c:pt idx="8">
+                  <c:v>9</c:v>
+                </c:pt>
+                <c:pt idx="9">
+                  <c:v>10</c:v>
+                </c:pt>
+                <c:pt idx="10">
+                  <c:v>11</c:v>
+                </c:pt>
+              </c:strCache>
+            </c:strRef>
           </c:cat>
           <c:val>
             <c:numRef>
@@ -1155,65 +1026,54 @@
                   <c:v>5</c:v>
                 </c:pt>
                 <c:pt idx="2">
-                  <c:v>4.999933</c:v>
+                  <c:v>4.9999330000000004</c:v>
                 </c:pt>
                 <c:pt idx="3">
-                  <c:v>4.988006</c:v>
+                  <c:v>4.9880060000000004</c:v>
                 </c:pt>
                 <c:pt idx="4">
-                  <c:v>3.578447</c:v>
+                  <c:v>3.5784470000000002</c:v>
                 </c:pt>
                 <c:pt idx="5">
-                  <c:v>0.715887</c:v>
+                  <c:v>0.71588700000000005</c:v>
                 </c:pt>
                 <c:pt idx="6">
-                  <c:v>0.700474</c:v>
+                  <c:v>0.70047400000000004</c:v>
                 </c:pt>
                 <c:pt idx="7">
-                  <c:v>0.693601</c:v>
+                  <c:v>0.69360100000000002</c:v>
                 </c:pt>
                 <c:pt idx="8">
-                  <c:v>0.692514</c:v>
+                  <c:v>0.69251399999999996</c:v>
                 </c:pt>
                 <c:pt idx="9">
-                  <c:v>0.69249</c:v>
+                  <c:v>0.69249000000000005</c:v>
                 </c:pt>
                 <c:pt idx="10">
-                  <c:v>0.69249</c:v>
+                  <c:v>0.69249000000000005</c:v>
                 </c:pt>
               </c:numCache>
             </c:numRef>
           </c:val>
           <c:smooth val="0"/>
+          <c:extLst>
+            <c:ext xmlns:c16="http://schemas.microsoft.com/office/drawing/2014/chart" uri="{C3380CC4-5D6E-409C-BE32-E72D297353CC}">
+              <c16:uniqueId val="{00000000-8867-4B9C-BA32-EA224377FE87}"/>
+            </c:ext>
+          </c:extLst>
         </c:ser>
         <c:dLbls>
-          <c:numFmt formatCode="#,##0" sourceLinked="0"/>
-          <c:txPr>
-            <a:bodyPr/>
-            <a:lstStyle/>
-            <a:p>
-              <a:pPr>
-                <a:defRPr b="0" i="0" strike="noStrike" sz="1200" u="none">
-                  <a:solidFill>
-                    <a:srgbClr val="000000"/>
-                  </a:solidFill>
-                  <a:latin typeface="Arial"/>
-                </a:defRPr>
-              </a:pPr>
-            </a:p>
-          </c:txPr>
           <c:showLegendKey val="0"/>
           <c:showVal val="0"/>
           <c:showCatName val="0"/>
           <c:showSerName val="0"/>
           <c:showPercent val="0"/>
           <c:showBubbleSize val="0"/>
-          <c:showLeaderLines val="0"/>
         </c:dLbls>
         <c:marker val="1"/>
+        <c:smooth val="0"/>
         <c:axId val="2094734554"/>
         <c:axId val="2094734552"/>
-        <c:axId val="2094734556"/>
       </c:lineChart>
       <c:catAx>
         <c:axId val="2094734554"/>
@@ -1237,7 +1097,7 @@
                   </a:defRPr>
                 </a:pPr>
                 <a:r>
-                  <a:rPr sz="1000" b="0" i="0" u="none" strike="noStrike">
+                  <a:rPr lang="en-AU" sz="1000" b="0" i="0" u="none" strike="noStrike">
                     <a:solidFill>
                       <a:srgbClr val="66696B"/>
                     </a:solidFill>
@@ -1248,7 +1108,6 @@
               </a:p>
             </c:rich>
           </c:tx>
-          <c:layout/>
           <c:overlay val="0"/>
         </c:title>
         <c:numFmt formatCode="General" sourceLinked="1"/>
@@ -1283,6 +1142,7 @@
         <c:crosses val="autoZero"/>
         <c:auto val="1"/>
         <c:lblAlgn val="ctr"/>
+        <c:lblOffset val="100"/>
         <c:noMultiLvlLbl val="1"/>
       </c:catAx>
       <c:valAx>
@@ -1348,6 +1208,7 @@
     </c:plotArea>
     <c:plotVisOnly val="1"/>
     <c:dispBlanksAs val="span"/>
+    <c:showDLblsOverMax val="1"/>
   </c:chart>
   <c:spPr>
     <a:noFill/>
@@ -1384,234 +1245,10 @@
           <a:chExt cx="0" cy="0"/>
         </a:xfrm>
       </p:grpSpPr>
-      <p:sp>
-        <p:nvSpPr>
-          <p:cNvPr id="2" name="Header Placeholder 1"/>
-          <p:cNvSpPr>
-            <a:spLocks noGrp="1"/>
-          </p:cNvSpPr>
-          <p:nvPr>
-            <p:ph type="hdr" sz="quarter"/>
-          </p:nvPr>
-        </p:nvSpPr>
-        <p:spPr>
-          <a:xfrm>
-            <a:off x="0" y="0"/>
-            <a:ext cx="2971800" cy="458788"/>
-          </a:xfrm>
-          <a:prstGeom prst="rect">
-            <a:avLst/>
-          </a:prstGeom>
-        </p:spPr>
-        <p:txBody>
-          <a:bodyPr vert="horz" lIns="91440" tIns="45720" rIns="91440" bIns="45720" rtlCol="0"/>
-          <a:lstStyle>
-            <a:lvl1pPr algn="l">
-              <a:defRPr sz="1200"/>
-            </a:lvl1pPr>
-          </a:lstStyle>
-          <a:p>
-            <a:endParaRPr lang="en-US"/>
-          </a:p>
-        </p:txBody>
-      </p:sp>
-      <p:sp>
-        <p:nvSpPr>
-          <p:cNvPr id="3" name="Date Placeholder 2"/>
-          <p:cNvSpPr>
-            <a:spLocks noGrp="1"/>
-          </p:cNvSpPr>
-          <p:nvPr>
-            <p:ph type="dt" idx="1"/>
-          </p:nvPr>
-        </p:nvSpPr>
-        <p:spPr>
-          <a:xfrm>
-            <a:off x="3884613" y="0"/>
-            <a:ext cx="2971800" cy="458788"/>
-          </a:xfrm>
-          <a:prstGeom prst="rect">
-            <a:avLst/>
-          </a:prstGeom>
-        </p:spPr>
-        <p:txBody>
-          <a:bodyPr vert="horz" lIns="91440" tIns="45720" rIns="91440" bIns="45720" rtlCol="0"/>
-          <a:lstStyle>
-            <a:lvl1pPr algn="r">
-              <a:defRPr sz="1200"/>
-            </a:lvl1pPr>
-          </a:lstStyle>
-          <a:p>
-            <a:fld id="{5282F153-3F37-0F45-9E97-73ACFA13230C}" type="datetimeFigureOut">
-              <a:rPr lang="en-US"/>
-              <a:t>7/23/19</a:t>
-            </a:fld>
-            <a:endParaRPr lang="en-US"/>
-          </a:p>
-        </p:txBody>
-      </p:sp>
-      <p:sp>
-        <p:nvSpPr>
-          <p:cNvPr id="4" name="Slide Image Placeholder 3"/>
-          <p:cNvSpPr>
-            <a:spLocks noGrp="1" noRot="1" noChangeAspect="1"/>
-          </p:cNvSpPr>
-          <p:nvPr>
-            <p:ph type="sldImg" idx="2"/>
-          </p:nvPr>
-        </p:nvSpPr>
-        <p:spPr>
-          <a:xfrm>
-            <a:off x="685800" y="1143000"/>
-            <a:ext cx="5486400" cy="3086100"/>
-          </a:xfrm>
-          <a:prstGeom prst="rect">
-            <a:avLst/>
-          </a:prstGeom>
-          <a:noFill/>
-          <a:ln w="12700">
-            <a:solidFill>
-              <a:prstClr val="black"/>
-            </a:solidFill>
-          </a:ln>
-        </p:spPr>
-        <p:txBody>
-          <a:bodyPr vert="horz" lIns="91440" tIns="45720" rIns="91440" bIns="45720" rtlCol="0" anchor="ctr"/>
-          <a:lstStyle/>
-          <a:p>
-            <a:endParaRPr lang="en-US"/>
-          </a:p>
-        </p:txBody>
-      </p:sp>
-      <p:sp>
-        <p:nvSpPr>
-          <p:cNvPr id="5" name="Notes Placeholder 4"/>
-          <p:cNvSpPr>
-            <a:spLocks noGrp="1"/>
-          </p:cNvSpPr>
-          <p:nvPr>
-            <p:ph type="body" sz="quarter" idx="3"/>
-          </p:nvPr>
-        </p:nvSpPr>
-        <p:spPr>
-          <a:xfrm>
-            <a:off x="685800" y="4400550"/>
-            <a:ext cx="5486400" cy="3600450"/>
-          </a:xfrm>
-          <a:prstGeom prst="rect">
-            <a:avLst/>
-          </a:prstGeom>
-        </p:spPr>
-        <p:txBody>
-          <a:bodyPr vert="horz" lIns="91440" tIns="45720" rIns="91440" bIns="45720" rtlCol="0"/>
-          <a:lstStyle/>
-          <a:p>
-            <a:pPr lvl="0"/>
-            <a:r>
-              <a:rPr lang="en-US"/>
-              <a:t>Click to edit Master text styles</a:t>
-            </a:r>
-          </a:p>
-          <a:p>
-            <a:pPr lvl="1"/>
-            <a:r>
-              <a:rPr lang="en-US"/>
-              <a:t>Second level</a:t>
-            </a:r>
-          </a:p>
-          <a:p>
-            <a:pPr lvl="2"/>
-            <a:r>
-              <a:rPr lang="en-US"/>
-              <a:t>Third level</a:t>
-            </a:r>
-          </a:p>
-          <a:p>
-            <a:pPr lvl="3"/>
-            <a:r>
-              <a:rPr lang="en-US"/>
-              <a:t>Fourth level</a:t>
-            </a:r>
-          </a:p>
-          <a:p>
-            <a:pPr lvl="4"/>
-            <a:r>
-              <a:rPr lang="en-US"/>
-              <a:t>Fifth level</a:t>
-            </a:r>
-          </a:p>
-        </p:txBody>
-      </p:sp>
-      <p:sp>
-        <p:nvSpPr>
-          <p:cNvPr id="6" name="Footer Placeholder 5"/>
-          <p:cNvSpPr>
-            <a:spLocks noGrp="1"/>
-          </p:cNvSpPr>
-          <p:nvPr>
-            <p:ph type="ftr" sz="quarter" idx="4"/>
-          </p:nvPr>
-        </p:nvSpPr>
-        <p:spPr>
-          <a:xfrm>
-            <a:off x="0" y="8685213"/>
-            <a:ext cx="2971800" cy="458787"/>
-          </a:xfrm>
-          <a:prstGeom prst="rect">
-            <a:avLst/>
-          </a:prstGeom>
-        </p:spPr>
-        <p:txBody>
-          <a:bodyPr vert="horz" lIns="91440" tIns="45720" rIns="91440" bIns="45720" rtlCol="0" anchor="b"/>
-          <a:lstStyle>
-            <a:lvl1pPr algn="l">
-              <a:defRPr sz="1200"/>
-            </a:lvl1pPr>
-          </a:lstStyle>
-          <a:p>
-            <a:endParaRPr lang="en-US"/>
-          </a:p>
-        </p:txBody>
-      </p:sp>
-      <p:sp>
-        <p:nvSpPr>
-          <p:cNvPr id="7" name="Slide Number Placeholder 6"/>
-          <p:cNvSpPr>
-            <a:spLocks noGrp="1"/>
-          </p:cNvSpPr>
-          <p:nvPr>
-            <p:ph type="sldNum" sz="quarter" idx="5"/>
-          </p:nvPr>
-        </p:nvSpPr>
-        <p:spPr>
-          <a:xfrm>
-            <a:off x="3884613" y="8685213"/>
-            <a:ext cx="2971800" cy="458787"/>
-          </a:xfrm>
-          <a:prstGeom prst="rect">
-            <a:avLst/>
-          </a:prstGeom>
-        </p:spPr>
-        <p:txBody>
-          <a:bodyPr vert="horz" lIns="91440" tIns="45720" rIns="91440" bIns="45720" rtlCol="0" anchor="b"/>
-          <a:lstStyle>
-            <a:lvl1pPr algn="r">
-              <a:defRPr sz="1200"/>
-            </a:lvl1pPr>
-          </a:lstStyle>
-          <a:p>
-            <a:fld id="{CE5E9CC1-C706-0F49-92D6-E571CC5EEA8F}" type="slidenum">
-              <a:rPr lang="en-US"/>
-              <a:t>‹#›</a:t>
-            </a:fld>
-            <a:endParaRPr lang="en-US"/>
-          </a:p>
-        </p:txBody>
-      </p:sp>
     </p:spTree>
     <p:extLst>
       <p:ext uri="{BB962C8B-B14F-4D97-AF65-F5344CB8AC3E}">
-        <p14:creationId xmlns:p14="http://schemas.microsoft.com/office/powerpoint/2010/main" val="1024086991"/>
+        <p14:creationId xmlns:p14="http://schemas.microsoft.com/office/powerpoint/2010/main" val="244848399"/>
       </p:ext>
     </p:extLst>
   </p:cSld>
@@ -1762,7 +1399,6 @@
 Don't explain G, x or b yet. The next few slides cover them.
 Assumed background: KCL/KVL, Ohm's law, RC and LC behaviour, derivatives and integrals. Complex impedance, matrices and Newton's method are introduced from scratch.</a:t>
             </a:r>
-            <a:endParaRPr lang="en-US" dirty="0"/>
           </a:p>
         </p:txBody>
       </p:sp>
@@ -1860,7 +1496,6 @@
 Optional detail: when a pulse jumps between grid points, the trapezoid rule treats the jump as a ramp over the whole step, which delays the edge by half a step. With h = tau/10 the RC response at t = tau was 0.613 instead of 0.632, and 1 - e^(-0.95) = 0.613 is exactly what a half-step delay predicts.
 A transient simulation is a series of DC solves, where each one depends only on the one before it.</a:t>
             </a:r>
-            <a:endParaRPr lang="en-US" dirty="0"/>
           </a:p>
         </p:txBody>
       </p:sp>
@@ -1954,7 +1589,6 @@
 Stopping rule: every unknown changes by less than 1e-6 relative plus 1e-9 V absolute (1e-12 A for branch currents), and no limiting was applied in that iteration. Maximum 100 iterations.
 For civil and mechanical students: this is the Newton-Raphson iteration used in nonlinear structural analysis, with the tangent stiffness matrix playing the role of the Jacobian.</a:t>
             </a:r>
-            <a:endParaRPr lang="en-US" dirty="0"/>
           </a:p>
         </p:txBody>
       </p:sp>
@@ -2050,7 +1684,6 @@
 6. Step halving: a transient step that doesn't converge is retried as two half-steps, recursively, up to 12 times.
 Order tried: plain Newton from zero, then gmin stepping, then source stepping, then an error message that explains the likely cause, such as a missing bias path or a poor device model.</a:t>
             </a:r>
-            <a:endParaRPr lang="en-US" dirty="0"/>
           </a:p>
         </p:txBody>
       </p:sp>
@@ -2144,7 +1777,6 @@
 Common-emitter amplifier: Newton gives Ic = 1.3785 mA. By hand, gm = Ic/Vt = 53.3 mS and the mid-band gain is about gm x Rc = 53.3 mS x 3.3 kilohm = 175.98. The simulation gives 175.97 at 10 kHz with a phase of -179.5 degrees, so it's inverting.
 That is agreement to about 0.01 percent between a textbook formula and a nonlinear simulation, and it's the strongest single check in the talk.</a:t>
             </a:r>
-            <a:endParaRPr lang="en-US" dirty="0"/>
           </a:p>
         </p:txBody>
       </p:sp>
@@ -2237,7 +1869,6 @@
 There are also 28 automated tests that run in about 3 to 4 seconds. Re-run them before the talk (python -m unittest discover -s tests -t .) so the count is current.
 Limitation, which is on the slide: the results were compared with hand calculations and textbook formulas, not with another simulator such as ngspice or LTspice. If you have time before the talk, run three of the examples in LTspice or ngspice and show the same numbers; that would make this slide stronger.</a:t>
             </a:r>
-            <a:endParaRPr lang="en-US" dirty="0"/>
           </a:p>
         </p:txBody>
       </p:sp>
@@ -2322,7 +1953,11 @@
           <a:lstStyle/>
           <a:p>
             <a:r>
-              <a:rPr lang="en-US" dirty="0"/>
+              <a:rPr lang="en-US" dirty="0">
+                <a:solidFill>
+                  <a:schemeClr val="bg1"/>
+                </a:solidFill>
+              </a:rPr>
               <a:t>(About 1 minute)
 Pick two or three points here rather than covering everything: layering, immutability and testing.
 Left side, layering. The rule is that dependencies only point downward, so a lower layer never imports a higher one. When the project was first opened this rule was broken: the component module and the solver imported each other, and some import paths didn't exist, so nothing ran. Structural problems often show up first as unhelpful error messages. The fix was a restructure, not a typo fix. Because every analysis returns the same Solution shape (an axis plus a dictionary of voltages and currents), probes, tables, plots and CSV export were written once.
@@ -2331,7 +1966,6 @@
 On testing: use hand-calculable checks, add a regression test for each bug, and use mutation checking, which means putting a bug back deliberately to confirm the test fails.
 If there's time or a question, other examples: (a) the current-source stamp had the wrong sign, hidden because a ground pin is skipped, and the first regression test still passed with the bug present, which was found by putting the bug back; (b) a strengthened test failed on correct code because its expected value was wrong, so check the check; (c) the parser paired each statement with the next line's number, so error messages need testing too.</a:t>
             </a:r>
-            <a:endParaRPr lang="en-US" dirty="0"/>
           </a:p>
         </p:txBody>
       </p:sp>
@@ -2431,7 +2065,6 @@
 4. Error handling: change a resistor value to the word oops in a text editor, save, and press F5 in the window. The Messages tab names the line.
 Backups: if the window won't open, run python batch.py beforehand (it saves a graph for every example without a window) and put four images on backup slides. Keep a terminal ready for python cli.py examples/rc.cir. Re-run the test suite so the claim of 28 passing tests is current.</a:t>
             </a:r>
-            <a:endParaRPr lang="en-US" dirty="0"/>
           </a:p>
         </p:txBody>
       </p:sp>
@@ -2532,7 +2165,6 @@
 - What is stiffness? A circuit with very fast and very slow time constants forces a method to take tiny steps to stay stable. Backward Euler stays stable with large steps but is less accurate, and trapezoidal is more accurate but can ring.
 - What happens with a singular matrix? The error explains the likely cause: a loop of voltage sources or inductors, conflicting ideal sources, a net with no path to ground, or a cut-set of only current sources.</a:t>
             </a:r>
-            <a:endParaRPr lang="en-US" dirty="0"/>
           </a:p>
         </p:txBody>
       </p:sp>
@@ -2620,12 +2252,11 @@
               <a:rPr lang="en-US" dirty="0"/>
               <a:t>(About 1 minute)
 I wrote a circuit simulator in Python. You give it a text file describing a circuit and it produces tables and graphs.
-Numbers: 8 device types (resistor, capacitor, inductor, voltage source, current source, diode, BJT and MOSFET; subcircuits are also supported). 4 analyses: operating point, DC sweep, AC sweep and transient. About 3,200 lines of Python including tests, in roughly 25 files, with 28 automated tests.
-NumPy and SciPy do the numerical work; the rest is my own code. It has a desktop window, a command line, and a batch script that saves every example as an image.
+Numbers: 8 device types (resistor, capacitor, inductor, voltage source, current source, diode, BJT and MOSFET; subcircuits are also supported). 4 analyses: operating point, DC sweep, AC sweep and transient. 3788 lines of Python including tests, in over 35 files, with 28 automated tests.
+NumPy and SciPy do the numerical work; the rest is my own code. It has a desktop window and a command line.
 If asked how it compares with LTspice: the core methods are the same (modified nodal analysis, Newton iteration, companion models). LTspice adds sparse solvers, adaptive time steps and a much larger model library.
 A screenshot of the window or a saved result would fit on this slide if you have one.</a:t>
             </a:r>
-            <a:endParaRPr lang="en-US" dirty="0"/>
           </a:p>
         </p:txBody>
       </p:sp>
@@ -2712,7 +2343,15 @@
             <a:r>
               <a:rPr lang="en-US" dirty="0"/>
               <a:t>(About 1 minute)
-The program has seven stages, and each one passes a plain data structure to the next, so each can be tested separately.
+The program </a:t>
+            </a:r>
+            <a:r>
+              <a:rPr lang="en-US"/>
+              <a:t>has seven main </a:t>
+            </a:r>
+            <a:r>
+              <a:rPr lang="en-US" dirty="0"/>
+              <a:t>stages, and each one passes a plain data structure to the next, so each can be tested separately.
 1. Parse: the text becomes a netlist of typed devices, model cards, subcircuits and analysis requests (spiceParser.py).
 2. Flatten: subcircuits are expanded into ordinary components with renamed nodes.
 3. Graph: nets are vertices and devices are edges (circuit.py, graph.py).
@@ -2722,7 +2361,6 @@
 7. Show: tables, CSV, plots and the window.
 You could keep a small copy of this strip in the corner of later slides and highlight the current stage. Because each stage can be tested separately, the bugs described on slide 15 could be tracked down number by number.</a:t>
             </a:r>
-            <a:endParaRPr lang="en-US" dirty="0"/>
           </a:p>
         </p:txBody>
       </p:sp>
@@ -2815,7 +2453,6 @@
 Unit suffixes: k is 1e3, u is 1e-6, n is 1e-9, p is 1e-12, f is 1e-15, m is milli (1e-3), and meg is mega (1e6). People used to engineering notation often expect m to mean mega, so it's worth mentioning.
 One implementation detail: the parser reads the digits exactly using Python's Decimal and scales once at the end, so 10u becomes exactly 1e-05. Computing 10 times 1e-6 in floating point gives 9.999999999999999e-06. (util/spicetext.py)</a:t>
             </a:r>
-            <a:endParaRPr lang="en-US" dirty="0"/>
           </a:p>
         </p:txBody>
       </p:sp>
@@ -2912,7 +2549,6 @@
 Right side, subcircuits: a .subckt is a reusable block, like a function. The solver knows nothing about hierarchy, so the parser flattens it first. Components get the instance name as a prefix (r1 inside xa becomes xa.r1), internal nodes are prefixed too so two copies never share a node, and ground stays global. Blocks can be nested (xa.x1.r1), and a depth limit of 16 catches a block that instantiates itself.
 Check value: two copies of a three-resistor divider, cascaded and loaded with 1 kilohm, give 12/19 = 0.631579 V from 12 V. The simulator matches the hand solution to six digits. It's like reusing one truss module many times in a structural model; hierarchy just saves typing.</a:t>
             </a:r>
-            <a:endParaRPr lang="en-US" dirty="0"/>
           </a:p>
         </p:txBody>
       </p:sp>
@@ -3006,7 +2642,6 @@
 For anyone who has seen the direct stiffness method: assembling a global K u = F from element matrices is the same operation as the stamping on the next slides.
 Ground: voltages only mean something relative to another point. If every node is an unknown, adding 5 V to all of them still satisfies every equation, so the matrix is singular. Choosing one node as 0 V removes that freedom, just as fixing a support stops a structure from translating freely.</a:t>
             </a:r>
-            <a:endParaRPr lang="en-US" dirty="0"/>
           </a:p>
         </p:txBody>
       </p:sp>
@@ -3103,7 +2738,6 @@
 Each row is just the KCL equation you would write on paper; the program writes them for every node.
 If the audience leaves understanding KCL as a matrix, a derivative as a difference and Newton's method as repeated tangent lines, they understand the whole program.</a:t>
             </a:r>
-            <a:endParaRPr lang="en-US" dirty="0"/>
           </a:p>
         </p:txBody>
       </p:sp>
@@ -3192,12 +2826,18 @@
               <a:t>(About 1 minute 15 seconds)
 Why "modified": plain nodal analysis needs each device's current as a function of node voltages, like i = g v. A voltage source can't provide that, because it fixes the voltage and allows any current. So its current becomes an extra unknown, and its equation, v(p) - v(n) = V, becomes an extra row. In this program the extra unknowns are the branch currents of every voltage source, inductor and capacitor.
 A stamp is the small pattern each device adds to the big matrices. Go down the table. The resistor adds g on the diagonal at its two nodes and minus g off the diagonal. A current source only changes the right-hand side. A voltage source adds plus and minus one in its branch row and column. Capacitors and inductors do the same and also add an entry to the C matrix, which multiplies the rate of change.
-Two details keep the code short. Ground has no row or column, so any pin on ground is simply skipped. And sources are recorded rather than built in: each stores its row, sign and source, and b is rebuilt when needed. The same matrices therefore serve DC (use the DC value), AC (use the phasor) and transient (use the waveform at time t).
-You could animate the resistor stamp landing in a 3x3 matrix; anyone who has assembled stiffness matrices will recognise it.
+Two details keep the code short. Ground has no row or column, so any pin on ground is simply skipped. And sources are recorded rather than built in: each stores its row, sign and source, and b is rebuilt when needed. The same matrices therefore serve DC (use the DC value), AC (use the phasor) and transient (use the waveform at time </a:t>
+            </a:r>
+            <a:r>
+              <a:rPr lang="en-US"/>
+              <a:t>t). </a:t>
+            </a:r>
+            <a:r>
+              <a:rPr lang="en-US" dirty="0"/>
+              <a:t>
 Diodes and transistors aren't stamped once. They are re-linearised on every Newton iteration (slide 11).
 If asked about signs: current through a two-terminal device is positive from its first node to its second, so a delivering voltage source shows negative current. Transistors report current into each terminal, so a PMOS carrying current out of its drain has negative drain current.</a:t>
             </a:r>
-            <a:endParaRPr lang="en-US" dirty="0"/>
           </a:p>
         </p:txBody>
       </p:sp>
@@ -3290,7 +2930,6 @@
 Chart: RC low-pass with R = 1 kilohm and C = 1 microfarad. The corner is 1/(2 pi R C) = 159.15 Hz, and the simulation gives -3.01 dB and -45 degrees there, the textbook values. The chart plots H = 1/(1 + j omega R C), which is the same curve as the simulator's Bode plot.
 AC analysis isn't a time simulation. It solves the steady-state equations at each frequency separately and relies on linearity, so nonlinear devices must first be linearised around their DC operating point. That's why the operating point comes first.</a:t>
             </a:r>
-            <a:endParaRPr lang="en-US" dirty="0"/>
           </a:p>
         </p:txBody>
       </p:sp>
@@ -3396,13 +3035,22 @@
           </a:solidFill>
           <a:ln/>
         </p:spPr>
+        <p:txBody>
+          <a:bodyPr/>
+          <a:lstStyle/>
+          <a:p>
+            <a:endParaRPr lang="en-AU"/>
+          </a:p>
+        </p:txBody>
       </p:sp>
       <p:sp>
         <p:nvSpPr>
           <p:cNvPr id="3" name="Text 1"/>
-          <p:cNvSpPr/>
+          <p:cNvSpPr>
+            <a:spLocks noGrp="1"/>
+          </p:cNvSpPr>
           <p:nvPr>
-            <p:ph idx="101" type="title" hasCustomPrompt="1"/>
+            <p:ph type="title" idx="101" hasCustomPrompt="1"/>
           </p:nvPr>
         </p:nvSpPr>
         <p:spPr>
@@ -3419,7 +3067,7 @@
         <p:txBody>
           <a:bodyPr wrap="square" rtlCol="0"/>
           <a:lstStyle>
-            <a:lvl1pPr algn="l" indent="0" marL="0">
+            <a:lvl1pPr marL="0" indent="0" algn="l">
               <a:buNone/>
               <a:defRPr lang="en-US" sz="4800" dirty="0">
                 <a:solidFill>
@@ -3429,7 +3077,7 @@
             </a:lvl1pPr>
           </a:lstStyle>
           <a:p>
-            <a:pPr algn="l" indent="0" marL="0">
+            <a:pPr marL="0" indent="0" algn="l">
               <a:buNone/>
             </a:pPr>
             <a:endParaRPr lang="en-US" sz="4800" dirty="0"/>
@@ -3439,9 +3087,11 @@
       <p:sp>
         <p:nvSpPr>
           <p:cNvPr id="4" name="Text 1"/>
-          <p:cNvSpPr/>
+          <p:cNvSpPr>
+            <a:spLocks noGrp="1"/>
+          </p:cNvSpPr>
           <p:nvPr>
-            <p:ph idx="102" type="body" hasCustomPrompt="1"/>
+            <p:ph type="body" idx="102" hasCustomPrompt="1"/>
           </p:nvPr>
         </p:nvSpPr>
         <p:spPr>
@@ -3458,7 +3108,7 @@
         <p:txBody>
           <a:bodyPr wrap="square" rtlCol="0"/>
           <a:lstStyle>
-            <a:lvl1pPr algn="l" indent="0" marL="0">
+            <a:lvl1pPr marL="0" indent="0" algn="l">
               <a:buNone/>
               <a:defRPr lang="en-US" sz="2000" dirty="0">
                 <a:solidFill>
@@ -3468,7 +3118,7 @@
             </a:lvl1pPr>
           </a:lstStyle>
           <a:p>
-            <a:pPr algn="l" indent="0" marL="0">
+            <a:pPr marL="0" indent="0" algn="l">
               <a:buNone/>
             </a:pPr>
             <a:endParaRPr lang="en-US" sz="2000" dirty="0"/>
@@ -3503,9 +3153,11 @@
       <p:sp>
         <p:nvSpPr>
           <p:cNvPr id="2" name="Text 0"/>
-          <p:cNvSpPr/>
+          <p:cNvSpPr>
+            <a:spLocks noGrp="1"/>
+          </p:cNvSpPr>
           <p:nvPr>
-            <p:ph idx="100" type="title" hasCustomPrompt="1"/>
+            <p:ph type="title" idx="100" hasCustomPrompt="1"/>
           </p:nvPr>
         </p:nvSpPr>
         <p:spPr>
@@ -3522,7 +3174,7 @@
         <p:txBody>
           <a:bodyPr wrap="square" rtlCol="0"/>
           <a:lstStyle>
-            <a:lvl1pPr algn="l" indent="0" marL="0">
+            <a:lvl1pPr marL="0" indent="0" algn="l">
               <a:buNone/>
               <a:defRPr lang="en-US" sz="3400" dirty="0">
                 <a:solidFill>
@@ -3532,7 +3184,7 @@
             </a:lvl1pPr>
           </a:lstStyle>
           <a:p>
-            <a:pPr algn="l" indent="0" marL="0">
+            <a:pPr marL="0" indent="0" algn="l">
               <a:buNone/>
             </a:pPr>
             <a:endParaRPr lang="en-US" sz="3400" dirty="0"/>
@@ -3560,7 +3212,7 @@
           <a:bodyPr wrap="square" lIns="0" tIns="0" rIns="0" bIns="0" rtlCol="0" anchor="ctr"/>
           <a:lstStyle/>
           <a:p>
-            <a:pPr indent="0" marL="0">
+            <a:pPr marL="0" indent="0">
               <a:buNone/>
             </a:pPr>
             <a:r>
@@ -3595,7 +3247,7 @@
           </a:prstGeom>
           <a:extLst>
             <a:ext uri="{C572A759-6A51-4108-AA02-DFA0A04FC94B}">
-              <ma14:wrappingTextBoxFlag xmlns:ma14="http://schemas.microsoft.com/office/mac/drawingml/2011/main" val="0"/>
+              <ma14:wrappingTextBoxFlag xmlns:ma14="http://schemas.microsoft.com/office/mac/drawingml/2011/main" xmlns="" val="0"/>
             </a:ext>
           </a:extLst>
         </p:spPr>
@@ -3613,8 +3265,8 @@
           <a:p>
             <a:pPr algn="r"/>
             <a:fld id="{F7021451-1387-4CA6-816F-3879F97B5CBC}" type="slidenum">
-              <a:rPr b="0" lang="en-US"/>
-              <a:t>1003</a:t>
+              <a:rPr lang="en-US" b="0"/>
+              <a:t>‹#›</a:t>
             </a:fld>
             <a:endParaRPr lang="en-US"/>
           </a:p>
@@ -3664,13 +3316,22 @@
           </a:solidFill>
           <a:ln/>
         </p:spPr>
+        <p:txBody>
+          <a:bodyPr/>
+          <a:lstStyle/>
+          <a:p>
+            <a:endParaRPr lang="en-AU"/>
+          </a:p>
+        </p:txBody>
       </p:sp>
       <p:sp>
         <p:nvSpPr>
           <p:cNvPr id="3" name="Text 1"/>
-          <p:cNvSpPr/>
+          <p:cNvSpPr>
+            <a:spLocks noGrp="1"/>
+          </p:cNvSpPr>
           <p:nvPr>
-            <p:ph idx="101" type="title" hasCustomPrompt="1"/>
+            <p:ph type="title" idx="101" hasCustomPrompt="1"/>
           </p:nvPr>
         </p:nvSpPr>
         <p:spPr>
@@ -3687,7 +3348,7 @@
         <p:txBody>
           <a:bodyPr wrap="square" rtlCol="0"/>
           <a:lstStyle>
-            <a:lvl1pPr algn="l" indent="0" marL="0">
+            <a:lvl1pPr marL="0" indent="0" algn="l">
               <a:buNone/>
               <a:defRPr lang="en-US" sz="3400" dirty="0">
                 <a:solidFill>
@@ -3697,7 +3358,7 @@
             </a:lvl1pPr>
           </a:lstStyle>
           <a:p>
-            <a:pPr algn="l" indent="0" marL="0">
+            <a:pPr marL="0" indent="0" algn="l">
               <a:buNone/>
             </a:pPr>
             <a:endParaRPr lang="en-US" sz="3400" dirty="0"/>
@@ -3725,7 +3386,7 @@
           <a:bodyPr wrap="square" lIns="0" tIns="0" rIns="0" bIns="0" rtlCol="0" anchor="ctr"/>
           <a:lstStyle/>
           <a:p>
-            <a:pPr indent="0" marL="0">
+            <a:pPr marL="0" indent="0">
               <a:buNone/>
             </a:pPr>
             <a:r>
@@ -3760,7 +3421,7 @@
           </a:prstGeom>
           <a:extLst>
             <a:ext uri="{C572A759-6A51-4108-AA02-DFA0A04FC94B}">
-              <ma14:wrappingTextBoxFlag xmlns:ma14="http://schemas.microsoft.com/office/mac/drawingml/2011/main" val="0"/>
+              <ma14:wrappingTextBoxFlag xmlns:ma14="http://schemas.microsoft.com/office/mac/drawingml/2011/main" xmlns="" val="0"/>
             </a:ext>
           </a:extLst>
         </p:spPr>
@@ -3778,8 +3439,8 @@
           <a:p>
             <a:pPr algn="r"/>
             <a:fld id="{F7021451-1387-4CA6-816F-3879F97B5CBC}" type="slidenum">
-              <a:rPr b="0" lang="en-US"/>
-              <a:t>1004</a:t>
+              <a:rPr lang="en-US" b="0"/>
+              <a:t>‹#›</a:t>
             </a:fld>
             <a:endParaRPr lang="en-US"/>
           </a:p>
@@ -3796,6 +3457,11 @@
 <file path=ppt/slideMasters/slideMaster1.xml><?xml version="1.0" encoding="utf-8"?>
 <p:sldMaster xmlns:a="http://schemas.openxmlformats.org/drawingml/2006/main" xmlns:r="http://schemas.openxmlformats.org/officeDocument/2006/relationships" xmlns:p="http://schemas.openxmlformats.org/presentationml/2006/main">
   <p:cSld>
+    <p:bg>
+      <p:bgRef idx="1001">
+        <a:schemeClr val="bg1"/>
+      </p:bgRef>
+    </p:bg>
     <p:spTree>
       <p:nvGrpSpPr>
         <p:cNvPr id="1" name=""/>
@@ -3830,7 +3496,7 @@
           </a:prstGeom>
           <a:extLst>
             <a:ext uri="{C572A759-6A51-4108-AA02-DFA0A04FC94B}">
-              <ma14:wrappingTextBoxFlag xmlns:ma14="http://schemas.microsoft.com/office/mac/drawingml/2011/main" val="0"/>
+              <ma14:wrappingTextBoxFlag xmlns:ma14="http://schemas.microsoft.com/office/mac/drawingml/2011/main" xmlns="" val="0"/>
             </a:ext>
           </a:extLst>
         </p:spPr>
@@ -3848,8 +3514,8 @@
           <a:p>
             <a:pPr algn="r"/>
             <a:fld id="{F7021451-1387-4CA6-816F-3879F97B5CBC}" type="slidenum">
-              <a:rPr b="0" lang="en-US"/>
-              <a:t>null</a:t>
+              <a:rPr lang="en-US" b="0"/>
+              <a:t>‹#›</a:t>
             </a:fld>
             <a:endParaRPr lang="en-US"/>
           </a:p>
@@ -4138,9 +3804,11 @@
       <p:sp>
         <p:nvSpPr>
           <p:cNvPr id="2" name="Text 1"/>
-          <p:cNvSpPr/>
+          <p:cNvSpPr>
+            <a:spLocks noGrp="1"/>
+          </p:cNvSpPr>
           <p:nvPr>
-            <p:ph idx="101" type="title" hasCustomPrompt="1"/>
+            <p:ph type="title" idx="101" hasCustomPrompt="1"/>
           </p:nvPr>
         </p:nvSpPr>
         <p:spPr>
@@ -4158,7 +3826,7 @@
           <a:bodyPr wrap="square" lIns="0" tIns="0" rIns="0" bIns="0" rtlCol="0" anchor="ctr"/>
           <a:lstStyle/>
           <a:p>
-            <a:pPr algn="l" indent="0" marL="0">
+            <a:pPr marL="0" indent="0" algn="l">
               <a:buNone/>
             </a:pPr>
             <a:r>
@@ -4176,9 +3844,11 @@
       <p:sp>
         <p:nvSpPr>
           <p:cNvPr id="3" name="Text 1"/>
-          <p:cNvSpPr/>
+          <p:cNvSpPr>
+            <a:spLocks noGrp="1"/>
+          </p:cNvSpPr>
           <p:nvPr>
-            <p:ph idx="102" type="body" hasCustomPrompt="1"/>
+            <p:ph type="body" idx="102" hasCustomPrompt="1"/>
           </p:nvPr>
         </p:nvSpPr>
         <p:spPr>
@@ -4196,7 +3866,7 @@
           <a:bodyPr wrap="square" lIns="0" tIns="0" rIns="0" bIns="0" rtlCol="0" anchor="t"/>
           <a:lstStyle/>
           <a:p>
-            <a:pPr algn="l" indent="0" marL="0">
+            <a:pPr marL="0" indent="0" algn="l">
               <a:buNone/>
             </a:pPr>
             <a:r>
@@ -4223,15 +3893,20 @@
             <a:ext cx="8046720" cy="1508760"/>
           </a:xfrm>
           <a:prstGeom prst="rect">
-            <a:avLst>
-              <a:gd name="adj" fmla="val 9091"/>
-            </a:avLst>
+            <a:avLst/>
           </a:prstGeom>
           <a:solidFill>
             <a:schemeClr val="tx2"/>
           </a:solidFill>
           <a:ln/>
         </p:spPr>
+        <p:txBody>
+          <a:bodyPr/>
+          <a:lstStyle/>
+          <a:p>
+            <a:endParaRPr lang="en-AU"/>
+          </a:p>
+        </p:txBody>
       </p:sp>
       <p:sp>
         <p:nvSpPr>
@@ -4254,7 +3929,7 @@
           <a:bodyPr wrap="square" lIns="0" tIns="0" rIns="0" bIns="0" rtlCol="0" anchor="ctr"/>
           <a:lstStyle/>
           <a:p>
-            <a:pPr indent="0" marL="0">
+            <a:pPr marL="0" indent="0">
               <a:buNone/>
             </a:pPr>
             <a:r>
@@ -4293,7 +3968,7 @@
           <a:bodyPr wrap="square" lIns="0" tIns="0" rIns="0" bIns="0" rtlCol="0" anchor="ctr"/>
           <a:lstStyle/>
           <a:p>
-            <a:pPr indent="0" marL="0">
+            <a:pPr marL="0" indent="0">
               <a:buNone/>
             </a:pPr>
             <a:r>
@@ -4329,7 +4004,7 @@
           <a:bodyPr wrap="square" lIns="0" tIns="0" rIns="0" bIns="0" rtlCol="0" anchor="t"/>
           <a:lstStyle/>
           <a:p>
-            <a:pPr indent="0" marL="0">
+            <a:pPr marL="0" indent="0">
               <a:buNone/>
             </a:pPr>
             <a:r>
@@ -4338,7 +4013,7 @@
                   <a:schemeClr val="bg2"/>
                 </a:solidFill>
               </a:rPr>
-              <a:t>A talk for civil, mechanical and electrical engineering students</a:t>
+              <a:t>Hudson Baker ENG192 A2 Presentation</a:t>
             </a:r>
             <a:endParaRPr lang="en-US" sz="1200" dirty="0"/>
           </a:p>
@@ -4372,9 +4047,11 @@
       <p:sp>
         <p:nvSpPr>
           <p:cNvPr id="2" name="Text 0"/>
-          <p:cNvSpPr/>
+          <p:cNvSpPr>
+            <a:spLocks noGrp="1"/>
+          </p:cNvSpPr>
           <p:nvPr>
-            <p:ph idx="100" type="title" hasCustomPrompt="1"/>
+            <p:ph type="title" idx="100" hasCustomPrompt="1"/>
           </p:nvPr>
         </p:nvSpPr>
         <p:spPr>
@@ -4392,7 +4069,7 @@
           <a:bodyPr wrap="square" lIns="0" tIns="0" rIns="0" bIns="0" rtlCol="0" anchor="ctr"/>
           <a:lstStyle/>
           <a:p>
-            <a:pPr algn="l" indent="0" marL="0">
+            <a:pPr marL="0" indent="0" algn="l">
               <a:buNone/>
             </a:pPr>
             <a:r>
@@ -4419,15 +4096,20 @@
             <a:ext cx="4114800" cy="1097280"/>
           </a:xfrm>
           <a:prstGeom prst="rect">
-            <a:avLst>
-              <a:gd name="adj" fmla="val 10000"/>
-            </a:avLst>
+            <a:avLst/>
           </a:prstGeom>
           <a:solidFill>
             <a:schemeClr val="tx1"/>
           </a:solidFill>
           <a:ln/>
         </p:spPr>
+        <p:txBody>
+          <a:bodyPr/>
+          <a:lstStyle/>
+          <a:p>
+            <a:endParaRPr lang="en-AU"/>
+          </a:p>
+        </p:txBody>
       </p:sp>
       <p:sp>
         <p:nvSpPr>
@@ -4450,7 +4132,7 @@
           <a:bodyPr wrap="square" lIns="0" tIns="0" rIns="0" bIns="0" rtlCol="0" anchor="ctr"/>
           <a:lstStyle/>
           <a:p>
-            <a:pPr indent="0" marL="0">
+            <a:pPr marL="0" indent="0">
               <a:buNone/>
             </a:pPr>
             <a:r>
@@ -4464,7 +4146,7 @@
             <a:endParaRPr lang="en-US" sz="1300" dirty="0"/>
           </a:p>
           <a:p>
-            <a:pPr indent="0" marL="0">
+            <a:pPr marL="0" indent="0">
               <a:buNone/>
             </a:pPr>
             <a:r>
@@ -4494,15 +4176,20 @@
             <a:ext cx="4114800" cy="1188720"/>
           </a:xfrm>
           <a:prstGeom prst="rect">
-            <a:avLst>
-              <a:gd name="adj" fmla="val 9231"/>
-            </a:avLst>
+            <a:avLst/>
           </a:prstGeom>
           <a:solidFill>
             <a:schemeClr val="tx1"/>
           </a:solidFill>
           <a:ln/>
         </p:spPr>
+        <p:txBody>
+          <a:bodyPr/>
+          <a:lstStyle/>
+          <a:p>
+            <a:endParaRPr lang="en-AU"/>
+          </a:p>
+        </p:txBody>
       </p:sp>
       <p:sp>
         <p:nvSpPr>
@@ -4525,7 +4212,7 @@
           <a:bodyPr wrap="square" lIns="0" tIns="0" rIns="0" bIns="0" rtlCol="0" anchor="ctr"/>
           <a:lstStyle/>
           <a:p>
-            <a:pPr indent="0" marL="0">
+            <a:pPr marL="0" indent="0">
               <a:buNone/>
             </a:pPr>
             <a:r>
@@ -4539,7 +4226,7 @@
             <a:endParaRPr lang="en-US" sz="1300" dirty="0"/>
           </a:p>
           <a:p>
-            <a:pPr indent="0" marL="0">
+            <a:pPr marL="0" indent="0">
               <a:buNone/>
             </a:pPr>
             <a:r>
@@ -4556,7 +4243,7 @@
             <a:endParaRPr lang="en-US" sz="1300" dirty="0"/>
           </a:p>
           <a:p>
-            <a:pPr indent="0" marL="0">
+            <a:pPr marL="0" indent="0">
               <a:buNone/>
             </a:pPr>
             <a:r>
@@ -4586,15 +4273,20 @@
             <a:ext cx="4114800" cy="777240"/>
           </a:xfrm>
           <a:prstGeom prst="rect">
-            <a:avLst>
-              <a:gd name="adj" fmla="val 14118"/>
-            </a:avLst>
+            <a:avLst/>
           </a:prstGeom>
           <a:solidFill>
             <a:schemeClr val="accent1"/>
           </a:solidFill>
           <a:ln/>
         </p:spPr>
+        <p:txBody>
+          <a:bodyPr/>
+          <a:lstStyle/>
+          <a:p>
+            <a:endParaRPr lang="en-AU"/>
+          </a:p>
+        </p:txBody>
       </p:sp>
       <p:sp>
         <p:nvSpPr>
@@ -4617,7 +4309,7 @@
           <a:bodyPr wrap="square" lIns="0" tIns="0" rIns="0" bIns="0" rtlCol="0" anchor="ctr"/>
           <a:lstStyle/>
           <a:p>
-            <a:pPr indent="0" marL="0">
+            <a:pPr marL="0" indent="0">
               <a:buNone/>
             </a:pPr>
             <a:r>
@@ -4634,7 +4326,7 @@
       </p:sp>
       <p:graphicFrame>
         <p:nvGraphicFramePr>
-          <p:cNvPr id="10" name="Chart 0" descr=""/>
+          <p:cNvPr id="10" name="Chart 0"/>
           <p:cNvGraphicFramePr/>
           <p:nvPr/>
         </p:nvGraphicFramePr>
@@ -4642,9 +4334,9 @@
           <a:off x="4754880" y="1188720"/>
           <a:ext cx="3931920" cy="3291840"/>
         </p:xfrm>
-        <a:graphic xmlns:a="http://schemas.openxmlformats.org/drawingml/2006/main">
+        <a:graphic>
           <a:graphicData uri="http://schemas.openxmlformats.org/drawingml/2006/chart">
-            <c:chart xmlns:c="http://schemas.openxmlformats.org/drawingml/2006/chart" r:id="rId1"/>
+            <c:chart xmlns:c="http://schemas.openxmlformats.org/drawingml/2006/chart" xmlns:r="http://schemas.openxmlformats.org/officeDocument/2006/relationships" r:id="rId3"/>
           </a:graphicData>
         </a:graphic>
       </p:graphicFrame>
@@ -4668,7 +4360,7 @@
           </a:prstGeom>
           <a:extLst>
             <a:ext uri="{C572A759-6A51-4108-AA02-DFA0A04FC94B}">
-              <ma14:wrappingTextBoxFlag xmlns:ma14="http://schemas.microsoft.com/office/mac/drawingml/2011/main" val="0"/>
+              <ma14:wrappingTextBoxFlag xmlns:ma14="http://schemas.microsoft.com/office/mac/drawingml/2011/main" xmlns="" val="0"/>
             </a:ext>
           </a:extLst>
         </p:spPr>
@@ -4686,7 +4378,7 @@
           <a:p>
             <a:pPr algn="r"/>
             <a:fld id="{F7021451-1387-4CA6-816F-3879F97B5CBC}" type="slidenum">
-              <a:rPr b="0" lang="en-US"/>
+              <a:rPr lang="en-US" b="0"/>
               <a:t>10</a:t>
             </a:fld>
             <a:endParaRPr lang="en-US"/>
@@ -4721,9 +4413,11 @@
       <p:sp>
         <p:nvSpPr>
           <p:cNvPr id="2" name="Text 0"/>
-          <p:cNvSpPr/>
+          <p:cNvSpPr>
+            <a:spLocks noGrp="1"/>
+          </p:cNvSpPr>
           <p:nvPr>
-            <p:ph idx="100" type="title" hasCustomPrompt="1"/>
+            <p:ph type="title" idx="100" hasCustomPrompt="1"/>
           </p:nvPr>
         </p:nvSpPr>
         <p:spPr>
@@ -4741,7 +4435,7 @@
           <a:bodyPr wrap="square" lIns="0" tIns="0" rIns="0" bIns="0" rtlCol="0" anchor="ctr"/>
           <a:lstStyle/>
           <a:p>
-            <a:pPr algn="l" indent="0" marL="0">
+            <a:pPr marL="0" indent="0" algn="l">
               <a:buNone/>
             </a:pPr>
             <a:r>
@@ -4777,7 +4471,7 @@
           <a:bodyPr wrap="square" lIns="0" tIns="0" rIns="0" bIns="0" rtlCol="0" anchor="ctr"/>
           <a:lstStyle/>
           <a:p>
-            <a:pPr algn="l" indent="0" marL="0">
+            <a:pPr marL="0" indent="0" algn="l">
               <a:buNone/>
             </a:pPr>
             <a:r>
@@ -4816,7 +4510,7 @@
           <a:bodyPr wrap="square" lIns="0" tIns="0" rIns="0" bIns="0" rtlCol="0" anchor="ctr"/>
           <a:lstStyle/>
           <a:p>
-            <a:pPr indent="0" marL="0">
+            <a:pPr marL="0" indent="0">
               <a:buNone/>
             </a:pPr>
             <a:r>
@@ -4830,7 +4524,7 @@
             <a:endParaRPr lang="en-US" sz="1400" dirty="0"/>
           </a:p>
           <a:p>
-            <a:pPr indent="0" marL="0">
+            <a:pPr marL="0" indent="0">
               <a:buNone/>
             </a:pPr>
             <a:r>
@@ -4869,7 +4563,7 @@
           <a:bodyPr wrap="square" lIns="0" tIns="0" rIns="0" bIns="0" rtlCol="0" anchor="ctr"/>
           <a:lstStyle/>
           <a:p>
-            <a:pPr algn="l" indent="0" marL="0">
+            <a:pPr marL="0" indent="0" algn="l">
               <a:buNone/>
             </a:pPr>
             <a:r>
@@ -4908,7 +4602,7 @@
           <a:bodyPr wrap="square" lIns="0" tIns="0" rIns="0" bIns="0" rtlCol="0" anchor="ctr"/>
           <a:lstStyle/>
           <a:p>
-            <a:pPr indent="0" marL="0">
+            <a:pPr marL="0" indent="0">
               <a:buNone/>
             </a:pPr>
             <a:r>
@@ -4922,7 +4616,7 @@
             <a:endParaRPr lang="en-US" sz="1400" dirty="0"/>
           </a:p>
           <a:p>
-            <a:pPr indent="0" marL="0">
+            <a:pPr marL="0" indent="0">
               <a:buNone/>
             </a:pPr>
             <a:r>
@@ -4961,7 +4655,7 @@
           <a:bodyPr wrap="square" lIns="0" tIns="0" rIns="0" bIns="0" rtlCol="0" anchor="ctr"/>
           <a:lstStyle/>
           <a:p>
-            <a:pPr algn="l" indent="0" marL="0">
+            <a:pPr marL="0" indent="0" algn="l">
               <a:buNone/>
             </a:pPr>
             <a:r>
@@ -5000,7 +4694,7 @@
           <a:bodyPr wrap="square" lIns="0" tIns="0" rIns="0" bIns="0" rtlCol="0" anchor="ctr"/>
           <a:lstStyle/>
           <a:p>
-            <a:pPr indent="0" marL="0">
+            <a:pPr marL="0" indent="0">
               <a:buNone/>
             </a:pPr>
             <a:r>
@@ -5014,7 +4708,7 @@
             <a:endParaRPr lang="en-US" sz="1400" dirty="0"/>
           </a:p>
           <a:p>
-            <a:pPr indent="0" marL="0">
+            <a:pPr marL="0" indent="0">
               <a:buNone/>
             </a:pPr>
             <a:r>
@@ -5053,7 +4747,7 @@
           <a:bodyPr wrap="square" lIns="0" tIns="0" rIns="0" bIns="0" rtlCol="0" anchor="ctr"/>
           <a:lstStyle/>
           <a:p>
-            <a:pPr algn="l" indent="0" marL="0">
+            <a:pPr marL="0" indent="0" algn="l">
               <a:buNone/>
             </a:pPr>
             <a:r>
@@ -5092,7 +4786,7 @@
           <a:bodyPr wrap="square" lIns="0" tIns="0" rIns="0" bIns="0" rtlCol="0" anchor="ctr"/>
           <a:lstStyle/>
           <a:p>
-            <a:pPr indent="0" marL="0">
+            <a:pPr marL="0" indent="0">
               <a:buNone/>
             </a:pPr>
             <a:r>
@@ -5106,7 +4800,7 @@
             <a:endParaRPr lang="en-US" sz="1400" dirty="0"/>
           </a:p>
           <a:p>
-            <a:pPr indent="0" marL="0">
+            <a:pPr marL="0" indent="0">
               <a:buNone/>
             </a:pPr>
             <a:r>
@@ -5136,15 +4830,20 @@
             <a:ext cx="3840480" cy="457200"/>
           </a:xfrm>
           <a:prstGeom prst="rect">
-            <a:avLst>
-              <a:gd name="adj" fmla="val 24000"/>
-            </a:avLst>
+            <a:avLst/>
           </a:prstGeom>
           <a:solidFill>
             <a:schemeClr val="tx1"/>
           </a:solidFill>
           <a:ln/>
         </p:spPr>
+        <p:txBody>
+          <a:bodyPr/>
+          <a:lstStyle/>
+          <a:p>
+            <a:endParaRPr lang="en-AU"/>
+          </a:p>
+        </p:txBody>
       </p:sp>
       <p:sp>
         <p:nvSpPr>
@@ -5167,7 +4866,7 @@
           <a:bodyPr wrap="square" lIns="0" tIns="0" rIns="0" bIns="0" rtlCol="0" anchor="ctr"/>
           <a:lstStyle/>
           <a:p>
-            <a:pPr algn="ctr" indent="0" marL="0">
+            <a:pPr marL="0" indent="0" algn="ctr">
               <a:buNone/>
             </a:pPr>
             <a:r>
@@ -5187,7 +4886,7 @@
       </p:sp>
       <p:graphicFrame>
         <p:nvGraphicFramePr>
-          <p:cNvPr id="14" name="Chart 0" descr=""/>
+          <p:cNvPr id="14" name="Chart 0"/>
           <p:cNvGraphicFramePr/>
           <p:nvPr/>
         </p:nvGraphicFramePr>
@@ -5195,9 +4894,9 @@
           <a:off x="4526280" y="1188720"/>
           <a:ext cx="4160520" cy="2514600"/>
         </p:xfrm>
-        <a:graphic xmlns:a="http://schemas.openxmlformats.org/drawingml/2006/main">
+        <a:graphic>
           <a:graphicData uri="http://schemas.openxmlformats.org/drawingml/2006/chart">
-            <c:chart xmlns:c="http://schemas.openxmlformats.org/drawingml/2006/chart" r:id="rId1"/>
+            <c:chart xmlns:c="http://schemas.openxmlformats.org/drawingml/2006/chart" xmlns:r="http://schemas.openxmlformats.org/officeDocument/2006/relationships" r:id="rId3"/>
           </a:graphicData>
         </a:graphic>
       </p:graphicFrame>
@@ -5213,9 +4912,7 @@
             <a:ext cx="4160520" cy="731520"/>
           </a:xfrm>
           <a:prstGeom prst="rect">
-            <a:avLst>
-              <a:gd name="adj" fmla="val 15000"/>
-            </a:avLst>
+            <a:avLst/>
           </a:prstGeom>
           <a:solidFill>
             <a:schemeClr val="bg2"/>
@@ -5226,7 +4923,7 @@
           <a:bodyPr wrap="square" lIns="101600" tIns="101600" rIns="101600" bIns="101600" rtlCol="0" anchor="ctr"/>
           <a:lstStyle/>
           <a:p>
-            <a:pPr algn="ctr" indent="0" marL="0">
+            <a:pPr marL="0" indent="0" algn="ctr">
               <a:buNone/>
             </a:pPr>
             <a:r>
@@ -5240,7 +4937,7 @@
             <a:endParaRPr lang="en-US" sz="1800" dirty="0"/>
           </a:p>
           <a:p>
-            <a:pPr algn="ctr" indent="0" marL="0">
+            <a:pPr marL="0" indent="0" algn="ctr">
               <a:buNone/>
             </a:pPr>
             <a:r>
@@ -5275,7 +4972,7 @@
           </a:prstGeom>
           <a:extLst>
             <a:ext uri="{C572A759-6A51-4108-AA02-DFA0A04FC94B}">
-              <ma14:wrappingTextBoxFlag xmlns:ma14="http://schemas.microsoft.com/office/mac/drawingml/2011/main" val="0"/>
+              <ma14:wrappingTextBoxFlag xmlns:ma14="http://schemas.microsoft.com/office/mac/drawingml/2011/main" xmlns="" val="0"/>
             </a:ext>
           </a:extLst>
         </p:spPr>
@@ -5293,7 +4990,7 @@
           <a:p>
             <a:pPr algn="r"/>
             <a:fld id="{F7021451-1387-4CA6-816F-3879F97B5CBC}" type="slidenum">
-              <a:rPr b="0" lang="en-US"/>
+              <a:rPr lang="en-US" b="0"/>
               <a:t>11</a:t>
             </a:fld>
             <a:endParaRPr lang="en-US"/>
@@ -5328,9 +5025,11 @@
       <p:sp>
         <p:nvSpPr>
           <p:cNvPr id="2" name="Text 0"/>
-          <p:cNvSpPr/>
+          <p:cNvSpPr>
+            <a:spLocks noGrp="1"/>
+          </p:cNvSpPr>
           <p:nvPr>
-            <p:ph idx="100" type="title" hasCustomPrompt="1"/>
+            <p:ph type="title" idx="100" hasCustomPrompt="1"/>
           </p:nvPr>
         </p:nvSpPr>
         <p:spPr>
@@ -5348,7 +5047,7 @@
           <a:bodyPr wrap="square" lIns="0" tIns="0" rIns="0" bIns="0" rtlCol="0" anchor="ctr"/>
           <a:lstStyle/>
           <a:p>
-            <a:pPr algn="l" indent="0" marL="0">
+            <a:pPr marL="0" indent="0" algn="l">
               <a:buNone/>
             </a:pPr>
             <a:r>
@@ -5375,15 +5074,20 @@
             <a:ext cx="2651760" cy="1325880"/>
           </a:xfrm>
           <a:prstGeom prst="rect">
-            <a:avLst>
-              <a:gd name="adj" fmla="val 8276"/>
-            </a:avLst>
+            <a:avLst/>
           </a:prstGeom>
           <a:solidFill>
             <a:schemeClr val="bg2"/>
           </a:solidFill>
           <a:ln/>
         </p:spPr>
+        <p:txBody>
+          <a:bodyPr/>
+          <a:lstStyle/>
+          <a:p>
+            <a:endParaRPr lang="en-AU"/>
+          </a:p>
+        </p:txBody>
       </p:sp>
       <p:sp>
         <p:nvSpPr>
@@ -5406,7 +5110,7 @@
           <a:bodyPr wrap="square" lIns="0" tIns="0" rIns="0" bIns="0" rtlCol="0" anchor="ctr"/>
           <a:lstStyle/>
           <a:p>
-            <a:pPr algn="l" indent="0" marL="0">
+            <a:pPr marL="0" indent="0" algn="l">
               <a:buNone/>
             </a:pPr>
             <a:r>
@@ -5445,7 +5149,7 @@
           <a:bodyPr wrap="square" lIns="0" tIns="0" rIns="0" bIns="0" rtlCol="0" anchor="ctr"/>
           <a:lstStyle/>
           <a:p>
-            <a:pPr indent="0" marL="0">
+            <a:pPr marL="0" indent="0">
               <a:buNone/>
             </a:pPr>
             <a:r>
@@ -5481,7 +5185,7 @@
           <a:bodyPr wrap="square" lIns="0" tIns="0" rIns="0" bIns="0" rtlCol="0" anchor="t"/>
           <a:lstStyle/>
           <a:p>
-            <a:pPr indent="0" marL="0">
+            <a:pPr marL="0" indent="0">
               <a:buNone/>
             </a:pPr>
             <a:r>
@@ -5508,15 +5212,20 @@
             <a:ext cx="2651760" cy="1325880"/>
           </a:xfrm>
           <a:prstGeom prst="rect">
-            <a:avLst>
-              <a:gd name="adj" fmla="val 8276"/>
-            </a:avLst>
+            <a:avLst/>
           </a:prstGeom>
           <a:solidFill>
             <a:schemeClr val="bg2"/>
           </a:solidFill>
           <a:ln/>
         </p:spPr>
+        <p:txBody>
+          <a:bodyPr/>
+          <a:lstStyle/>
+          <a:p>
+            <a:endParaRPr lang="en-AU"/>
+          </a:p>
+        </p:txBody>
       </p:sp>
       <p:sp>
         <p:nvSpPr>
@@ -5539,7 +5248,7 @@
           <a:bodyPr wrap="square" lIns="0" tIns="0" rIns="0" bIns="0" rtlCol="0" anchor="ctr"/>
           <a:lstStyle/>
           <a:p>
-            <a:pPr algn="l" indent="0" marL="0">
+            <a:pPr marL="0" indent="0" algn="l">
               <a:buNone/>
             </a:pPr>
             <a:r>
@@ -5578,7 +5287,7 @@
           <a:bodyPr wrap="square" lIns="0" tIns="0" rIns="0" bIns="0" rtlCol="0" anchor="ctr"/>
           <a:lstStyle/>
           <a:p>
-            <a:pPr indent="0" marL="0">
+            <a:pPr marL="0" indent="0">
               <a:buNone/>
             </a:pPr>
             <a:r>
@@ -5614,7 +5323,7 @@
           <a:bodyPr wrap="square" lIns="0" tIns="0" rIns="0" bIns="0" rtlCol="0" anchor="t"/>
           <a:lstStyle/>
           <a:p>
-            <a:pPr indent="0" marL="0">
+            <a:pPr marL="0" indent="0">
               <a:buNone/>
             </a:pPr>
             <a:r>
@@ -5641,15 +5350,20 @@
             <a:ext cx="2651760" cy="1325880"/>
           </a:xfrm>
           <a:prstGeom prst="rect">
-            <a:avLst>
-              <a:gd name="adj" fmla="val 8276"/>
-            </a:avLst>
+            <a:avLst/>
           </a:prstGeom>
           <a:solidFill>
             <a:schemeClr val="bg2"/>
           </a:solidFill>
           <a:ln/>
         </p:spPr>
+        <p:txBody>
+          <a:bodyPr/>
+          <a:lstStyle/>
+          <a:p>
+            <a:endParaRPr lang="en-AU"/>
+          </a:p>
+        </p:txBody>
       </p:sp>
       <p:sp>
         <p:nvSpPr>
@@ -5672,7 +5386,7 @@
           <a:bodyPr wrap="square" lIns="0" tIns="0" rIns="0" bIns="0" rtlCol="0" anchor="ctr"/>
           <a:lstStyle/>
           <a:p>
-            <a:pPr algn="l" indent="0" marL="0">
+            <a:pPr marL="0" indent="0" algn="l">
               <a:buNone/>
             </a:pPr>
             <a:r>
@@ -5711,7 +5425,7 @@
           <a:bodyPr wrap="square" lIns="0" tIns="0" rIns="0" bIns="0" rtlCol="0" anchor="ctr"/>
           <a:lstStyle/>
           <a:p>
-            <a:pPr indent="0" marL="0">
+            <a:pPr marL="0" indent="0">
               <a:buNone/>
             </a:pPr>
             <a:r>
@@ -5747,7 +5461,7 @@
           <a:bodyPr wrap="square" lIns="0" tIns="0" rIns="0" bIns="0" rtlCol="0" anchor="t"/>
           <a:lstStyle/>
           <a:p>
-            <a:pPr indent="0" marL="0">
+            <a:pPr marL="0" indent="0">
               <a:buNone/>
             </a:pPr>
             <a:r>
@@ -5774,15 +5488,20 @@
             <a:ext cx="2651760" cy="1325880"/>
           </a:xfrm>
           <a:prstGeom prst="rect">
-            <a:avLst>
-              <a:gd name="adj" fmla="val 8276"/>
-            </a:avLst>
+            <a:avLst/>
           </a:prstGeom>
           <a:solidFill>
             <a:schemeClr val="bg2"/>
           </a:solidFill>
           <a:ln/>
         </p:spPr>
+        <p:txBody>
+          <a:bodyPr/>
+          <a:lstStyle/>
+          <a:p>
+            <a:endParaRPr lang="en-AU"/>
+          </a:p>
+        </p:txBody>
       </p:sp>
       <p:sp>
         <p:nvSpPr>
@@ -5805,7 +5524,7 @@
           <a:bodyPr wrap="square" lIns="0" tIns="0" rIns="0" bIns="0" rtlCol="0" anchor="ctr"/>
           <a:lstStyle/>
           <a:p>
-            <a:pPr algn="l" indent="0" marL="0">
+            <a:pPr marL="0" indent="0" algn="l">
               <a:buNone/>
             </a:pPr>
             <a:r>
@@ -5844,7 +5563,7 @@
           <a:bodyPr wrap="square" lIns="0" tIns="0" rIns="0" bIns="0" rtlCol="0" anchor="ctr"/>
           <a:lstStyle/>
           <a:p>
-            <a:pPr indent="0" marL="0">
+            <a:pPr marL="0" indent="0">
               <a:buNone/>
             </a:pPr>
             <a:r>
@@ -5880,7 +5599,7 @@
           <a:bodyPr wrap="square" lIns="0" tIns="0" rIns="0" bIns="0" rtlCol="0" anchor="t"/>
           <a:lstStyle/>
           <a:p>
-            <a:pPr indent="0" marL="0">
+            <a:pPr marL="0" indent="0">
               <a:buNone/>
             </a:pPr>
             <a:r>
@@ -5907,15 +5626,20 @@
             <a:ext cx="2651760" cy="1325880"/>
           </a:xfrm>
           <a:prstGeom prst="rect">
-            <a:avLst>
-              <a:gd name="adj" fmla="val 8276"/>
-            </a:avLst>
+            <a:avLst/>
           </a:prstGeom>
           <a:solidFill>
             <a:schemeClr val="bg2"/>
           </a:solidFill>
           <a:ln/>
         </p:spPr>
+        <p:txBody>
+          <a:bodyPr/>
+          <a:lstStyle/>
+          <a:p>
+            <a:endParaRPr lang="en-AU"/>
+          </a:p>
+        </p:txBody>
       </p:sp>
       <p:sp>
         <p:nvSpPr>
@@ -5938,7 +5662,7 @@
           <a:bodyPr wrap="square" lIns="0" tIns="0" rIns="0" bIns="0" rtlCol="0" anchor="ctr"/>
           <a:lstStyle/>
           <a:p>
-            <a:pPr algn="l" indent="0" marL="0">
+            <a:pPr marL="0" indent="0" algn="l">
               <a:buNone/>
             </a:pPr>
             <a:r>
@@ -5977,7 +5701,7 @@
           <a:bodyPr wrap="square" lIns="0" tIns="0" rIns="0" bIns="0" rtlCol="0" anchor="ctr"/>
           <a:lstStyle/>
           <a:p>
-            <a:pPr indent="0" marL="0">
+            <a:pPr marL="0" indent="0">
               <a:buNone/>
             </a:pPr>
             <a:r>
@@ -6013,7 +5737,7 @@
           <a:bodyPr wrap="square" lIns="0" tIns="0" rIns="0" bIns="0" rtlCol="0" anchor="t"/>
           <a:lstStyle/>
           <a:p>
-            <a:pPr indent="0" marL="0">
+            <a:pPr marL="0" indent="0">
               <a:buNone/>
             </a:pPr>
             <a:r>
@@ -6040,15 +5764,20 @@
             <a:ext cx="2651760" cy="1325880"/>
           </a:xfrm>
           <a:prstGeom prst="rect">
-            <a:avLst>
-              <a:gd name="adj" fmla="val 8276"/>
-            </a:avLst>
+            <a:avLst/>
           </a:prstGeom>
           <a:solidFill>
             <a:schemeClr val="bg2"/>
           </a:solidFill>
           <a:ln/>
         </p:spPr>
+        <p:txBody>
+          <a:bodyPr/>
+          <a:lstStyle/>
+          <a:p>
+            <a:endParaRPr lang="en-AU"/>
+          </a:p>
+        </p:txBody>
       </p:sp>
       <p:sp>
         <p:nvSpPr>
@@ -6071,7 +5800,7 @@
           <a:bodyPr wrap="square" lIns="0" tIns="0" rIns="0" bIns="0" rtlCol="0" anchor="ctr"/>
           <a:lstStyle/>
           <a:p>
-            <a:pPr algn="l" indent="0" marL="0">
+            <a:pPr marL="0" indent="0" algn="l">
               <a:buNone/>
             </a:pPr>
             <a:r>
@@ -6110,7 +5839,7 @@
           <a:bodyPr wrap="square" lIns="0" tIns="0" rIns="0" bIns="0" rtlCol="0" anchor="ctr"/>
           <a:lstStyle/>
           <a:p>
-            <a:pPr indent="0" marL="0">
+            <a:pPr marL="0" indent="0">
               <a:buNone/>
             </a:pPr>
             <a:r>
@@ -6146,7 +5875,7 @@
           <a:bodyPr wrap="square" lIns="0" tIns="0" rIns="0" bIns="0" rtlCol="0" anchor="t"/>
           <a:lstStyle/>
           <a:p>
-            <a:pPr indent="0" marL="0">
+            <a:pPr marL="0" indent="0">
               <a:buNone/>
             </a:pPr>
             <a:r>
@@ -6173,15 +5902,20 @@
             <a:ext cx="8229600" cy="457200"/>
           </a:xfrm>
           <a:prstGeom prst="rect">
-            <a:avLst>
-              <a:gd name="adj" fmla="val 24000"/>
-            </a:avLst>
+            <a:avLst/>
           </a:prstGeom>
           <a:solidFill>
             <a:schemeClr val="tx1"/>
           </a:solidFill>
           <a:ln/>
         </p:spPr>
+        <p:txBody>
+          <a:bodyPr/>
+          <a:lstStyle/>
+          <a:p>
+            <a:endParaRPr lang="en-AU"/>
+          </a:p>
+        </p:txBody>
       </p:sp>
       <p:sp>
         <p:nvSpPr>
@@ -6204,7 +5938,7 @@
           <a:bodyPr wrap="square" lIns="0" tIns="0" rIns="0" bIns="0" rtlCol="0" anchor="ctr"/>
           <a:lstStyle/>
           <a:p>
-            <a:pPr indent="0" marL="0">
+            <a:pPr marL="0" indent="0">
               <a:buNone/>
             </a:pPr>
             <a:r>
@@ -6221,7 +5955,7 @@
       </p:sp>
       <p:sp>
         <p:nvSpPr>
-          <p:cNvPr id="25" name="Slide Number Placeholder 0"/>
+          <p:cNvPr id="3" name="Slide Number Placeholder 0"/>
           <p:cNvSpPr>
             <a:spLocks noGrp="1"/>
           </p:cNvSpPr>
@@ -6239,7 +5973,7 @@
           </a:prstGeom>
           <a:extLst>
             <a:ext uri="{C572A759-6A51-4108-AA02-DFA0A04FC94B}">
-              <ma14:wrappingTextBoxFlag xmlns:ma14="http://schemas.microsoft.com/office/mac/drawingml/2011/main" val="0"/>
+              <ma14:wrappingTextBoxFlag xmlns:ma14="http://schemas.microsoft.com/office/mac/drawingml/2011/main" xmlns="" val="0"/>
             </a:ext>
           </a:extLst>
         </p:spPr>
@@ -6257,7 +5991,7 @@
           <a:p>
             <a:pPr algn="r"/>
             <a:fld id="{F7021451-1387-4CA6-816F-3879F97B5CBC}" type="slidenum">
-              <a:rPr b="0" lang="en-US"/>
+              <a:rPr lang="en-US" b="0"/>
               <a:t>12</a:t>
             </a:fld>
             <a:endParaRPr lang="en-US"/>
@@ -6292,9 +6026,11 @@
       <p:sp>
         <p:nvSpPr>
           <p:cNvPr id="2" name="Text 1"/>
-          <p:cNvSpPr/>
+          <p:cNvSpPr>
+            <a:spLocks noGrp="1"/>
+          </p:cNvSpPr>
           <p:nvPr>
-            <p:ph idx="101" type="title" hasCustomPrompt="1"/>
+            <p:ph type="title" idx="101" hasCustomPrompt="1"/>
           </p:nvPr>
         </p:nvSpPr>
         <p:spPr>
@@ -6312,7 +6048,7 @@
           <a:bodyPr wrap="square" lIns="0" tIns="0" rIns="0" bIns="0" rtlCol="0" anchor="ctr"/>
           <a:lstStyle/>
           <a:p>
-            <a:pPr algn="l" indent="0" marL="0">
+            <a:pPr marL="0" indent="0" algn="l">
               <a:buNone/>
             </a:pPr>
             <a:r>
@@ -6348,7 +6084,7 @@
           <a:bodyPr wrap="square" lIns="0" tIns="0" rIns="0" bIns="0" rtlCol="0" anchor="t"/>
           <a:lstStyle/>
           <a:p>
-            <a:pPr indent="0" marL="0">
+            <a:pPr marL="0" indent="0">
               <a:buNone/>
             </a:pPr>
             <a:r>
@@ -6375,15 +6111,20 @@
             <a:ext cx="4023360" cy="548640"/>
           </a:xfrm>
           <a:prstGeom prst="rect">
-            <a:avLst>
-              <a:gd name="adj" fmla="val 20000"/>
-            </a:avLst>
+            <a:avLst/>
           </a:prstGeom>
           <a:solidFill>
             <a:schemeClr val="tx2"/>
           </a:solidFill>
           <a:ln/>
         </p:spPr>
+        <p:txBody>
+          <a:bodyPr/>
+          <a:lstStyle/>
+          <a:p>
+            <a:endParaRPr lang="en-AU"/>
+          </a:p>
+        </p:txBody>
       </p:sp>
       <p:sp>
         <p:nvSpPr>
@@ -6406,7 +6147,7 @@
           <a:bodyPr wrap="square" lIns="0" tIns="0" rIns="0" bIns="0" rtlCol="0" anchor="ctr"/>
           <a:lstStyle/>
           <a:p>
-            <a:pPr indent="0" marL="0">
+            <a:pPr marL="0" indent="0">
               <a:buNone/>
             </a:pPr>
             <a:r>
@@ -6417,9 +6158,6 @@
               </a:rPr>
               <a:t>Terminals  </a:t>
             </a:r>
-            <a:pPr indent="0" marL="0">
-              <a:buNone/>
-            </a:pPr>
             <a:r>
               <a:rPr lang="en-US" sz="1300" dirty="0">
                 <a:solidFill>
@@ -6444,15 +6182,20 @@
             <a:ext cx="4023360" cy="548640"/>
           </a:xfrm>
           <a:prstGeom prst="rect">
-            <a:avLst>
-              <a:gd name="adj" fmla="val 20000"/>
-            </a:avLst>
+            <a:avLst/>
           </a:prstGeom>
           <a:solidFill>
             <a:schemeClr val="tx2"/>
           </a:solidFill>
           <a:ln/>
         </p:spPr>
+        <p:txBody>
+          <a:bodyPr/>
+          <a:lstStyle/>
+          <a:p>
+            <a:endParaRPr lang="en-AU"/>
+          </a:p>
+        </p:txBody>
       </p:sp>
       <p:sp>
         <p:nvSpPr>
@@ -6475,7 +6218,7 @@
           <a:bodyPr wrap="square" lIns="0" tIns="0" rIns="0" bIns="0" rtlCol="0" anchor="ctr"/>
           <a:lstStyle/>
           <a:p>
-            <a:pPr indent="0" marL="0">
+            <a:pPr marL="0" indent="0">
               <a:buNone/>
             </a:pPr>
             <a:r>
@@ -6486,9 +6229,6 @@
               </a:rPr>
               <a:t>Controls  </a:t>
             </a:r>
-            <a:pPr indent="0" marL="0">
-              <a:buNone/>
-            </a:pPr>
             <a:r>
               <a:rPr lang="en-US" sz="1300" dirty="0">
                 <a:solidFill>
@@ -6513,15 +6253,20 @@
             <a:ext cx="4023360" cy="548640"/>
           </a:xfrm>
           <a:prstGeom prst="rect">
-            <a:avLst>
-              <a:gd name="adj" fmla="val 20000"/>
-            </a:avLst>
+            <a:avLst/>
           </a:prstGeom>
           <a:solidFill>
             <a:schemeClr val="tx2"/>
           </a:solidFill>
           <a:ln/>
         </p:spPr>
+        <p:txBody>
+          <a:bodyPr/>
+          <a:lstStyle/>
+          <a:p>
+            <a:endParaRPr lang="en-AU"/>
+          </a:p>
+        </p:txBody>
       </p:sp>
       <p:sp>
         <p:nvSpPr>
@@ -6544,7 +6289,7 @@
           <a:bodyPr wrap="square" lIns="0" tIns="0" rIns="0" bIns="0" rtlCol="0" anchor="ctr"/>
           <a:lstStyle/>
           <a:p>
-            <a:pPr indent="0" marL="0">
+            <a:pPr marL="0" indent="0">
               <a:buNone/>
             </a:pPr>
             <a:r>
@@ -6555,9 +6300,6 @@
               </a:rPr>
               <a:t>Model  </a:t>
             </a:r>
-            <a:pPr indent="0" marL="0">
-              <a:buNone/>
-            </a:pPr>
             <a:r>
               <a:rPr lang="en-US" sz="1300" dirty="0">
                 <a:solidFill>
@@ -6582,15 +6324,20 @@
             <a:ext cx="4023360" cy="548640"/>
           </a:xfrm>
           <a:prstGeom prst="rect">
-            <a:avLst>
-              <a:gd name="adj" fmla="val 20000"/>
-            </a:avLst>
+            <a:avLst/>
           </a:prstGeom>
           <a:solidFill>
             <a:schemeClr val="tx2"/>
           </a:solidFill>
           <a:ln/>
         </p:spPr>
+        <p:txBody>
+          <a:bodyPr/>
+          <a:lstStyle/>
+          <a:p>
+            <a:endParaRPr lang="en-AU"/>
+          </a:p>
+        </p:txBody>
       </p:sp>
       <p:sp>
         <p:nvSpPr>
@@ -6613,7 +6360,7 @@
           <a:bodyPr wrap="square" lIns="0" tIns="0" rIns="0" bIns="0" rtlCol="0" anchor="ctr"/>
           <a:lstStyle/>
           <a:p>
-            <a:pPr indent="0" marL="0">
+            <a:pPr marL="0" indent="0">
               <a:buNone/>
             </a:pPr>
             <a:r>
@@ -6624,9 +6371,6 @@
               </a:rPr>
               <a:t>Limiter  </a:t>
             </a:r>
-            <a:pPr indent="0" marL="0">
-              <a:buNone/>
-            </a:pPr>
             <a:r>
               <a:rPr lang="en-US" sz="1300" dirty="0">
                 <a:solidFill>
@@ -6660,7 +6404,7 @@
           <a:bodyPr wrap="square" lIns="0" tIns="0" rIns="0" bIns="0" rtlCol="0" anchor="t"/>
           <a:lstStyle/>
           <a:p>
-            <a:pPr indent="0" marL="0">
+            <a:pPr marL="0" indent="0">
               <a:buNone/>
             </a:pPr>
             <a:r>
@@ -6687,9 +6431,7 @@
             <a:ext cx="1874520" cy="1600200"/>
           </a:xfrm>
           <a:prstGeom prst="rect">
-            <a:avLst>
-              <a:gd name="adj" fmla="val 6857"/>
-            </a:avLst>
+            <a:avLst/>
           </a:prstGeom>
           <a:solidFill>
             <a:schemeClr val="tx2"/>
@@ -6700,7 +6442,7 @@
           <a:bodyPr wrap="square" lIns="101600" tIns="101600" rIns="101600" bIns="101600" rtlCol="0" anchor="ctr"/>
           <a:lstStyle/>
           <a:p>
-            <a:pPr algn="ctr" indent="0" marL="0">
+            <a:pPr marL="0" indent="0" algn="ctr">
               <a:buNone/>
             </a:pPr>
             <a:r>
@@ -6714,7 +6456,7 @@
             <a:endParaRPr lang="en-US" sz="3400" dirty="0"/>
           </a:p>
           <a:p>
-            <a:pPr algn="ctr" indent="0" marL="0">
+            <a:pPr marL="0" indent="0" algn="ctr">
               <a:buNone/>
             </a:pPr>
             <a:r>
@@ -6741,9 +6483,7 @@
             <a:ext cx="1874520" cy="1600200"/>
           </a:xfrm>
           <a:prstGeom prst="rect">
-            <a:avLst>
-              <a:gd name="adj" fmla="val 6857"/>
-            </a:avLst>
+            <a:avLst/>
           </a:prstGeom>
           <a:solidFill>
             <a:schemeClr val="tx2"/>
@@ -6754,7 +6494,7 @@
           <a:bodyPr wrap="square" lIns="101600" tIns="101600" rIns="101600" bIns="101600" rtlCol="0" anchor="ctr"/>
           <a:lstStyle/>
           <a:p>
-            <a:pPr algn="ctr" indent="0" marL="0">
+            <a:pPr marL="0" indent="0" algn="ctr">
               <a:buNone/>
             </a:pPr>
             <a:r>
@@ -6768,7 +6508,7 @@
             <a:endParaRPr lang="en-US" sz="3400" dirty="0"/>
           </a:p>
           <a:p>
-            <a:pPr algn="ctr" indent="0" marL="0">
+            <a:pPr marL="0" indent="0" algn="ctr">
               <a:buNone/>
             </a:pPr>
             <a:r>
@@ -6795,15 +6535,20 @@
             <a:ext cx="3931920" cy="1554480"/>
           </a:xfrm>
           <a:prstGeom prst="rect">
-            <a:avLst>
-              <a:gd name="adj" fmla="val 7059"/>
-            </a:avLst>
+            <a:avLst/>
           </a:prstGeom>
           <a:solidFill>
             <a:schemeClr val="accent1"/>
           </a:solidFill>
           <a:ln/>
         </p:spPr>
+        <p:txBody>
+          <a:bodyPr/>
+          <a:lstStyle/>
+          <a:p>
+            <a:endParaRPr lang="en-AU"/>
+          </a:p>
+        </p:txBody>
       </p:sp>
       <p:sp>
         <p:nvSpPr>
@@ -6826,7 +6571,7 @@
           <a:bodyPr wrap="square" lIns="0" tIns="0" rIns="0" bIns="0" rtlCol="0" anchor="ctr"/>
           <a:lstStyle/>
           <a:p>
-            <a:pPr indent="0" marL="0">
+            <a:pPr marL="0" indent="0">
               <a:buNone/>
             </a:pPr>
             <a:r>
@@ -6840,7 +6585,7 @@
             <a:endParaRPr lang="en-US" sz="2400" dirty="0"/>
           </a:p>
           <a:p>
-            <a:pPr indent="0" marL="0">
+            <a:pPr marL="0" indent="0">
               <a:buNone/>
             </a:pPr>
             <a:r>
@@ -6875,7 +6620,7 @@
           </a:prstGeom>
           <a:extLst>
             <a:ext uri="{C572A759-6A51-4108-AA02-DFA0A04FC94B}">
-              <ma14:wrappingTextBoxFlag xmlns:ma14="http://schemas.microsoft.com/office/mac/drawingml/2011/main" val="0"/>
+              <ma14:wrappingTextBoxFlag xmlns:ma14="http://schemas.microsoft.com/office/mac/drawingml/2011/main" xmlns="" val="0"/>
             </a:ext>
           </a:extLst>
         </p:spPr>
@@ -6893,7 +6638,7 @@
           <a:p>
             <a:pPr algn="r"/>
             <a:fld id="{F7021451-1387-4CA6-816F-3879F97B5CBC}" type="slidenum">
-              <a:rPr b="0" lang="en-US"/>
+              <a:rPr lang="en-US" b="0"/>
               <a:t>13</a:t>
             </a:fld>
             <a:endParaRPr lang="en-US"/>
@@ -6928,9 +6673,11 @@
       <p:sp>
         <p:nvSpPr>
           <p:cNvPr id="2" name="Text 0"/>
-          <p:cNvSpPr/>
+          <p:cNvSpPr>
+            <a:spLocks noGrp="1"/>
+          </p:cNvSpPr>
           <p:nvPr>
-            <p:ph idx="100" type="title" hasCustomPrompt="1"/>
+            <p:ph type="title" idx="100" hasCustomPrompt="1"/>
           </p:nvPr>
         </p:nvSpPr>
         <p:spPr>
@@ -6948,7 +6695,7 @@
           <a:bodyPr wrap="square" lIns="0" tIns="0" rIns="0" bIns="0" rtlCol="0" anchor="ctr"/>
           <a:lstStyle/>
           <a:p>
-            <a:pPr algn="l" indent="0" marL="0">
+            <a:pPr marL="0" indent="0" algn="l">
               <a:buNone/>
             </a:pPr>
             <a:r>
@@ -6979,16 +6726,34 @@
         </p:nvGraphicFramePr>
         <p:xfrm>
           <a:off x="457200" y="1143000"/>
-          <a:ext cx="8229600" cy="914400"/>
+          <a:ext cx="8229600" cy="3127248"/>
         </p:xfrm>
         <a:graphic>
           <a:graphicData uri="http://schemas.openxmlformats.org/drawingml/2006/table">
             <a:tbl>
               <a:tblPr/>
               <a:tblGrid>
-                <a:gridCol w="2834640"/>
-                <a:gridCol w="2651760"/>
-                <a:gridCol w="2743200"/>
+                <a:gridCol w="2834640">
+                  <a:extLst>
+                    <a:ext uri="{9D8B030D-6E8A-4147-A177-3AD203B41FA5}">
+                      <a16:colId xmlns:a16="http://schemas.microsoft.com/office/drawing/2014/main" val="20000"/>
+                    </a:ext>
+                  </a:extLst>
+                </a:gridCol>
+                <a:gridCol w="2651760">
+                  <a:extLst>
+                    <a:ext uri="{9D8B030D-6E8A-4147-A177-3AD203B41FA5}">
+                      <a16:colId xmlns:a16="http://schemas.microsoft.com/office/drawing/2014/main" val="20001"/>
+                    </a:ext>
+                  </a:extLst>
+                </a:gridCol>
+                <a:gridCol w="2743200">
+                  <a:extLst>
+                    <a:ext uri="{9D8B030D-6E8A-4147-A177-3AD203B41FA5}">
+                      <a16:colId xmlns:a16="http://schemas.microsoft.com/office/drawing/2014/main" val="20002"/>
+                    </a:ext>
+                  </a:extLst>
+                </a:gridCol>
               </a:tblGrid>
               <a:tr h="347472">
                 <a:tc>
@@ -6996,7 +6761,7 @@
                     <a:bodyPr/>
                     <a:lstStyle/>
                     <a:p>
-                      <a:pPr indent="0" marL="0">
+                      <a:pPr marL="0" indent="0">
                         <a:buNone/>
                       </a:pPr>
                       <a:r>
@@ -7010,7 +6775,7 @@
                       <a:endParaRPr lang="en-US" sz="1300" dirty="0"/>
                     </a:p>
                   </a:txBody>
-                  <a:tcPr marL="91440" marR="91440" marT="0" marB="0" anchor="ctr">
+                  <a:tcPr marT="0" marB="0" anchor="ctr">
                     <a:lnL w="9525" cap="flat" cmpd="sng" algn="ctr">
                       <a:solidFill>
                         <a:srgbClr val="D4D6D8"/>
@@ -7057,7 +6822,7 @@
                     <a:bodyPr/>
                     <a:lstStyle/>
                     <a:p>
-                      <a:pPr indent="0" marL="0">
+                      <a:pPr marL="0" indent="0">
                         <a:buNone/>
                       </a:pPr>
                       <a:r>
@@ -7071,7 +6836,7 @@
                       <a:endParaRPr lang="en-US" sz="1300" dirty="0"/>
                     </a:p>
                   </a:txBody>
-                  <a:tcPr marL="91440" marR="91440" marT="0" marB="0" anchor="ctr">
+                  <a:tcPr marT="0" marB="0" anchor="ctr">
                     <a:lnL w="9525" cap="flat" cmpd="sng" algn="ctr">
                       <a:solidFill>
                         <a:srgbClr val="D4D6D8"/>
@@ -7118,7 +6883,7 @@
                     <a:bodyPr/>
                     <a:lstStyle/>
                     <a:p>
-                      <a:pPr indent="0" marL="0">
+                      <a:pPr marL="0" indent="0">
                         <a:buNone/>
                       </a:pPr>
                       <a:r>
@@ -7132,7 +6897,7 @@
                       <a:endParaRPr lang="en-US" sz="1300" dirty="0"/>
                     </a:p>
                   </a:txBody>
-                  <a:tcPr marL="91440" marR="91440" marT="0" marB="0" anchor="ctr">
+                  <a:tcPr marT="0" marB="0" anchor="ctr">
                     <a:lnL w="9525" cap="flat" cmpd="sng" algn="ctr">
                       <a:solidFill>
                         <a:srgbClr val="D4D6D8"/>
@@ -7174,6 +6939,11 @@
                     </a:solidFill>
                   </a:tcPr>
                 </a:tc>
+                <a:extLst>
+                  <a:ext uri="{0D108BD9-81ED-4DB2-BD59-A6C34878D82A}">
+                    <a16:rowId xmlns:a16="http://schemas.microsoft.com/office/drawing/2014/main" val="10000"/>
+                  </a:ext>
+                </a:extLst>
               </a:tr>
               <a:tr h="347472">
                 <a:tc>
@@ -7181,7 +6951,7 @@
                     <a:bodyPr/>
                     <a:lstStyle/>
                     <a:p>
-                      <a:pPr indent="0" marL="0">
+                      <a:pPr marL="0" indent="0">
                         <a:buNone/>
                       </a:pPr>
                       <a:r>
@@ -7195,7 +6965,7 @@
                       <a:endParaRPr lang="en-US" sz="1250" dirty="0"/>
                     </a:p>
                   </a:txBody>
-                  <a:tcPr marL="91440" marR="91440" marT="0" marB="0" anchor="ctr">
+                  <a:tcPr marT="0" marB="0" anchor="ctr">
                     <a:lnL w="9525" cap="flat" cmpd="sng" algn="ctr">
                       <a:solidFill>
                         <a:srgbClr val="D4D6D8"/>
@@ -7239,7 +7009,7 @@
                     <a:bodyPr/>
                     <a:lstStyle/>
                     <a:p>
-                      <a:pPr indent="0" marL="0">
+                      <a:pPr marL="0" indent="0">
                         <a:buNone/>
                       </a:pPr>
                       <a:r>
@@ -7253,7 +7023,7 @@
                       <a:endParaRPr lang="en-US" sz="1250" dirty="0"/>
                     </a:p>
                   </a:txBody>
-                  <a:tcPr marL="91440" marR="91440" marT="0" marB="0" anchor="ctr">
+                  <a:tcPr marT="0" marB="0" anchor="ctr">
                     <a:lnL w="9525" cap="flat" cmpd="sng" algn="ctr">
                       <a:solidFill>
                         <a:srgbClr val="D4D6D8"/>
@@ -7297,7 +7067,7 @@
                     <a:bodyPr/>
                     <a:lstStyle/>
                     <a:p>
-                      <a:pPr indent="0" marL="0">
+                      <a:pPr marL="0" indent="0">
                         <a:buNone/>
                       </a:pPr>
                       <a:r>
@@ -7311,7 +7081,7 @@
                       <a:endParaRPr lang="en-US" sz="1250" dirty="0"/>
                     </a:p>
                   </a:txBody>
-                  <a:tcPr marL="91440" marR="91440" marT="0" marB="0" anchor="ctr">
+                  <a:tcPr marT="0" marB="0" anchor="ctr">
                     <a:lnL w="9525" cap="flat" cmpd="sng" algn="ctr">
                       <a:solidFill>
                         <a:srgbClr val="D4D6D8"/>
@@ -7350,6 +7120,11 @@
                     </a:lnB>
                   </a:tcPr>
                 </a:tc>
+                <a:extLst>
+                  <a:ext uri="{0D108BD9-81ED-4DB2-BD59-A6C34878D82A}">
+                    <a16:rowId xmlns:a16="http://schemas.microsoft.com/office/drawing/2014/main" val="10001"/>
+                  </a:ext>
+                </a:extLst>
               </a:tr>
               <a:tr h="347472">
                 <a:tc>
@@ -7357,7 +7132,7 @@
                     <a:bodyPr/>
                     <a:lstStyle/>
                     <a:p>
-                      <a:pPr indent="0" marL="0">
+                      <a:pPr marL="0" indent="0">
                         <a:buNone/>
                       </a:pPr>
                       <a:r>
@@ -7371,7 +7146,7 @@
                       <a:endParaRPr lang="en-US" sz="1250" dirty="0"/>
                     </a:p>
                   </a:txBody>
-                  <a:tcPr marL="91440" marR="91440" marT="0" marB="0" anchor="ctr">
+                  <a:tcPr marT="0" marB="0" anchor="ctr">
                     <a:lnL w="9525" cap="flat" cmpd="sng" algn="ctr">
                       <a:solidFill>
                         <a:srgbClr val="D4D6D8"/>
@@ -7415,7 +7190,7 @@
                     <a:bodyPr/>
                     <a:lstStyle/>
                     <a:p>
-                      <a:pPr indent="0" marL="0">
+                      <a:pPr marL="0" indent="0">
                         <a:buNone/>
                       </a:pPr>
                       <a:r>
@@ -7429,7 +7204,7 @@
                       <a:endParaRPr lang="en-US" sz="1250" dirty="0"/>
                     </a:p>
                   </a:txBody>
-                  <a:tcPr marL="91440" marR="91440" marT="0" marB="0" anchor="ctr">
+                  <a:tcPr marT="0" marB="0" anchor="ctr">
                     <a:lnL w="9525" cap="flat" cmpd="sng" algn="ctr">
                       <a:solidFill>
                         <a:srgbClr val="D4D6D8"/>
@@ -7473,7 +7248,7 @@
                     <a:bodyPr/>
                     <a:lstStyle/>
                     <a:p>
-                      <a:pPr indent="0" marL="0">
+                      <a:pPr marL="0" indent="0">
                         <a:buNone/>
                       </a:pPr>
                       <a:r>
@@ -7487,7 +7262,7 @@
                       <a:endParaRPr lang="en-US" sz="1250" dirty="0"/>
                     </a:p>
                   </a:txBody>
-                  <a:tcPr marL="91440" marR="91440" marT="0" marB="0" anchor="ctr">
+                  <a:tcPr marT="0" marB="0" anchor="ctr">
                     <a:lnL w="9525" cap="flat" cmpd="sng" algn="ctr">
                       <a:solidFill>
                         <a:srgbClr val="D4D6D8"/>
@@ -7526,6 +7301,11 @@
                     </a:lnB>
                   </a:tcPr>
                 </a:tc>
+                <a:extLst>
+                  <a:ext uri="{0D108BD9-81ED-4DB2-BD59-A6C34878D82A}">
+                    <a16:rowId xmlns:a16="http://schemas.microsoft.com/office/drawing/2014/main" val="10002"/>
+                  </a:ext>
+                </a:extLst>
               </a:tr>
               <a:tr h="347472">
                 <a:tc>
@@ -7533,7 +7313,7 @@
                     <a:bodyPr/>
                     <a:lstStyle/>
                     <a:p>
-                      <a:pPr indent="0" marL="0">
+                      <a:pPr marL="0" indent="0">
                         <a:buNone/>
                       </a:pPr>
                       <a:r>
@@ -7547,7 +7327,7 @@
                       <a:endParaRPr lang="en-US" sz="1250" dirty="0"/>
                     </a:p>
                   </a:txBody>
-                  <a:tcPr marL="91440" marR="91440" marT="0" marB="0" anchor="ctr">
+                  <a:tcPr marT="0" marB="0" anchor="ctr">
                     <a:lnL w="9525" cap="flat" cmpd="sng" algn="ctr">
                       <a:solidFill>
                         <a:srgbClr val="D4D6D8"/>
@@ -7591,7 +7371,7 @@
                     <a:bodyPr/>
                     <a:lstStyle/>
                     <a:p>
-                      <a:pPr indent="0" marL="0">
+                      <a:pPr marL="0" indent="0">
                         <a:buNone/>
                       </a:pPr>
                       <a:r>
@@ -7605,7 +7385,7 @@
                       <a:endParaRPr lang="en-US" sz="1250" dirty="0"/>
                     </a:p>
                   </a:txBody>
-                  <a:tcPr marL="91440" marR="91440" marT="0" marB="0" anchor="ctr">
+                  <a:tcPr marT="0" marB="0" anchor="ctr">
                     <a:lnL w="9525" cap="flat" cmpd="sng" algn="ctr">
                       <a:solidFill>
                         <a:srgbClr val="D4D6D8"/>
@@ -7649,7 +7429,7 @@
                     <a:bodyPr/>
                     <a:lstStyle/>
                     <a:p>
-                      <a:pPr indent="0" marL="0">
+                      <a:pPr marL="0" indent="0">
                         <a:buNone/>
                       </a:pPr>
                       <a:r>
@@ -7663,7 +7443,7 @@
                       <a:endParaRPr lang="en-US" sz="1250" dirty="0"/>
                     </a:p>
                   </a:txBody>
-                  <a:tcPr marL="91440" marR="91440" marT="0" marB="0" anchor="ctr">
+                  <a:tcPr marT="0" marB="0" anchor="ctr">
                     <a:lnL w="9525" cap="flat" cmpd="sng" algn="ctr">
                       <a:solidFill>
                         <a:srgbClr val="D4D6D8"/>
@@ -7702,6 +7482,11 @@
                     </a:lnB>
                   </a:tcPr>
                 </a:tc>
+                <a:extLst>
+                  <a:ext uri="{0D108BD9-81ED-4DB2-BD59-A6C34878D82A}">
+                    <a16:rowId xmlns:a16="http://schemas.microsoft.com/office/drawing/2014/main" val="10003"/>
+                  </a:ext>
+                </a:extLst>
               </a:tr>
               <a:tr h="347472">
                 <a:tc>
@@ -7709,7 +7494,7 @@
                     <a:bodyPr/>
                     <a:lstStyle/>
                     <a:p>
-                      <a:pPr indent="0" marL="0">
+                      <a:pPr marL="0" indent="0">
                         <a:buNone/>
                       </a:pPr>
                       <a:r>
@@ -7723,7 +7508,7 @@
                       <a:endParaRPr lang="en-US" sz="1250" dirty="0"/>
                     </a:p>
                   </a:txBody>
-                  <a:tcPr marL="91440" marR="91440" marT="0" marB="0" anchor="ctr">
+                  <a:tcPr marT="0" marB="0" anchor="ctr">
                     <a:lnL w="9525" cap="flat" cmpd="sng" algn="ctr">
                       <a:solidFill>
                         <a:srgbClr val="D4D6D8"/>
@@ -7767,7 +7552,7 @@
                     <a:bodyPr/>
                     <a:lstStyle/>
                     <a:p>
-                      <a:pPr indent="0" marL="0">
+                      <a:pPr marL="0" indent="0">
                         <a:buNone/>
                       </a:pPr>
                       <a:r>
@@ -7781,7 +7566,7 @@
                       <a:endParaRPr lang="en-US" sz="1250" dirty="0"/>
                     </a:p>
                   </a:txBody>
-                  <a:tcPr marL="91440" marR="91440" marT="0" marB="0" anchor="ctr">
+                  <a:tcPr marT="0" marB="0" anchor="ctr">
                     <a:lnL w="9525" cap="flat" cmpd="sng" algn="ctr">
                       <a:solidFill>
                         <a:srgbClr val="D4D6D8"/>
@@ -7825,7 +7610,7 @@
                     <a:bodyPr/>
                     <a:lstStyle/>
                     <a:p>
-                      <a:pPr indent="0" marL="0">
+                      <a:pPr marL="0" indent="0">
                         <a:buNone/>
                       </a:pPr>
                       <a:r>
@@ -7839,7 +7624,7 @@
                       <a:endParaRPr lang="en-US" sz="1250" dirty="0"/>
                     </a:p>
                   </a:txBody>
-                  <a:tcPr marL="91440" marR="91440" marT="0" marB="0" anchor="ctr">
+                  <a:tcPr marT="0" marB="0" anchor="ctr">
                     <a:lnL w="9525" cap="flat" cmpd="sng" algn="ctr">
                       <a:solidFill>
                         <a:srgbClr val="D4D6D8"/>
@@ -7878,6 +7663,11 @@
                     </a:lnB>
                   </a:tcPr>
                 </a:tc>
+                <a:extLst>
+                  <a:ext uri="{0D108BD9-81ED-4DB2-BD59-A6C34878D82A}">
+                    <a16:rowId xmlns:a16="http://schemas.microsoft.com/office/drawing/2014/main" val="10004"/>
+                  </a:ext>
+                </a:extLst>
               </a:tr>
               <a:tr h="347472">
                 <a:tc>
@@ -7885,7 +7675,7 @@
                     <a:bodyPr/>
                     <a:lstStyle/>
                     <a:p>
-                      <a:pPr indent="0" marL="0">
+                      <a:pPr marL="0" indent="0">
                         <a:buNone/>
                       </a:pPr>
                       <a:r>
@@ -7899,7 +7689,7 @@
                       <a:endParaRPr lang="en-US" sz="1250" dirty="0"/>
                     </a:p>
                   </a:txBody>
-                  <a:tcPr marL="91440" marR="91440" marT="0" marB="0" anchor="ctr">
+                  <a:tcPr marT="0" marB="0" anchor="ctr">
                     <a:lnL w="9525" cap="flat" cmpd="sng" algn="ctr">
                       <a:solidFill>
                         <a:srgbClr val="D4D6D8"/>
@@ -7943,7 +7733,7 @@
                     <a:bodyPr/>
                     <a:lstStyle/>
                     <a:p>
-                      <a:pPr indent="0" marL="0">
+                      <a:pPr marL="0" indent="0">
                         <a:buNone/>
                       </a:pPr>
                       <a:r>
@@ -7957,7 +7747,7 @@
                       <a:endParaRPr lang="en-US" sz="1250" dirty="0"/>
                     </a:p>
                   </a:txBody>
-                  <a:tcPr marL="91440" marR="91440" marT="0" marB="0" anchor="ctr">
+                  <a:tcPr marT="0" marB="0" anchor="ctr">
                     <a:lnL w="9525" cap="flat" cmpd="sng" algn="ctr">
                       <a:solidFill>
                         <a:srgbClr val="D4D6D8"/>
@@ -8001,7 +7791,7 @@
                     <a:bodyPr/>
                     <a:lstStyle/>
                     <a:p>
-                      <a:pPr indent="0" marL="0">
+                      <a:pPr marL="0" indent="0">
                         <a:buNone/>
                       </a:pPr>
                       <a:r>
@@ -8015,7 +7805,7 @@
                       <a:endParaRPr lang="en-US" sz="1250" dirty="0"/>
                     </a:p>
                   </a:txBody>
-                  <a:tcPr marL="91440" marR="91440" marT="0" marB="0" anchor="ctr">
+                  <a:tcPr marT="0" marB="0" anchor="ctr">
                     <a:lnL w="9525" cap="flat" cmpd="sng" algn="ctr">
                       <a:solidFill>
                         <a:srgbClr val="D4D6D8"/>
@@ -8054,6 +7844,11 @@
                     </a:lnB>
                   </a:tcPr>
                 </a:tc>
+                <a:extLst>
+                  <a:ext uri="{0D108BD9-81ED-4DB2-BD59-A6C34878D82A}">
+                    <a16:rowId xmlns:a16="http://schemas.microsoft.com/office/drawing/2014/main" val="10005"/>
+                  </a:ext>
+                </a:extLst>
               </a:tr>
               <a:tr h="347472">
                 <a:tc>
@@ -8061,7 +7856,7 @@
                     <a:bodyPr/>
                     <a:lstStyle/>
                     <a:p>
-                      <a:pPr indent="0" marL="0">
+                      <a:pPr marL="0" indent="0">
                         <a:buNone/>
                       </a:pPr>
                       <a:r>
@@ -8075,7 +7870,7 @@
                       <a:endParaRPr lang="en-US" sz="1250" dirty="0"/>
                     </a:p>
                   </a:txBody>
-                  <a:tcPr marL="91440" marR="91440" marT="0" marB="0" anchor="ctr">
+                  <a:tcPr marT="0" marB="0" anchor="ctr">
                     <a:lnL w="9525" cap="flat" cmpd="sng" algn="ctr">
                       <a:solidFill>
                         <a:srgbClr val="D4D6D8"/>
@@ -8119,7 +7914,7 @@
                     <a:bodyPr/>
                     <a:lstStyle/>
                     <a:p>
-                      <a:pPr indent="0" marL="0">
+                      <a:pPr marL="0" indent="0">
                         <a:buNone/>
                       </a:pPr>
                       <a:r>
@@ -8133,7 +7928,7 @@
                       <a:endParaRPr lang="en-US" sz="1250" dirty="0"/>
                     </a:p>
                   </a:txBody>
-                  <a:tcPr marL="91440" marR="91440" marT="0" marB="0" anchor="ctr">
+                  <a:tcPr marT="0" marB="0" anchor="ctr">
                     <a:lnL w="9525" cap="flat" cmpd="sng" algn="ctr">
                       <a:solidFill>
                         <a:srgbClr val="D4D6D8"/>
@@ -8177,7 +7972,7 @@
                     <a:bodyPr/>
                     <a:lstStyle/>
                     <a:p>
-                      <a:pPr indent="0" marL="0">
+                      <a:pPr marL="0" indent="0">
                         <a:buNone/>
                       </a:pPr>
                       <a:r>
@@ -8191,7 +7986,7 @@
                       <a:endParaRPr lang="en-US" sz="1250" dirty="0"/>
                     </a:p>
                   </a:txBody>
-                  <a:tcPr marL="91440" marR="91440" marT="0" marB="0" anchor="ctr">
+                  <a:tcPr marT="0" marB="0" anchor="ctr">
                     <a:lnL w="9525" cap="flat" cmpd="sng" algn="ctr">
                       <a:solidFill>
                         <a:srgbClr val="D4D6D8"/>
@@ -8230,6 +8025,11 @@
                     </a:lnB>
                   </a:tcPr>
                 </a:tc>
+                <a:extLst>
+                  <a:ext uri="{0D108BD9-81ED-4DB2-BD59-A6C34878D82A}">
+                    <a16:rowId xmlns:a16="http://schemas.microsoft.com/office/drawing/2014/main" val="10006"/>
+                  </a:ext>
+                </a:extLst>
               </a:tr>
               <a:tr h="347472">
                 <a:tc>
@@ -8237,7 +8037,7 @@
                     <a:bodyPr/>
                     <a:lstStyle/>
                     <a:p>
-                      <a:pPr indent="0" marL="0">
+                      <a:pPr marL="0" indent="0">
                         <a:buNone/>
                       </a:pPr>
                       <a:r>
@@ -8251,7 +8051,7 @@
                       <a:endParaRPr lang="en-US" sz="1250" dirty="0"/>
                     </a:p>
                   </a:txBody>
-                  <a:tcPr marL="91440" marR="91440" marT="0" marB="0" anchor="ctr">
+                  <a:tcPr marT="0" marB="0" anchor="ctr">
                     <a:lnL w="9525" cap="flat" cmpd="sng" algn="ctr">
                       <a:solidFill>
                         <a:srgbClr val="D4D6D8"/>
@@ -8295,7 +8095,7 @@
                     <a:bodyPr/>
                     <a:lstStyle/>
                     <a:p>
-                      <a:pPr indent="0" marL="0">
+                      <a:pPr marL="0" indent="0">
                         <a:buNone/>
                       </a:pPr>
                       <a:r>
@@ -8309,7 +8109,7 @@
                       <a:endParaRPr lang="en-US" sz="1250" dirty="0"/>
                     </a:p>
                   </a:txBody>
-                  <a:tcPr marL="91440" marR="91440" marT="0" marB="0" anchor="ctr">
+                  <a:tcPr marT="0" marB="0" anchor="ctr">
                     <a:lnL w="9525" cap="flat" cmpd="sng" algn="ctr">
                       <a:solidFill>
                         <a:srgbClr val="D4D6D8"/>
@@ -8353,7 +8153,7 @@
                     <a:bodyPr/>
                     <a:lstStyle/>
                     <a:p>
-                      <a:pPr indent="0" marL="0">
+                      <a:pPr marL="0" indent="0">
                         <a:buNone/>
                       </a:pPr>
                       <a:r>
@@ -8367,7 +8167,7 @@
                       <a:endParaRPr lang="en-US" sz="1250" dirty="0"/>
                     </a:p>
                   </a:txBody>
-                  <a:tcPr marL="91440" marR="91440" marT="0" marB="0" anchor="ctr">
+                  <a:tcPr marT="0" marB="0" anchor="ctr">
                     <a:lnL w="9525" cap="flat" cmpd="sng" algn="ctr">
                       <a:solidFill>
                         <a:srgbClr val="D4D6D8"/>
@@ -8406,6 +8206,11 @@
                     </a:lnB>
                   </a:tcPr>
                 </a:tc>
+                <a:extLst>
+                  <a:ext uri="{0D108BD9-81ED-4DB2-BD59-A6C34878D82A}">
+                    <a16:rowId xmlns:a16="http://schemas.microsoft.com/office/drawing/2014/main" val="10007"/>
+                  </a:ext>
+                </a:extLst>
               </a:tr>
               <a:tr h="347472">
                 <a:tc>
@@ -8413,7 +8218,7 @@
                     <a:bodyPr/>
                     <a:lstStyle/>
                     <a:p>
-                      <a:pPr indent="0" marL="0">
+                      <a:pPr marL="0" indent="0">
                         <a:buNone/>
                       </a:pPr>
                       <a:r>
@@ -8427,7 +8232,7 @@
                       <a:endParaRPr lang="en-US" sz="1250" dirty="0"/>
                     </a:p>
                   </a:txBody>
-                  <a:tcPr marL="91440" marR="91440" marT="0" marB="0" anchor="ctr">
+                  <a:tcPr marT="0" marB="0" anchor="ctr">
                     <a:lnL w="9525" cap="flat" cmpd="sng" algn="ctr">
                       <a:solidFill>
                         <a:srgbClr val="D4D6D8"/>
@@ -8471,7 +8276,7 @@
                     <a:bodyPr/>
                     <a:lstStyle/>
                     <a:p>
-                      <a:pPr indent="0" marL="0">
+                      <a:pPr marL="0" indent="0">
                         <a:buNone/>
                       </a:pPr>
                       <a:r>
@@ -8485,7 +8290,7 @@
                       <a:endParaRPr lang="en-US" sz="1250" dirty="0"/>
                     </a:p>
                   </a:txBody>
-                  <a:tcPr marL="91440" marR="91440" marT="0" marB="0" anchor="ctr">
+                  <a:tcPr marT="0" marB="0" anchor="ctr">
                     <a:lnL w="9525" cap="flat" cmpd="sng" algn="ctr">
                       <a:solidFill>
                         <a:srgbClr val="D4D6D8"/>
@@ -8529,7 +8334,7 @@
                     <a:bodyPr/>
                     <a:lstStyle/>
                     <a:p>
-                      <a:pPr indent="0" marL="0">
+                      <a:pPr marL="0" indent="0">
                         <a:buNone/>
                       </a:pPr>
                       <a:r>
@@ -8543,7 +8348,7 @@
                       <a:endParaRPr lang="en-US" sz="1250" dirty="0"/>
                     </a:p>
                   </a:txBody>
-                  <a:tcPr marL="91440" marR="91440" marT="0" marB="0" anchor="ctr">
+                  <a:tcPr marT="0" marB="0" anchor="ctr">
                     <a:lnL w="9525" cap="flat" cmpd="sng" algn="ctr">
                       <a:solidFill>
                         <a:srgbClr val="D4D6D8"/>
@@ -8582,6 +8387,11 @@
                     </a:lnB>
                   </a:tcPr>
                 </a:tc>
+                <a:extLst>
+                  <a:ext uri="{0D108BD9-81ED-4DB2-BD59-A6C34878D82A}">
+                    <a16:rowId xmlns:a16="http://schemas.microsoft.com/office/drawing/2014/main" val="10008"/>
+                  </a:ext>
+                </a:extLst>
               </a:tr>
             </a:tbl>
           </a:graphicData>
@@ -8599,15 +8409,20 @@
             <a:ext cx="8229600" cy="329184"/>
           </a:xfrm>
           <a:prstGeom prst="rect">
-            <a:avLst>
-              <a:gd name="adj" fmla="val 33333"/>
-            </a:avLst>
+            <a:avLst/>
           </a:prstGeom>
           <a:solidFill>
             <a:schemeClr val="bg2"/>
           </a:solidFill>
           <a:ln/>
         </p:spPr>
+        <p:txBody>
+          <a:bodyPr/>
+          <a:lstStyle/>
+          <a:p>
+            <a:endParaRPr lang="en-AU"/>
+          </a:p>
+        </p:txBody>
       </p:sp>
       <p:sp>
         <p:nvSpPr>
@@ -8630,7 +8445,7 @@
           <a:bodyPr wrap="square" lIns="0" tIns="0" rIns="0" bIns="0" rtlCol="0" anchor="ctr"/>
           <a:lstStyle/>
           <a:p>
-            <a:pPr indent="0" marL="0">
+            <a:pPr marL="0" indent="0">
               <a:buNone/>
             </a:pPr>
             <a:r>
@@ -8665,7 +8480,7 @@
           </a:prstGeom>
           <a:extLst>
             <a:ext uri="{C572A759-6A51-4108-AA02-DFA0A04FC94B}">
-              <ma14:wrappingTextBoxFlag xmlns:ma14="http://schemas.microsoft.com/office/mac/drawingml/2011/main" val="0"/>
+              <ma14:wrappingTextBoxFlag xmlns:ma14="http://schemas.microsoft.com/office/mac/drawingml/2011/main" xmlns="" val="0"/>
             </a:ext>
           </a:extLst>
         </p:spPr>
@@ -8683,7 +8498,7 @@
           <a:p>
             <a:pPr algn="r"/>
             <a:fld id="{F7021451-1387-4CA6-816F-3879F97B5CBC}" type="slidenum">
-              <a:rPr b="0" lang="en-US"/>
+              <a:rPr lang="en-US" b="0"/>
               <a:t>14</a:t>
             </a:fld>
             <a:endParaRPr lang="en-US"/>
@@ -8718,9 +8533,11 @@
       <p:sp>
         <p:nvSpPr>
           <p:cNvPr id="2" name="Text 0"/>
-          <p:cNvSpPr/>
+          <p:cNvSpPr>
+            <a:spLocks noGrp="1"/>
+          </p:cNvSpPr>
           <p:nvPr>
-            <p:ph idx="100" type="title" hasCustomPrompt="1"/>
+            <p:ph type="title" idx="100" hasCustomPrompt="1"/>
           </p:nvPr>
         </p:nvSpPr>
         <p:spPr>
@@ -8738,7 +8555,7 @@
           <a:bodyPr wrap="square" lIns="0" tIns="0" rIns="0" bIns="0" rtlCol="0" anchor="ctr"/>
           <a:lstStyle/>
           <a:p>
-            <a:pPr algn="l" indent="0" marL="0">
+            <a:pPr marL="0" indent="0" algn="l">
               <a:buNone/>
             </a:pPr>
             <a:r>
@@ -8765,15 +8582,20 @@
             <a:ext cx="3840480" cy="566928"/>
           </a:xfrm>
           <a:prstGeom prst="rect">
-            <a:avLst>
-              <a:gd name="adj" fmla="val 19355"/>
-            </a:avLst>
+            <a:avLst/>
           </a:prstGeom>
           <a:solidFill>
             <a:schemeClr val="bg2"/>
           </a:solidFill>
           <a:ln/>
         </p:spPr>
+        <p:txBody>
+          <a:bodyPr/>
+          <a:lstStyle/>
+          <a:p>
+            <a:endParaRPr lang="en-AU"/>
+          </a:p>
+        </p:txBody>
       </p:sp>
       <p:sp>
         <p:nvSpPr>
@@ -8796,7 +8618,7 @@
           <a:bodyPr wrap="square" lIns="0" tIns="0" rIns="0" bIns="0" rtlCol="0" anchor="ctr"/>
           <a:lstStyle/>
           <a:p>
-            <a:pPr indent="0" marL="0">
+            <a:pPr marL="0" indent="0">
               <a:buNone/>
             </a:pPr>
             <a:r>
@@ -8807,16 +8629,13 @@
               </a:rPr>
               <a:t>Presentation  </a:t>
             </a:r>
-            <a:pPr indent="0" marL="0">
-              <a:buNone/>
-            </a:pPr>
             <a:r>
               <a:rPr lang="en-US" sz="1100" dirty="0">
                 <a:solidFill>
                   <a:schemeClr val="accent6"/>
                 </a:solidFill>
               </a:rPr>
-              <a:t>gui, cli, batch, report, plotting</a:t>
+              <a:t>gui, cli, report, plotting</a:t>
             </a:r>
             <a:endParaRPr lang="en-US" sz="1400" dirty="0"/>
           </a:p>
@@ -8834,15 +8653,20 @@
             <a:ext cx="3840480" cy="566928"/>
           </a:xfrm>
           <a:prstGeom prst="rect">
-            <a:avLst>
-              <a:gd name="adj" fmla="val 19355"/>
-            </a:avLst>
+            <a:avLst/>
           </a:prstGeom>
           <a:solidFill>
             <a:schemeClr val="bg2"/>
           </a:solidFill>
           <a:ln/>
         </p:spPr>
+        <p:txBody>
+          <a:bodyPr/>
+          <a:lstStyle/>
+          <a:p>
+            <a:endParaRPr lang="en-AU"/>
+          </a:p>
+        </p:txBody>
       </p:sp>
       <p:sp>
         <p:nvSpPr>
@@ -8865,7 +8689,7 @@
           <a:bodyPr wrap="square" lIns="0" tIns="0" rIns="0" bIns="0" rtlCol="0" anchor="ctr"/>
           <a:lstStyle/>
           <a:p>
-            <a:pPr indent="0" marL="0">
+            <a:pPr marL="0" indent="0">
               <a:buNone/>
             </a:pPr>
             <a:r>
@@ -8876,9 +8700,6 @@
               </a:rPr>
               <a:t>Application  </a:t>
             </a:r>
-            <a:pPr indent="0" marL="0">
-              <a:buNone/>
-            </a:pPr>
             <a:r>
               <a:rPr lang="en-US" sz="1100" dirty="0">
                 <a:solidFill>
@@ -8903,15 +8724,20 @@
             <a:ext cx="3840480" cy="566928"/>
           </a:xfrm>
           <a:prstGeom prst="rect">
-            <a:avLst>
-              <a:gd name="adj" fmla="val 19355"/>
-            </a:avLst>
+            <a:avLst/>
           </a:prstGeom>
           <a:solidFill>
             <a:schemeClr val="bg2"/>
           </a:solidFill>
           <a:ln/>
         </p:spPr>
+        <p:txBody>
+          <a:bodyPr/>
+          <a:lstStyle/>
+          <a:p>
+            <a:endParaRPr lang="en-AU"/>
+          </a:p>
+        </p:txBody>
       </p:sp>
       <p:sp>
         <p:nvSpPr>
@@ -8934,7 +8760,7 @@
           <a:bodyPr wrap="square" lIns="0" tIns="0" rIns="0" bIns="0" rtlCol="0" anchor="ctr"/>
           <a:lstStyle/>
           <a:p>
-            <a:pPr indent="0" marL="0">
+            <a:pPr marL="0" indent="0">
               <a:buNone/>
             </a:pPr>
             <a:r>
@@ -8945,9 +8771,6 @@
               </a:rPr>
               <a:t>Language  </a:t>
             </a:r>
-            <a:pPr indent="0" marL="0">
-              <a:buNone/>
-            </a:pPr>
             <a:r>
               <a:rPr lang="en-US" sz="1100" dirty="0">
                 <a:solidFill>
@@ -8972,15 +8795,20 @@
             <a:ext cx="3840480" cy="566928"/>
           </a:xfrm>
           <a:prstGeom prst="rect">
-            <a:avLst>
-              <a:gd name="adj" fmla="val 19355"/>
-            </a:avLst>
+            <a:avLst/>
           </a:prstGeom>
           <a:solidFill>
             <a:schemeClr val="bg2"/>
           </a:solidFill>
           <a:ln/>
         </p:spPr>
+        <p:txBody>
+          <a:bodyPr/>
+          <a:lstStyle/>
+          <a:p>
+            <a:endParaRPr lang="en-AU"/>
+          </a:p>
+        </p:txBody>
       </p:sp>
       <p:sp>
         <p:nvSpPr>
@@ -9003,7 +8831,7 @@
           <a:bodyPr wrap="square" lIns="0" tIns="0" rIns="0" bIns="0" rtlCol="0" anchor="ctr"/>
           <a:lstStyle/>
           <a:p>
-            <a:pPr indent="0" marL="0">
+            <a:pPr marL="0" indent="0">
               <a:buNone/>
             </a:pPr>
             <a:r>
@@ -9014,9 +8842,6 @@
               </a:rPr>
               <a:t>Circuit model  </a:t>
             </a:r>
-            <a:pPr indent="0" marL="0">
-              <a:buNone/>
-            </a:pPr>
             <a:r>
               <a:rPr lang="en-US" sz="1100" dirty="0">
                 <a:solidFill>
@@ -9041,15 +8866,20 @@
             <a:ext cx="3840480" cy="566928"/>
           </a:xfrm>
           <a:prstGeom prst="rect">
-            <a:avLst>
-              <a:gd name="adj" fmla="val 19355"/>
-            </a:avLst>
+            <a:avLst/>
           </a:prstGeom>
           <a:solidFill>
             <a:schemeClr val="tx1"/>
           </a:solidFill>
           <a:ln/>
         </p:spPr>
+        <p:txBody>
+          <a:bodyPr/>
+          <a:lstStyle/>
+          <a:p>
+            <a:endParaRPr lang="en-AU"/>
+          </a:p>
+        </p:txBody>
       </p:sp>
       <p:sp>
         <p:nvSpPr>
@@ -9072,7 +8902,7 @@
           <a:bodyPr wrap="square" lIns="0" tIns="0" rIns="0" bIns="0" rtlCol="0" anchor="ctr"/>
           <a:lstStyle/>
           <a:p>
-            <a:pPr indent="0" marL="0">
+            <a:pPr marL="0" indent="0">
               <a:buNone/>
             </a:pPr>
             <a:r>
@@ -9083,9 +8913,6 @@
               </a:rPr>
               <a:t>Numerics  </a:t>
             </a:r>
-            <a:pPr indent="0" marL="0">
-              <a:buNone/>
-            </a:pPr>
             <a:r>
               <a:rPr lang="en-US" sz="1100" dirty="0">
                 <a:solidFill>
@@ -9119,7 +8946,7 @@
           <a:bodyPr wrap="square" lIns="0" tIns="0" rIns="0" bIns="0" rtlCol="0" anchor="t"/>
           <a:lstStyle/>
           <a:p>
-            <a:pPr indent="0" marL="0">
+            <a:pPr marL="0" indent="0">
               <a:buNone/>
             </a:pPr>
             <a:r>
@@ -9146,15 +8973,20 @@
             <a:ext cx="4114800" cy="2331720"/>
           </a:xfrm>
           <a:prstGeom prst="rect">
-            <a:avLst>
-              <a:gd name="adj" fmla="val 4706"/>
-            </a:avLst>
+            <a:avLst/>
           </a:prstGeom>
           <a:solidFill>
             <a:schemeClr val="tx1"/>
           </a:solidFill>
           <a:ln/>
         </p:spPr>
+        <p:txBody>
+          <a:bodyPr/>
+          <a:lstStyle/>
+          <a:p>
+            <a:endParaRPr lang="en-AU"/>
+          </a:p>
+        </p:txBody>
       </p:sp>
       <p:sp>
         <p:nvSpPr>
@@ -9177,7 +9009,7 @@
           <a:bodyPr wrap="square" lIns="0" tIns="0" rIns="0" bIns="0" rtlCol="0" anchor="t"/>
           <a:lstStyle/>
           <a:p>
-            <a:pPr indent="0" marL="0">
+            <a:pPr marL="0" indent="0">
               <a:buNone/>
             </a:pPr>
             <a:r>
@@ -9191,7 +9023,7 @@
             <a:endParaRPr lang="en-US" sz="1500" dirty="0"/>
           </a:p>
           <a:p>
-            <a:pPr indent="0" marL="0">
+            <a:pPr marL="0" indent="0">
               <a:buNone/>
             </a:pPr>
             <a:r>
@@ -9205,7 +9037,7 @@
             <a:endParaRPr lang="en-US" sz="1500" dirty="0"/>
           </a:p>
           <a:p>
-            <a:pPr indent="0" marL="0">
+            <a:pPr marL="0" indent="0">
               <a:buNone/>
             </a:pPr>
             <a:r>
@@ -9219,7 +9051,7 @@
             <a:endParaRPr lang="en-US" sz="1500" dirty="0"/>
           </a:p>
           <a:p>
-            <a:pPr indent="0" marL="0">
+            <a:pPr marL="0" indent="0">
               <a:buNone/>
             </a:pPr>
             <a:r>
@@ -9249,15 +9081,20 @@
             <a:ext cx="4114800" cy="822960"/>
           </a:xfrm>
           <a:prstGeom prst="rect">
-            <a:avLst>
-              <a:gd name="adj" fmla="val 13333"/>
-            </a:avLst>
+            <a:avLst/>
           </a:prstGeom>
           <a:solidFill>
             <a:schemeClr val="accent1"/>
           </a:solidFill>
           <a:ln/>
         </p:spPr>
+        <p:txBody>
+          <a:bodyPr/>
+          <a:lstStyle/>
+          <a:p>
+            <a:endParaRPr lang="en-AU"/>
+          </a:p>
+        </p:txBody>
       </p:sp>
       <p:sp>
         <p:nvSpPr>
@@ -9280,7 +9117,7 @@
           <a:bodyPr wrap="square" lIns="0" tIns="0" rIns="0" bIns="0" rtlCol="0" anchor="ctr"/>
           <a:lstStyle/>
           <a:p>
-            <a:pPr indent="0" marL="0">
+            <a:pPr marL="0" indent="0">
               <a:buNone/>
             </a:pPr>
             <a:r>
@@ -9315,7 +9152,7 @@
           </a:prstGeom>
           <a:extLst>
             <a:ext uri="{C572A759-6A51-4108-AA02-DFA0A04FC94B}">
-              <ma14:wrappingTextBoxFlag xmlns:ma14="http://schemas.microsoft.com/office/mac/drawingml/2011/main" val="0"/>
+              <ma14:wrappingTextBoxFlag xmlns:ma14="http://schemas.microsoft.com/office/mac/drawingml/2011/main" xmlns="" val="0"/>
             </a:ext>
           </a:extLst>
         </p:spPr>
@@ -9333,7 +9170,7 @@
           <a:p>
             <a:pPr algn="r"/>
             <a:fld id="{F7021451-1387-4CA6-816F-3879F97B5CBC}" type="slidenum">
-              <a:rPr b="0" lang="en-US"/>
+              <a:rPr lang="en-US" b="0"/>
               <a:t>15</a:t>
             </a:fld>
             <a:endParaRPr lang="en-US"/>
@@ -9368,9 +9205,11 @@
       <p:sp>
         <p:nvSpPr>
           <p:cNvPr id="2" name="Text 1"/>
-          <p:cNvSpPr/>
+          <p:cNvSpPr>
+            <a:spLocks noGrp="1"/>
+          </p:cNvSpPr>
           <p:nvPr>
-            <p:ph idx="101" type="title" hasCustomPrompt="1"/>
+            <p:ph type="title" idx="101" hasCustomPrompt="1"/>
           </p:nvPr>
         </p:nvSpPr>
         <p:spPr>
@@ -9388,7 +9227,7 @@
           <a:bodyPr wrap="square" lIns="0" tIns="0" rIns="0" bIns="0" rtlCol="0" anchor="ctr"/>
           <a:lstStyle/>
           <a:p>
-            <a:pPr algn="l" indent="0" marL="0">
+            <a:pPr marL="0" indent="0" algn="l">
               <a:buNone/>
             </a:pPr>
             <a:r>
@@ -9415,15 +9254,20 @@
             <a:ext cx="4846320" cy="713232"/>
           </a:xfrm>
           <a:prstGeom prst="rect">
-            <a:avLst>
-              <a:gd name="adj" fmla="val 15385"/>
-            </a:avLst>
+            <a:avLst/>
           </a:prstGeom>
           <a:solidFill>
             <a:schemeClr val="tx2"/>
           </a:solidFill>
           <a:ln/>
         </p:spPr>
+        <p:txBody>
+          <a:bodyPr/>
+          <a:lstStyle/>
+          <a:p>
+            <a:endParaRPr lang="en-AU"/>
+          </a:p>
+        </p:txBody>
       </p:sp>
       <p:sp>
         <p:nvSpPr>
@@ -9446,7 +9290,7 @@
           <a:bodyPr wrap="square" lIns="0" tIns="0" rIns="0" bIns="0" rtlCol="0" anchor="ctr"/>
           <a:lstStyle/>
           <a:p>
-            <a:pPr algn="l" indent="0" marL="0">
+            <a:pPr marL="0" indent="0" algn="l">
               <a:buNone/>
             </a:pPr>
             <a:r>
@@ -9485,7 +9329,7 @@
           <a:bodyPr wrap="square" lIns="0" tIns="0" rIns="0" bIns="0" rtlCol="0" anchor="ctr"/>
           <a:lstStyle/>
           <a:p>
-            <a:pPr indent="0" marL="0">
+            <a:pPr marL="0" indent="0">
               <a:buNone/>
             </a:pPr>
             <a:r>
@@ -9499,7 +9343,7 @@
             <a:endParaRPr lang="en-US" sz="1500" dirty="0"/>
           </a:p>
           <a:p>
-            <a:pPr indent="0" marL="0">
+            <a:pPr marL="0" indent="0">
               <a:buNone/>
             </a:pPr>
             <a:r>
@@ -9526,15 +9370,20 @@
             <a:ext cx="4846320" cy="713232"/>
           </a:xfrm>
           <a:prstGeom prst="rect">
-            <a:avLst>
-              <a:gd name="adj" fmla="val 15385"/>
-            </a:avLst>
+            <a:avLst/>
           </a:prstGeom>
           <a:solidFill>
             <a:schemeClr val="tx2"/>
           </a:solidFill>
           <a:ln/>
         </p:spPr>
+        <p:txBody>
+          <a:bodyPr/>
+          <a:lstStyle/>
+          <a:p>
+            <a:endParaRPr lang="en-AU"/>
+          </a:p>
+        </p:txBody>
       </p:sp>
       <p:sp>
         <p:nvSpPr>
@@ -9557,7 +9406,7 @@
           <a:bodyPr wrap="square" lIns="0" tIns="0" rIns="0" bIns="0" rtlCol="0" anchor="ctr"/>
           <a:lstStyle/>
           <a:p>
-            <a:pPr algn="l" indent="0" marL="0">
+            <a:pPr marL="0" indent="0" algn="l">
               <a:buNone/>
             </a:pPr>
             <a:r>
@@ -9596,7 +9445,7 @@
           <a:bodyPr wrap="square" lIns="0" tIns="0" rIns="0" bIns="0" rtlCol="0" anchor="ctr"/>
           <a:lstStyle/>
           <a:p>
-            <a:pPr indent="0" marL="0">
+            <a:pPr marL="0" indent="0">
               <a:buNone/>
             </a:pPr>
             <a:r>
@@ -9610,7 +9459,7 @@
             <a:endParaRPr lang="en-US" sz="1500" dirty="0"/>
           </a:p>
           <a:p>
-            <a:pPr indent="0" marL="0">
+            <a:pPr marL="0" indent="0">
               <a:buNone/>
             </a:pPr>
             <a:r>
@@ -9637,15 +9486,20 @@
             <a:ext cx="4846320" cy="713232"/>
           </a:xfrm>
           <a:prstGeom prst="rect">
-            <a:avLst>
-              <a:gd name="adj" fmla="val 15385"/>
-            </a:avLst>
+            <a:avLst/>
           </a:prstGeom>
           <a:solidFill>
             <a:schemeClr val="tx2"/>
           </a:solidFill>
           <a:ln/>
         </p:spPr>
+        <p:txBody>
+          <a:bodyPr/>
+          <a:lstStyle/>
+          <a:p>
+            <a:endParaRPr lang="en-AU"/>
+          </a:p>
+        </p:txBody>
       </p:sp>
       <p:sp>
         <p:nvSpPr>
@@ -9668,7 +9522,7 @@
           <a:bodyPr wrap="square" lIns="0" tIns="0" rIns="0" bIns="0" rtlCol="0" anchor="ctr"/>
           <a:lstStyle/>
           <a:p>
-            <a:pPr algn="l" indent="0" marL="0">
+            <a:pPr marL="0" indent="0" algn="l">
               <a:buNone/>
             </a:pPr>
             <a:r>
@@ -9707,7 +9561,7 @@
           <a:bodyPr wrap="square" lIns="0" tIns="0" rIns="0" bIns="0" rtlCol="0" anchor="ctr"/>
           <a:lstStyle/>
           <a:p>
-            <a:pPr indent="0" marL="0">
+            <a:pPr marL="0" indent="0">
               <a:buNone/>
             </a:pPr>
             <a:r>
@@ -9721,7 +9575,7 @@
             <a:endParaRPr lang="en-US" sz="1500" dirty="0"/>
           </a:p>
           <a:p>
-            <a:pPr indent="0" marL="0">
+            <a:pPr marL="0" indent="0">
               <a:buNone/>
             </a:pPr>
             <a:r>
@@ -9748,15 +9602,20 @@
             <a:ext cx="4846320" cy="713232"/>
           </a:xfrm>
           <a:prstGeom prst="rect">
-            <a:avLst>
-              <a:gd name="adj" fmla="val 15385"/>
-            </a:avLst>
+            <a:avLst/>
           </a:prstGeom>
           <a:solidFill>
             <a:schemeClr val="accent1"/>
           </a:solidFill>
           <a:ln/>
         </p:spPr>
+        <p:txBody>
+          <a:bodyPr/>
+          <a:lstStyle/>
+          <a:p>
+            <a:endParaRPr lang="en-AU"/>
+          </a:p>
+        </p:txBody>
       </p:sp>
       <p:sp>
         <p:nvSpPr>
@@ -9779,7 +9638,7 @@
           <a:bodyPr wrap="square" lIns="0" tIns="0" rIns="0" bIns="0" rtlCol="0" anchor="ctr"/>
           <a:lstStyle/>
           <a:p>
-            <a:pPr algn="l" indent="0" marL="0">
+            <a:pPr marL="0" indent="0" algn="l">
               <a:buNone/>
             </a:pPr>
             <a:r>
@@ -9818,7 +9677,7 @@
           <a:bodyPr wrap="square" lIns="0" tIns="0" rIns="0" bIns="0" rtlCol="0" anchor="ctr"/>
           <a:lstStyle/>
           <a:p>
-            <a:pPr indent="0" marL="0">
+            <a:pPr marL="0" indent="0">
               <a:buNone/>
             </a:pPr>
             <a:r>
@@ -9832,7 +9691,7 @@
             <a:endParaRPr lang="en-US" sz="1500" dirty="0"/>
           </a:p>
           <a:p>
-            <a:pPr indent="0" marL="0">
+            <a:pPr marL="0" indent="0">
               <a:buNone/>
             </a:pPr>
             <a:r>
@@ -9859,15 +9718,20 @@
             <a:ext cx="3108960" cy="3291840"/>
           </a:xfrm>
           <a:prstGeom prst="rect">
-            <a:avLst>
-              <a:gd name="adj" fmla="val 3529"/>
-            </a:avLst>
+            <a:avLst/>
           </a:prstGeom>
           <a:solidFill>
             <a:schemeClr val="bg2"/>
           </a:solidFill>
           <a:ln/>
         </p:spPr>
+        <p:txBody>
+          <a:bodyPr/>
+          <a:lstStyle/>
+          <a:p>
+            <a:endParaRPr lang="en-AU"/>
+          </a:p>
+        </p:txBody>
       </p:sp>
       <p:sp>
         <p:nvSpPr>
@@ -9890,7 +9754,7 @@
           <a:bodyPr wrap="square" lIns="0" tIns="0" rIns="0" bIns="0" rtlCol="0" anchor="t"/>
           <a:lstStyle/>
           <a:p>
-            <a:pPr indent="0" marL="0">
+            <a:pPr marL="0" indent="0">
               <a:spcAft>
                 <a:spcPts val="300"/>
               </a:spcAft>
@@ -9907,7 +9771,7 @@
             <a:endParaRPr lang="en-US" sz="1800" dirty="0"/>
           </a:p>
           <a:p>
-            <a:pPr indent="0" marL="0">
+            <a:pPr marL="0" indent="0">
               <a:spcAft>
                 <a:spcPts val="300"/>
               </a:spcAft>
@@ -9924,7 +9788,7 @@
             <a:endParaRPr lang="en-US" sz="1800" dirty="0"/>
           </a:p>
           <a:p>
-            <a:pPr indent="0" marL="0">
+            <a:pPr marL="0" indent="0">
               <a:spcAft>
                 <a:spcPts val="300"/>
               </a:spcAft>
@@ -9941,7 +9805,7 @@
             <a:endParaRPr lang="en-US" sz="1800" dirty="0"/>
           </a:p>
           <a:p>
-            <a:pPr indent="0" marL="0">
+            <a:pPr marL="0" indent="0">
               <a:spcAft>
                 <a:spcPts val="300"/>
               </a:spcAft>
@@ -9961,7 +9825,7 @@
             <a:endParaRPr lang="en-US" sz="1800" dirty="0"/>
           </a:p>
           <a:p>
-            <a:pPr indent="0" marL="0">
+            <a:pPr marL="0" indent="0">
               <a:spcAft>
                 <a:spcPts val="300"/>
               </a:spcAft>
@@ -9978,7 +9842,7 @@
             <a:endParaRPr lang="en-US" sz="1800" dirty="0"/>
           </a:p>
           <a:p>
-            <a:pPr indent="0" marL="0">
+            <a:pPr marL="0" indent="0">
               <a:spcAft>
                 <a:spcPts val="300"/>
               </a:spcAft>
@@ -9998,7 +9862,7 @@
             <a:endParaRPr lang="en-US" sz="1800" dirty="0"/>
           </a:p>
           <a:p>
-            <a:pPr indent="0" marL="0">
+            <a:pPr marL="0" indent="0">
               <a:spcAft>
                 <a:spcPts val="300"/>
               </a:spcAft>
@@ -10015,7 +9879,7 @@
             <a:endParaRPr lang="en-US" sz="1800" dirty="0"/>
           </a:p>
           <a:p>
-            <a:pPr indent="0" marL="0">
+            <a:pPr marL="0" indent="0">
               <a:spcAft>
                 <a:spcPts val="300"/>
               </a:spcAft>
@@ -10035,7 +9899,7 @@
             <a:endParaRPr lang="en-US" sz="1800" dirty="0"/>
           </a:p>
           <a:p>
-            <a:pPr indent="0" marL="0">
+            <a:pPr marL="0" indent="0">
               <a:spcAft>
                 <a:spcPts val="300"/>
               </a:spcAft>
@@ -10052,7 +9916,7 @@
             <a:endParaRPr lang="en-US" sz="1800" dirty="0"/>
           </a:p>
           <a:p>
-            <a:pPr indent="0" marL="0">
+            <a:pPr marL="0" indent="0">
               <a:spcAft>
                 <a:spcPts val="300"/>
               </a:spcAft>
@@ -10072,7 +9936,7 @@
             <a:endParaRPr lang="en-US" sz="1800" dirty="0"/>
           </a:p>
           <a:p>
-            <a:pPr indent="0" marL="0">
+            <a:pPr marL="0" indent="0">
               <a:spcAft>
                 <a:spcPts val="300"/>
               </a:spcAft>
@@ -10110,7 +9974,7 @@
           </a:prstGeom>
           <a:extLst>
             <a:ext uri="{C572A759-6A51-4108-AA02-DFA0A04FC94B}">
-              <ma14:wrappingTextBoxFlag xmlns:ma14="http://schemas.microsoft.com/office/mac/drawingml/2011/main" val="0"/>
+              <ma14:wrappingTextBoxFlag xmlns:ma14="http://schemas.microsoft.com/office/mac/drawingml/2011/main" xmlns="" val="0"/>
             </a:ext>
           </a:extLst>
         </p:spPr>
@@ -10128,7 +9992,7 @@
           <a:p>
             <a:pPr algn="r"/>
             <a:fld id="{F7021451-1387-4CA6-816F-3879F97B5CBC}" type="slidenum">
-              <a:rPr b="0" lang="en-US"/>
+              <a:rPr lang="en-US" b="0"/>
               <a:t>16</a:t>
             </a:fld>
             <a:endParaRPr lang="en-US"/>
@@ -10163,9 +10027,11 @@
       <p:sp>
         <p:nvSpPr>
           <p:cNvPr id="2" name="Text 0"/>
-          <p:cNvSpPr/>
+          <p:cNvSpPr>
+            <a:spLocks noGrp="1"/>
+          </p:cNvSpPr>
           <p:nvPr>
-            <p:ph idx="100" type="title" hasCustomPrompt="1"/>
+            <p:ph type="title" idx="100" hasCustomPrompt="1"/>
           </p:nvPr>
         </p:nvSpPr>
         <p:spPr>
@@ -10183,7 +10049,7 @@
           <a:bodyPr wrap="square" lIns="0" tIns="0" rIns="0" bIns="0" rtlCol="0" anchor="ctr"/>
           <a:lstStyle/>
           <a:p>
-            <a:pPr algn="l" indent="0" marL="0">
+            <a:pPr marL="0" indent="0" algn="l">
               <a:buNone/>
             </a:pPr>
             <a:r>
@@ -10210,15 +10076,20 @@
             <a:ext cx="4023360" cy="3291840"/>
           </a:xfrm>
           <a:prstGeom prst="rect">
-            <a:avLst>
-              <a:gd name="adj" fmla="val 3333"/>
-            </a:avLst>
+            <a:avLst/>
           </a:prstGeom>
           <a:solidFill>
             <a:schemeClr val="bg2"/>
           </a:solidFill>
           <a:ln/>
         </p:spPr>
+        <p:txBody>
+          <a:bodyPr/>
+          <a:lstStyle/>
+          <a:p>
+            <a:endParaRPr lang="en-AU"/>
+          </a:p>
+        </p:txBody>
       </p:sp>
       <p:sp>
         <p:nvSpPr>
@@ -10241,7 +10112,7 @@
           <a:bodyPr wrap="square" lIns="0" tIns="0" rIns="0" bIns="0" rtlCol="0" anchor="t"/>
           <a:lstStyle/>
           <a:p>
-            <a:pPr indent="0" marL="0">
+            <a:pPr marL="0" indent="0">
               <a:buNone/>
             </a:pPr>
             <a:r>
@@ -10380,15 +10251,20 @@
             <a:ext cx="4023360" cy="3291840"/>
           </a:xfrm>
           <a:prstGeom prst="rect">
-            <a:avLst>
-              <a:gd name="adj" fmla="val 3333"/>
-            </a:avLst>
+            <a:avLst/>
           </a:prstGeom>
           <a:solidFill>
             <a:schemeClr val="tx1"/>
           </a:solidFill>
           <a:ln/>
         </p:spPr>
+        <p:txBody>
+          <a:bodyPr/>
+          <a:lstStyle/>
+          <a:p>
+            <a:endParaRPr lang="en-AU"/>
+          </a:p>
+        </p:txBody>
       </p:sp>
       <p:sp>
         <p:nvSpPr>
@@ -10411,7 +10287,7 @@
           <a:bodyPr wrap="square" lIns="0" tIns="0" rIns="0" bIns="0" rtlCol="0" anchor="t"/>
           <a:lstStyle/>
           <a:p>
-            <a:pPr indent="0" marL="0">
+            <a:pPr marL="0" indent="0">
               <a:buNone/>
             </a:pPr>
             <a:r>
@@ -10558,7 +10434,7 @@
           </a:prstGeom>
           <a:extLst>
             <a:ext uri="{C572A759-6A51-4108-AA02-DFA0A04FC94B}">
-              <ma14:wrappingTextBoxFlag xmlns:ma14="http://schemas.microsoft.com/office/mac/drawingml/2011/main" val="0"/>
+              <ma14:wrappingTextBoxFlag xmlns:ma14="http://schemas.microsoft.com/office/mac/drawingml/2011/main" xmlns="" val="0"/>
             </a:ext>
           </a:extLst>
         </p:spPr>
@@ -10576,7 +10452,7 @@
           <a:p>
             <a:pPr algn="r"/>
             <a:fld id="{F7021451-1387-4CA6-816F-3879F97B5CBC}" type="slidenum">
-              <a:rPr b="0" lang="en-US"/>
+              <a:rPr lang="en-US" b="0"/>
               <a:t>17</a:t>
             </a:fld>
             <a:endParaRPr lang="en-US"/>
@@ -10611,9 +10487,11 @@
       <p:sp>
         <p:nvSpPr>
           <p:cNvPr id="2" name="Text 0"/>
-          <p:cNvSpPr/>
+          <p:cNvSpPr>
+            <a:spLocks noGrp="1"/>
+          </p:cNvSpPr>
           <p:nvPr>
-            <p:ph idx="100" type="title" hasCustomPrompt="1"/>
+            <p:ph type="title" idx="100" hasCustomPrompt="1"/>
           </p:nvPr>
         </p:nvSpPr>
         <p:spPr>
@@ -10631,7 +10509,7 @@
           <a:bodyPr wrap="square" lIns="0" tIns="0" rIns="0" bIns="0" rtlCol="0" anchor="ctr"/>
           <a:lstStyle/>
           <a:p>
-            <a:pPr algn="l" indent="0" marL="0">
+            <a:pPr marL="0" indent="0" algn="l">
               <a:buNone/>
             </a:pPr>
             <a:r>
@@ -10658,9 +10536,7 @@
             <a:ext cx="1920240" cy="1554480"/>
           </a:xfrm>
           <a:prstGeom prst="rect">
-            <a:avLst>
-              <a:gd name="adj" fmla="val 7059"/>
-            </a:avLst>
+            <a:avLst/>
           </a:prstGeom>
           <a:solidFill>
             <a:schemeClr val="bg2"/>
@@ -10671,7 +10547,7 @@
           <a:bodyPr wrap="square" lIns="76200" tIns="76200" rIns="76200" bIns="76200" rtlCol="0" anchor="ctr"/>
           <a:lstStyle/>
           <a:p>
-            <a:pPr algn="ctr" indent="0" marL="0">
+            <a:pPr marL="0" indent="0" algn="ctr">
               <a:buNone/>
             </a:pPr>
             <a:r>
@@ -10685,7 +10561,7 @@
             <a:endParaRPr lang="en-US" sz="3800" dirty="0"/>
           </a:p>
           <a:p>
-            <a:pPr algn="ctr" indent="0" marL="0">
+            <a:pPr marL="0" indent="0" algn="ctr">
               <a:buNone/>
             </a:pPr>
             <a:r>
@@ -10699,7 +10575,7 @@
             <a:endParaRPr lang="en-US" sz="3800" dirty="0"/>
           </a:p>
           <a:p>
-            <a:pPr algn="ctr" indent="0" marL="0">
+            <a:pPr marL="0" indent="0" algn="ctr">
               <a:buNone/>
             </a:pPr>
             <a:r>
@@ -10726,9 +10602,7 @@
             <a:ext cx="1920240" cy="1554480"/>
           </a:xfrm>
           <a:prstGeom prst="rect">
-            <a:avLst>
-              <a:gd name="adj" fmla="val 7059"/>
-            </a:avLst>
+            <a:avLst/>
           </a:prstGeom>
           <a:solidFill>
             <a:schemeClr val="bg2"/>
@@ -10739,7 +10613,7 @@
           <a:bodyPr wrap="square" lIns="76200" tIns="76200" rIns="76200" bIns="76200" rtlCol="0" anchor="ctr"/>
           <a:lstStyle/>
           <a:p>
-            <a:pPr algn="ctr" indent="0" marL="0">
+            <a:pPr marL="0" indent="0" algn="ctr">
               <a:buNone/>
             </a:pPr>
             <a:r>
@@ -10753,7 +10627,7 @@
             <a:endParaRPr lang="en-US" sz="3800" dirty="0"/>
           </a:p>
           <a:p>
-            <a:pPr algn="ctr" indent="0" marL="0">
+            <a:pPr marL="0" indent="0" algn="ctr">
               <a:buNone/>
             </a:pPr>
             <a:r>
@@ -10767,7 +10641,7 @@
             <a:endParaRPr lang="en-US" sz="3800" dirty="0"/>
           </a:p>
           <a:p>
-            <a:pPr algn="ctr" indent="0" marL="0">
+            <a:pPr marL="0" indent="0" algn="ctr">
               <a:buNone/>
             </a:pPr>
             <a:r>
@@ -10794,9 +10668,7 @@
             <a:ext cx="1920240" cy="1554480"/>
           </a:xfrm>
           <a:prstGeom prst="rect">
-            <a:avLst>
-              <a:gd name="adj" fmla="val 7059"/>
-            </a:avLst>
+            <a:avLst/>
           </a:prstGeom>
           <a:solidFill>
             <a:schemeClr val="bg2"/>
@@ -10807,7 +10679,7 @@
           <a:bodyPr wrap="square" lIns="76200" tIns="76200" rIns="76200" bIns="76200" rtlCol="0" anchor="ctr"/>
           <a:lstStyle/>
           <a:p>
-            <a:pPr algn="ctr" indent="0" marL="0">
+            <a:pPr marL="0" indent="0" algn="ctr">
               <a:buNone/>
             </a:pPr>
             <a:r>
@@ -10821,7 +10693,7 @@
             <a:endParaRPr lang="en-US" sz="3800" dirty="0"/>
           </a:p>
           <a:p>
-            <a:pPr algn="ctr" indent="0" marL="0">
+            <a:pPr marL="0" indent="0" algn="ctr">
               <a:buNone/>
             </a:pPr>
             <a:r>
@@ -10835,7 +10707,7 @@
             <a:endParaRPr lang="en-US" sz="3800" dirty="0"/>
           </a:p>
           <a:p>
-            <a:pPr algn="ctr" indent="0" marL="0">
+            <a:pPr marL="0" indent="0" algn="ctr">
               <a:buNone/>
             </a:pPr>
             <a:r>
@@ -10862,9 +10734,7 @@
             <a:ext cx="1920240" cy="1554480"/>
           </a:xfrm>
           <a:prstGeom prst="rect">
-            <a:avLst>
-              <a:gd name="adj" fmla="val 7059"/>
-            </a:avLst>
+            <a:avLst/>
           </a:prstGeom>
           <a:solidFill>
             <a:schemeClr val="bg2"/>
@@ -10875,7 +10745,7 @@
           <a:bodyPr wrap="square" lIns="76200" tIns="76200" rIns="76200" bIns="76200" rtlCol="0" anchor="ctr"/>
           <a:lstStyle/>
           <a:p>
-            <a:pPr algn="ctr" indent="0" marL="0">
+            <a:pPr marL="0" indent="0" algn="ctr">
               <a:buNone/>
             </a:pPr>
             <a:r>
@@ -10884,12 +10754,12 @@
                   <a:schemeClr val="accent1"/>
                 </a:solidFill>
               </a:rPr>
-              <a:t>~3,200</a:t>
+              <a:t>3,788</a:t>
             </a:r>
             <a:endParaRPr lang="en-US" sz="3800" dirty="0"/>
           </a:p>
           <a:p>
-            <a:pPr algn="ctr" indent="0" marL="0">
+            <a:pPr marL="0" indent="0" algn="ctr">
               <a:buNone/>
             </a:pPr>
             <a:r>
@@ -10903,7 +10773,7 @@
             <a:endParaRPr lang="en-US" sz="3800" dirty="0"/>
           </a:p>
           <a:p>
-            <a:pPr algn="ctr" indent="0" marL="0">
+            <a:pPr marL="0" indent="0" algn="ctr">
               <a:buNone/>
             </a:pPr>
             <a:r>
@@ -10912,7 +10782,7 @@
                   <a:schemeClr val="accent6"/>
                 </a:solidFill>
               </a:rPr>
-              <a:t>about 25 files</a:t>
+              <a:t>Across 35 files</a:t>
             </a:r>
             <a:endParaRPr lang="en-US" sz="3800" dirty="0"/>
           </a:p>
@@ -10930,15 +10800,20 @@
             <a:ext cx="3566160" cy="1325880"/>
           </a:xfrm>
           <a:prstGeom prst="rect">
-            <a:avLst>
-              <a:gd name="adj" fmla="val 8276"/>
-            </a:avLst>
+            <a:avLst/>
           </a:prstGeom>
           <a:solidFill>
             <a:schemeClr val="tx1"/>
           </a:solidFill>
           <a:ln/>
         </p:spPr>
+        <p:txBody>
+          <a:bodyPr/>
+          <a:lstStyle/>
+          <a:p>
+            <a:endParaRPr lang="en-AU"/>
+          </a:p>
+        </p:txBody>
       </p:sp>
       <p:sp>
         <p:nvSpPr>
@@ -10961,7 +10836,7 @@
           <a:bodyPr wrap="square" lIns="0" tIns="0" rIns="0" bIns="0" rtlCol="0" anchor="ctr"/>
           <a:lstStyle/>
           <a:p>
-            <a:pPr indent="0" marL="0">
+            <a:pPr marL="0" indent="0">
               <a:buNone/>
             </a:pPr>
             <a:r>
@@ -10975,7 +10850,7 @@
             <a:endParaRPr lang="en-US" sz="1400" dirty="0"/>
           </a:p>
           <a:p>
-            <a:pPr indent="0" marL="0">
+            <a:pPr marL="0" indent="0">
               <a:buNone/>
             </a:pPr>
             <a:r>
@@ -10992,7 +10867,7 @@
             <a:endParaRPr lang="en-US" sz="1400" dirty="0"/>
           </a:p>
           <a:p>
-            <a:pPr indent="0" marL="0">
+            <a:pPr marL="0" indent="0">
               <a:buNone/>
             </a:pPr>
             <a:r>
@@ -11029,6 +10904,13 @@
           </a:solidFill>
           <a:ln/>
         </p:spPr>
+        <p:txBody>
+          <a:bodyPr/>
+          <a:lstStyle/>
+          <a:p>
+            <a:endParaRPr lang="en-AU"/>
+          </a:p>
+        </p:txBody>
       </p:sp>
       <p:sp>
         <p:nvSpPr>
@@ -11042,15 +10924,20 @@
             <a:ext cx="3566160" cy="1325880"/>
           </a:xfrm>
           <a:prstGeom prst="rect">
-            <a:avLst>
-              <a:gd name="adj" fmla="val 8276"/>
-            </a:avLst>
+            <a:avLst/>
           </a:prstGeom>
           <a:solidFill>
             <a:schemeClr val="bg2"/>
           </a:solidFill>
           <a:ln/>
         </p:spPr>
+        <p:txBody>
+          <a:bodyPr/>
+          <a:lstStyle/>
+          <a:p>
+            <a:endParaRPr lang="en-AU"/>
+          </a:p>
+        </p:txBody>
       </p:sp>
       <p:sp>
         <p:nvSpPr>
@@ -11073,7 +10960,7 @@
           <a:bodyPr wrap="square" lIns="0" tIns="0" rIns="0" bIns="0" rtlCol="0" anchor="ctr"/>
           <a:lstStyle/>
           <a:p>
-            <a:pPr indent="0" marL="0">
+            <a:pPr marL="0" indent="0">
               <a:buNone/>
             </a:pPr>
             <a:r>
@@ -11087,7 +10974,7 @@
             <a:endParaRPr lang="en-US" sz="1400" dirty="0"/>
           </a:p>
           <a:p>
-            <a:pPr indent="0" marL="0">
+            <a:pPr marL="0" indent="0">
               <a:buNone/>
             </a:pPr>
             <a:r>
@@ -11122,7 +11009,7 @@
           </a:prstGeom>
           <a:extLst>
             <a:ext uri="{C572A759-6A51-4108-AA02-DFA0A04FC94B}">
-              <ma14:wrappingTextBoxFlag xmlns:ma14="http://schemas.microsoft.com/office/mac/drawingml/2011/main" val="0"/>
+              <ma14:wrappingTextBoxFlag xmlns:ma14="http://schemas.microsoft.com/office/mac/drawingml/2011/main" xmlns="" val="0"/>
             </a:ext>
           </a:extLst>
         </p:spPr>
@@ -11140,7 +11027,7 @@
           <a:p>
             <a:pPr algn="r"/>
             <a:fld id="{F7021451-1387-4CA6-816F-3879F97B5CBC}" type="slidenum">
-              <a:rPr b="0" lang="en-US"/>
+              <a:rPr lang="en-US" b="0"/>
               <a:t>2</a:t>
             </a:fld>
             <a:endParaRPr lang="en-US"/>
@@ -11175,9 +11062,11 @@
       <p:sp>
         <p:nvSpPr>
           <p:cNvPr id="2" name="Text 0"/>
-          <p:cNvSpPr/>
+          <p:cNvSpPr>
+            <a:spLocks noGrp="1"/>
+          </p:cNvSpPr>
           <p:nvPr>
-            <p:ph idx="100" type="title" hasCustomPrompt="1"/>
+            <p:ph type="title" idx="100" hasCustomPrompt="1"/>
           </p:nvPr>
         </p:nvSpPr>
         <p:spPr>
@@ -11195,7 +11084,7 @@
           <a:bodyPr wrap="square" lIns="0" tIns="0" rIns="0" bIns="0" rtlCol="0" anchor="ctr"/>
           <a:lstStyle/>
           <a:p>
-            <a:pPr algn="l" indent="0" marL="0">
+            <a:pPr marL="0" indent="0" algn="l">
               <a:buNone/>
             </a:pPr>
             <a:r>
@@ -11222,15 +11111,20 @@
             <a:ext cx="1005840" cy="2011680"/>
           </a:xfrm>
           <a:prstGeom prst="rect">
-            <a:avLst>
-              <a:gd name="adj" fmla="val 10909"/>
-            </a:avLst>
+            <a:avLst/>
           </a:prstGeom>
           <a:solidFill>
             <a:schemeClr val="bg2"/>
           </a:solidFill>
           <a:ln/>
         </p:spPr>
+        <p:txBody>
+          <a:bodyPr/>
+          <a:lstStyle/>
+          <a:p>
+            <a:endParaRPr lang="en-AU"/>
+          </a:p>
+        </p:txBody>
       </p:sp>
       <p:sp>
         <p:nvSpPr>
@@ -11253,7 +11147,7 @@
           <a:bodyPr wrap="square" lIns="0" tIns="0" rIns="0" bIns="0" rtlCol="0" anchor="ctr"/>
           <a:lstStyle/>
           <a:p>
-            <a:pPr algn="l" indent="0" marL="0">
+            <a:pPr marL="0" indent="0" algn="l">
               <a:buNone/>
             </a:pPr>
             <a:r>
@@ -11292,7 +11186,7 @@
           <a:bodyPr wrap="square" lIns="0" tIns="0" rIns="0" bIns="0" rtlCol="0" anchor="t"/>
           <a:lstStyle/>
           <a:p>
-            <a:pPr algn="ctr" indent="0" marL="0">
+            <a:pPr marL="0" indent="0" algn="ctr">
               <a:buNone/>
             </a:pPr>
             <a:r>
@@ -11328,7 +11222,7 @@
           <a:bodyPr wrap="square" lIns="0" tIns="0" rIns="0" bIns="0" rtlCol="0" anchor="t"/>
           <a:lstStyle/>
           <a:p>
-            <a:pPr algn="ctr" indent="0" marL="0">
+            <a:pPr marL="0" indent="0" algn="ctr">
               <a:buNone/>
             </a:pPr>
             <a:r>
@@ -11366,6 +11260,13 @@
             <a:tailEnd type="triangle"/>
           </a:ln>
         </p:spPr>
+        <p:txBody>
+          <a:bodyPr/>
+          <a:lstStyle/>
+          <a:p>
+            <a:endParaRPr lang="en-AU"/>
+          </a:p>
+        </p:txBody>
       </p:sp>
       <p:sp>
         <p:nvSpPr>
@@ -11379,15 +11280,20 @@
             <a:ext cx="1005840" cy="2011680"/>
           </a:xfrm>
           <a:prstGeom prst="rect">
-            <a:avLst>
-              <a:gd name="adj" fmla="val 10909"/>
-            </a:avLst>
+            <a:avLst/>
           </a:prstGeom>
           <a:solidFill>
             <a:schemeClr val="bg2"/>
           </a:solidFill>
           <a:ln/>
         </p:spPr>
+        <p:txBody>
+          <a:bodyPr/>
+          <a:lstStyle/>
+          <a:p>
+            <a:endParaRPr lang="en-AU"/>
+          </a:p>
+        </p:txBody>
       </p:sp>
       <p:sp>
         <p:nvSpPr>
@@ -11410,7 +11316,7 @@
           <a:bodyPr wrap="square" lIns="0" tIns="0" rIns="0" bIns="0" rtlCol="0" anchor="ctr"/>
           <a:lstStyle/>
           <a:p>
-            <a:pPr algn="l" indent="0" marL="0">
+            <a:pPr marL="0" indent="0" algn="l">
               <a:buNone/>
             </a:pPr>
             <a:r>
@@ -11449,7 +11355,7 @@
           <a:bodyPr wrap="square" lIns="0" tIns="0" rIns="0" bIns="0" rtlCol="0" anchor="t"/>
           <a:lstStyle/>
           <a:p>
-            <a:pPr algn="ctr" indent="0" marL="0">
+            <a:pPr marL="0" indent="0" algn="ctr">
               <a:buNone/>
             </a:pPr>
             <a:r>
@@ -11485,7 +11391,7 @@
           <a:bodyPr wrap="square" lIns="0" tIns="0" rIns="0" bIns="0" rtlCol="0" anchor="t"/>
           <a:lstStyle/>
           <a:p>
-            <a:pPr algn="ctr" indent="0" marL="0">
+            <a:pPr marL="0" indent="0" algn="ctr">
               <a:buNone/>
             </a:pPr>
             <a:r>
@@ -11523,6 +11429,13 @@
             <a:tailEnd type="triangle"/>
           </a:ln>
         </p:spPr>
+        <p:txBody>
+          <a:bodyPr/>
+          <a:lstStyle/>
+          <a:p>
+            <a:endParaRPr lang="en-AU"/>
+          </a:p>
+        </p:txBody>
       </p:sp>
       <p:sp>
         <p:nvSpPr>
@@ -11536,15 +11449,20 @@
             <a:ext cx="1005840" cy="2011680"/>
           </a:xfrm>
           <a:prstGeom prst="rect">
-            <a:avLst>
-              <a:gd name="adj" fmla="val 10909"/>
-            </a:avLst>
+            <a:avLst/>
           </a:prstGeom>
           <a:solidFill>
             <a:schemeClr val="bg2"/>
           </a:solidFill>
           <a:ln/>
         </p:spPr>
+        <p:txBody>
+          <a:bodyPr/>
+          <a:lstStyle/>
+          <a:p>
+            <a:endParaRPr lang="en-AU"/>
+          </a:p>
+        </p:txBody>
       </p:sp>
       <p:sp>
         <p:nvSpPr>
@@ -11567,7 +11485,7 @@
           <a:bodyPr wrap="square" lIns="0" tIns="0" rIns="0" bIns="0" rtlCol="0" anchor="ctr"/>
           <a:lstStyle/>
           <a:p>
-            <a:pPr algn="l" indent="0" marL="0">
+            <a:pPr marL="0" indent="0" algn="l">
               <a:buNone/>
             </a:pPr>
             <a:r>
@@ -11606,7 +11524,7 @@
           <a:bodyPr wrap="square" lIns="0" tIns="0" rIns="0" bIns="0" rtlCol="0" anchor="t"/>
           <a:lstStyle/>
           <a:p>
-            <a:pPr algn="ctr" indent="0" marL="0">
+            <a:pPr marL="0" indent="0" algn="ctr">
               <a:buNone/>
             </a:pPr>
             <a:r>
@@ -11642,7 +11560,7 @@
           <a:bodyPr wrap="square" lIns="0" tIns="0" rIns="0" bIns="0" rtlCol="0" anchor="t"/>
           <a:lstStyle/>
           <a:p>
-            <a:pPr algn="ctr" indent="0" marL="0">
+            <a:pPr marL="0" indent="0" algn="ctr">
               <a:buNone/>
             </a:pPr>
             <a:r>
@@ -11680,6 +11598,13 @@
             <a:tailEnd type="triangle"/>
           </a:ln>
         </p:spPr>
+        <p:txBody>
+          <a:bodyPr/>
+          <a:lstStyle/>
+          <a:p>
+            <a:endParaRPr lang="en-AU"/>
+          </a:p>
+        </p:txBody>
       </p:sp>
       <p:sp>
         <p:nvSpPr>
@@ -11693,15 +11618,20 @@
             <a:ext cx="1005840" cy="2011680"/>
           </a:xfrm>
           <a:prstGeom prst="rect">
-            <a:avLst>
-              <a:gd name="adj" fmla="val 10909"/>
-            </a:avLst>
+            <a:avLst/>
           </a:prstGeom>
           <a:solidFill>
             <a:schemeClr val="tx1"/>
           </a:solidFill>
           <a:ln/>
         </p:spPr>
+        <p:txBody>
+          <a:bodyPr/>
+          <a:lstStyle/>
+          <a:p>
+            <a:endParaRPr lang="en-AU"/>
+          </a:p>
+        </p:txBody>
       </p:sp>
       <p:sp>
         <p:nvSpPr>
@@ -11724,7 +11654,7 @@
           <a:bodyPr wrap="square" lIns="0" tIns="0" rIns="0" bIns="0" rtlCol="0" anchor="ctr"/>
           <a:lstStyle/>
           <a:p>
-            <a:pPr algn="l" indent="0" marL="0">
+            <a:pPr marL="0" indent="0" algn="l">
               <a:buNone/>
             </a:pPr>
             <a:r>
@@ -11763,7 +11693,7 @@
           <a:bodyPr wrap="square" lIns="0" tIns="0" rIns="0" bIns="0" rtlCol="0" anchor="t"/>
           <a:lstStyle/>
           <a:p>
-            <a:pPr algn="ctr" indent="0" marL="0">
+            <a:pPr marL="0" indent="0" algn="ctr">
               <a:buNone/>
             </a:pPr>
             <a:r>
@@ -11799,7 +11729,7 @@
           <a:bodyPr wrap="square" lIns="0" tIns="0" rIns="0" bIns="0" rtlCol="0" anchor="t"/>
           <a:lstStyle/>
           <a:p>
-            <a:pPr algn="ctr" indent="0" marL="0">
+            <a:pPr marL="0" indent="0" algn="ctr">
               <a:buNone/>
             </a:pPr>
             <a:r>
@@ -11837,6 +11767,13 @@
             <a:tailEnd type="triangle"/>
           </a:ln>
         </p:spPr>
+        <p:txBody>
+          <a:bodyPr/>
+          <a:lstStyle/>
+          <a:p>
+            <a:endParaRPr lang="en-AU"/>
+          </a:p>
+        </p:txBody>
       </p:sp>
       <p:sp>
         <p:nvSpPr>
@@ -11850,15 +11787,20 @@
             <a:ext cx="1005840" cy="2011680"/>
           </a:xfrm>
           <a:prstGeom prst="rect">
-            <a:avLst>
-              <a:gd name="adj" fmla="val 10909"/>
-            </a:avLst>
+            <a:avLst/>
           </a:prstGeom>
           <a:solidFill>
             <a:schemeClr val="tx1"/>
           </a:solidFill>
           <a:ln/>
         </p:spPr>
+        <p:txBody>
+          <a:bodyPr/>
+          <a:lstStyle/>
+          <a:p>
+            <a:endParaRPr lang="en-AU"/>
+          </a:p>
+        </p:txBody>
       </p:sp>
       <p:sp>
         <p:nvSpPr>
@@ -11881,7 +11823,7 @@
           <a:bodyPr wrap="square" lIns="0" tIns="0" rIns="0" bIns="0" rtlCol="0" anchor="ctr"/>
           <a:lstStyle/>
           <a:p>
-            <a:pPr algn="l" indent="0" marL="0">
+            <a:pPr marL="0" indent="0" algn="l">
               <a:buNone/>
             </a:pPr>
             <a:r>
@@ -11920,7 +11862,7 @@
           <a:bodyPr wrap="square" lIns="0" tIns="0" rIns="0" bIns="0" rtlCol="0" anchor="t"/>
           <a:lstStyle/>
           <a:p>
-            <a:pPr algn="ctr" indent="0" marL="0">
+            <a:pPr marL="0" indent="0" algn="ctr">
               <a:buNone/>
             </a:pPr>
             <a:r>
@@ -11956,7 +11898,7 @@
           <a:bodyPr wrap="square" lIns="0" tIns="0" rIns="0" bIns="0" rtlCol="0" anchor="t"/>
           <a:lstStyle/>
           <a:p>
-            <a:pPr algn="ctr" indent="0" marL="0">
+            <a:pPr marL="0" indent="0" algn="ctr">
               <a:buNone/>
             </a:pPr>
             <a:r>
@@ -11994,6 +11936,13 @@
             <a:tailEnd type="triangle"/>
           </a:ln>
         </p:spPr>
+        <p:txBody>
+          <a:bodyPr/>
+          <a:lstStyle/>
+          <a:p>
+            <a:endParaRPr lang="en-AU"/>
+          </a:p>
+        </p:txBody>
       </p:sp>
       <p:sp>
         <p:nvSpPr>
@@ -12007,15 +11956,20 @@
             <a:ext cx="1005840" cy="2011680"/>
           </a:xfrm>
           <a:prstGeom prst="rect">
-            <a:avLst>
-              <a:gd name="adj" fmla="val 10909"/>
-            </a:avLst>
+            <a:avLst/>
           </a:prstGeom>
           <a:solidFill>
             <a:schemeClr val="bg2"/>
           </a:solidFill>
           <a:ln/>
         </p:spPr>
+        <p:txBody>
+          <a:bodyPr/>
+          <a:lstStyle/>
+          <a:p>
+            <a:endParaRPr lang="en-AU"/>
+          </a:p>
+        </p:txBody>
       </p:sp>
       <p:sp>
         <p:nvSpPr>
@@ -12038,7 +11992,7 @@
           <a:bodyPr wrap="square" lIns="0" tIns="0" rIns="0" bIns="0" rtlCol="0" anchor="ctr"/>
           <a:lstStyle/>
           <a:p>
-            <a:pPr algn="l" indent="0" marL="0">
+            <a:pPr marL="0" indent="0" algn="l">
               <a:buNone/>
             </a:pPr>
             <a:r>
@@ -12077,7 +12031,7 @@
           <a:bodyPr wrap="square" lIns="0" tIns="0" rIns="0" bIns="0" rtlCol="0" anchor="t"/>
           <a:lstStyle/>
           <a:p>
-            <a:pPr algn="ctr" indent="0" marL="0">
+            <a:pPr marL="0" indent="0" algn="ctr">
               <a:buNone/>
             </a:pPr>
             <a:r>
@@ -12113,7 +12067,7 @@
           <a:bodyPr wrap="square" lIns="0" tIns="0" rIns="0" bIns="0" rtlCol="0" anchor="t"/>
           <a:lstStyle/>
           <a:p>
-            <a:pPr algn="ctr" indent="0" marL="0">
+            <a:pPr marL="0" indent="0" algn="ctr">
               <a:buNone/>
             </a:pPr>
             <a:r>
@@ -12151,6 +12105,13 @@
             <a:tailEnd type="triangle"/>
           </a:ln>
         </p:spPr>
+        <p:txBody>
+          <a:bodyPr/>
+          <a:lstStyle/>
+          <a:p>
+            <a:endParaRPr lang="en-AU"/>
+          </a:p>
+        </p:txBody>
       </p:sp>
       <p:sp>
         <p:nvSpPr>
@@ -12164,15 +12125,20 @@
             <a:ext cx="1005840" cy="2011680"/>
           </a:xfrm>
           <a:prstGeom prst="rect">
-            <a:avLst>
-              <a:gd name="adj" fmla="val 10909"/>
-            </a:avLst>
+            <a:avLst/>
           </a:prstGeom>
           <a:solidFill>
             <a:schemeClr val="bg2"/>
           </a:solidFill>
           <a:ln/>
         </p:spPr>
+        <p:txBody>
+          <a:bodyPr/>
+          <a:lstStyle/>
+          <a:p>
+            <a:endParaRPr lang="en-AU"/>
+          </a:p>
+        </p:txBody>
       </p:sp>
       <p:sp>
         <p:nvSpPr>
@@ -12195,7 +12161,7 @@
           <a:bodyPr wrap="square" lIns="0" tIns="0" rIns="0" bIns="0" rtlCol="0" anchor="ctr"/>
           <a:lstStyle/>
           <a:p>
-            <a:pPr algn="l" indent="0" marL="0">
+            <a:pPr marL="0" indent="0" algn="l">
               <a:buNone/>
             </a:pPr>
             <a:r>
@@ -12234,7 +12200,7 @@
           <a:bodyPr wrap="square" lIns="0" tIns="0" rIns="0" bIns="0" rtlCol="0" anchor="t"/>
           <a:lstStyle/>
           <a:p>
-            <a:pPr algn="ctr" indent="0" marL="0">
+            <a:pPr marL="0" indent="0" algn="ctr">
               <a:buNone/>
             </a:pPr>
             <a:r>
@@ -12270,7 +12236,7 @@
           <a:bodyPr wrap="square" lIns="0" tIns="0" rIns="0" bIns="0" rtlCol="0" anchor="t"/>
           <a:lstStyle/>
           <a:p>
-            <a:pPr algn="ctr" indent="0" marL="0">
+            <a:pPr marL="0" indent="0" algn="ctr">
               <a:buNone/>
             </a:pPr>
             <a:r>
@@ -12297,15 +12263,20 @@
             <a:ext cx="8229600" cy="731520"/>
           </a:xfrm>
           <a:prstGeom prst="rect">
-            <a:avLst>
-              <a:gd name="adj" fmla="val 15000"/>
-            </a:avLst>
+            <a:avLst/>
           </a:prstGeom>
           <a:solidFill>
             <a:schemeClr val="bg2"/>
           </a:solidFill>
           <a:ln/>
         </p:spPr>
+        <p:txBody>
+          <a:bodyPr/>
+          <a:lstStyle/>
+          <a:p>
+            <a:endParaRPr lang="en-AU"/>
+          </a:p>
+        </p:txBody>
       </p:sp>
       <p:sp>
         <p:nvSpPr>
@@ -12328,7 +12299,7 @@
           <a:bodyPr wrap="square" lIns="0" tIns="0" rIns="0" bIns="0" rtlCol="0" anchor="ctr"/>
           <a:lstStyle/>
           <a:p>
-            <a:pPr indent="0" marL="0">
+            <a:pPr marL="0" indent="0">
               <a:buNone/>
             </a:pPr>
             <a:r>
@@ -12339,9 +12310,6 @@
               </a:rPr>
               <a:t>Each arrow is a plain data structure. </a:t>
             </a:r>
-            <a:pPr indent="0" marL="0">
-              <a:buNone/>
-            </a:pPr>
             <a:r>
               <a:rPr lang="en-US" sz="1500" dirty="0">
                 <a:solidFill>
@@ -12356,7 +12324,7 @@
       </p:sp>
       <p:sp>
         <p:nvSpPr>
-          <p:cNvPr id="25" name="Slide Number Placeholder 0"/>
+          <p:cNvPr id="3" name="Slide Number Placeholder 0"/>
           <p:cNvSpPr>
             <a:spLocks noGrp="1"/>
           </p:cNvSpPr>
@@ -12374,7 +12342,7 @@
           </a:prstGeom>
           <a:extLst>
             <a:ext uri="{C572A759-6A51-4108-AA02-DFA0A04FC94B}">
-              <ma14:wrappingTextBoxFlag xmlns:ma14="http://schemas.microsoft.com/office/mac/drawingml/2011/main" val="0"/>
+              <ma14:wrappingTextBoxFlag xmlns:ma14="http://schemas.microsoft.com/office/mac/drawingml/2011/main" xmlns="" val="0"/>
             </a:ext>
           </a:extLst>
         </p:spPr>
@@ -12392,7 +12360,7 @@
           <a:p>
             <a:pPr algn="r"/>
             <a:fld id="{F7021451-1387-4CA6-816F-3879F97B5CBC}" type="slidenum">
-              <a:rPr b="0" lang="en-US"/>
+              <a:rPr lang="en-US" b="0"/>
               <a:t>3</a:t>
             </a:fld>
             <a:endParaRPr lang="en-US"/>
@@ -12427,9 +12395,11 @@
       <p:sp>
         <p:nvSpPr>
           <p:cNvPr id="2" name="Text 0"/>
-          <p:cNvSpPr/>
+          <p:cNvSpPr>
+            <a:spLocks noGrp="1"/>
+          </p:cNvSpPr>
           <p:nvPr>
-            <p:ph idx="100" type="title" hasCustomPrompt="1"/>
+            <p:ph type="title" idx="100" hasCustomPrompt="1"/>
           </p:nvPr>
         </p:nvSpPr>
         <p:spPr>
@@ -12447,7 +12417,7 @@
           <a:bodyPr wrap="square" lIns="0" tIns="0" rIns="0" bIns="0" rtlCol="0" anchor="ctr"/>
           <a:lstStyle/>
           <a:p>
-            <a:pPr algn="l" indent="0" marL="0">
+            <a:pPr marL="0" indent="0" algn="l">
               <a:buNone/>
             </a:pPr>
             <a:r>
@@ -12456,7 +12426,7 @@
                   <a:schemeClr val="tx1"/>
                 </a:solidFill>
               </a:rPr>
-              <a:t>A circuit as text</a:t>
+              <a:t>The file structure</a:t>
             </a:r>
             <a:endParaRPr lang="en-US" sz="3400" dirty="0"/>
           </a:p>
@@ -12474,15 +12444,20 @@
             <a:ext cx="4572000" cy="3246120"/>
           </a:xfrm>
           <a:prstGeom prst="rect">
-            <a:avLst>
-              <a:gd name="adj" fmla="val 3380"/>
-            </a:avLst>
+            <a:avLst/>
           </a:prstGeom>
           <a:solidFill>
             <a:schemeClr val="tx1"/>
           </a:solidFill>
           <a:ln/>
         </p:spPr>
+        <p:txBody>
+          <a:bodyPr/>
+          <a:lstStyle/>
+          <a:p>
+            <a:endParaRPr lang="en-AU"/>
+          </a:p>
+        </p:txBody>
       </p:sp>
       <p:sp>
         <p:nvSpPr>
@@ -12505,7 +12480,7 @@
           <a:bodyPr wrap="square" lIns="0" tIns="0" rIns="0" bIns="0" rtlCol="0" anchor="ctr"/>
           <a:lstStyle/>
           <a:p>
-            <a:pPr indent="0" marL="0">
+            <a:pPr marL="0" indent="0">
               <a:spcAft>
                 <a:spcPts val="800"/>
               </a:spcAft>
@@ -12522,27 +12497,41 @@
               </a:rPr>
               <a:t>RC low-pass</a:t>
             </a:r>
-            <a:pPr indent="0" marL="0">
+            <a:r>
+              <a:rPr lang="en-US" sz="1000" dirty="0">
+                <a:solidFill>
+                  <a:schemeClr val="accent3"/>
+                </a:solidFill>
+                <a:latin typeface="Courier New" pitchFamily="34" charset="0"/>
+                <a:ea typeface="Courier New" pitchFamily="34" charset="-122"/>
+                <a:cs typeface="Courier New" pitchFamily="34" charset="-120"/>
+              </a:rPr>
+              <a:t>   &lt;- title line</a:t>
+            </a:r>
+            <a:endParaRPr lang="en-US" sz="1100" dirty="0"/>
+          </a:p>
+          <a:p>
+            <a:pPr marL="0" indent="0">
               <a:spcAft>
                 <a:spcPts val="800"/>
               </a:spcAft>
               <a:buNone/>
             </a:pPr>
             <a:r>
-              <a:rPr lang="en-US" sz="1000" dirty="0">
-                <a:solidFill>
-                  <a:schemeClr val="accent3"/>
+              <a:rPr lang="en-US" sz="1100" dirty="0">
+                <a:solidFill>
+                  <a:schemeClr val="bg1"/>
                 </a:solidFill>
                 <a:latin typeface="Courier New" pitchFamily="34" charset="0"/>
                 <a:ea typeface="Courier New" pitchFamily="34" charset="-122"/>
                 <a:cs typeface="Courier New" pitchFamily="34" charset="-120"/>
               </a:rPr>
-              <a:t>   &lt;- title line</a:t>
+              <a:t>V1 in 0 DC 0 AC 1 PULSE(0 1 0 1n 1n 1 2)</a:t>
             </a:r>
             <a:endParaRPr lang="en-US" sz="1100" dirty="0"/>
           </a:p>
           <a:p>
-            <a:pPr indent="0" marL="0">
+            <a:pPr marL="0" indent="0">
               <a:spcAft>
                 <a:spcPts val="800"/>
               </a:spcAft>
@@ -12557,12 +12546,12 @@
                 <a:ea typeface="Courier New" pitchFamily="34" charset="-122"/>
                 <a:cs typeface="Courier New" pitchFamily="34" charset="-120"/>
               </a:rPr>
-              <a:t>V1 in 0 DC 0 AC 1 PULSE(0 1 0 1n 1n 1 2)</a:t>
+              <a:t>R1 in out 1k</a:t>
             </a:r>
             <a:endParaRPr lang="en-US" sz="1100" dirty="0"/>
           </a:p>
           <a:p>
-            <a:pPr indent="0" marL="0">
+            <a:pPr marL="0" indent="0">
               <a:spcAft>
                 <a:spcPts val="800"/>
               </a:spcAft>
@@ -12577,12 +12566,12 @@
                 <a:ea typeface="Courier New" pitchFamily="34" charset="-122"/>
                 <a:cs typeface="Courier New" pitchFamily="34" charset="-120"/>
               </a:rPr>
-              <a:t>R1 in out 1k</a:t>
+              <a:t>C1 out 0 1u</a:t>
             </a:r>
             <a:endParaRPr lang="en-US" sz="1100" dirty="0"/>
           </a:p>
           <a:p>
-            <a:pPr indent="0" marL="0">
+            <a:pPr marL="0" indent="0">
               <a:spcAft>
                 <a:spcPts val="800"/>
               </a:spcAft>
@@ -12591,18 +12580,29 @@
             <a:r>
               <a:rPr lang="en-US" sz="1100" dirty="0">
                 <a:solidFill>
-                  <a:schemeClr val="bg1"/>
+                  <a:schemeClr val="accent4"/>
                 </a:solidFill>
                 <a:latin typeface="Courier New" pitchFamily="34" charset="0"/>
                 <a:ea typeface="Courier New" pitchFamily="34" charset="-122"/>
                 <a:cs typeface="Courier New" pitchFamily="34" charset="-120"/>
               </a:rPr>
-              <a:t>C1 out 0 1u</a:t>
+              <a:t>.ac dec 2 10 100k</a:t>
+            </a:r>
+            <a:r>
+              <a:rPr lang="en-US" sz="1000" dirty="0">
+                <a:solidFill>
+                  <a:schemeClr val="accent3"/>
+                </a:solidFill>
+                <a:latin typeface="Courier New" pitchFamily="34" charset="0"/>
+                <a:ea typeface="Courier New" pitchFamily="34" charset="-122"/>
+                <a:cs typeface="Courier New" pitchFamily="34" charset="-120"/>
+              </a:rPr>
+              <a:t>   &lt;- instruction</a:t>
             </a:r>
             <a:endParaRPr lang="en-US" sz="1100" dirty="0"/>
           </a:p>
           <a:p>
-            <a:pPr indent="0" marL="0">
+            <a:pPr marL="0" indent="0">
               <a:spcAft>
                 <a:spcPts val="800"/>
               </a:spcAft>
@@ -12617,63 +12617,26 @@
                 <a:ea typeface="Courier New" pitchFamily="34" charset="-122"/>
                 <a:cs typeface="Courier New" pitchFamily="34" charset="-120"/>
               </a:rPr>
-              <a:t>.ac dec 2 10 100k</a:t>
-            </a:r>
-            <a:pPr indent="0" marL="0">
+              <a:t>.tran 100u 3m</a:t>
+            </a:r>
+            <a:endParaRPr lang="en-US" sz="1100" dirty="0"/>
+          </a:p>
+          <a:p>
+            <a:pPr marL="0" indent="0">
               <a:spcAft>
                 <a:spcPts val="800"/>
               </a:spcAft>
               <a:buNone/>
             </a:pPr>
             <a:r>
-              <a:rPr lang="en-US" sz="1000" dirty="0">
-                <a:solidFill>
-                  <a:schemeClr val="accent3"/>
+              <a:rPr lang="en-US" sz="1100" dirty="0">
+                <a:solidFill>
+                  <a:schemeClr val="accent4"/>
                 </a:solidFill>
                 <a:latin typeface="Courier New" pitchFamily="34" charset="0"/>
                 <a:ea typeface="Courier New" pitchFamily="34" charset="-122"/>
                 <a:cs typeface="Courier New" pitchFamily="34" charset="-120"/>
               </a:rPr>
-              <a:t>   &lt;- instruction</a:t>
-            </a:r>
-            <a:endParaRPr lang="en-US" sz="1100" dirty="0"/>
-          </a:p>
-          <a:p>
-            <a:pPr indent="0" marL="0">
-              <a:spcAft>
-                <a:spcPts val="800"/>
-              </a:spcAft>
-              <a:buNone/>
-            </a:pPr>
-            <a:r>
-              <a:rPr lang="en-US" sz="1100" dirty="0">
-                <a:solidFill>
-                  <a:schemeClr val="accent4"/>
-                </a:solidFill>
-                <a:latin typeface="Courier New" pitchFamily="34" charset="0"/>
-                <a:ea typeface="Courier New" pitchFamily="34" charset="-122"/>
-                <a:cs typeface="Courier New" pitchFamily="34" charset="-120"/>
-              </a:rPr>
-              <a:t>.tran 100u 3m</a:t>
-            </a:r>
-            <a:endParaRPr lang="en-US" sz="1100" dirty="0"/>
-          </a:p>
-          <a:p>
-            <a:pPr indent="0" marL="0">
-              <a:spcAft>
-                <a:spcPts val="800"/>
-              </a:spcAft>
-              <a:buNone/>
-            </a:pPr>
-            <a:r>
-              <a:rPr lang="en-US" sz="1100" dirty="0">
-                <a:solidFill>
-                  <a:schemeClr val="accent4"/>
-                </a:solidFill>
-                <a:latin typeface="Courier New" pitchFamily="34" charset="0"/>
-                <a:ea typeface="Courier New" pitchFamily="34" charset="-122"/>
-                <a:cs typeface="Courier New" pitchFamily="34" charset="-120"/>
-              </a:rPr>
               <a:t>.print ac vdb(out) vp(out)</a:t>
             </a:r>
             <a:endParaRPr lang="en-US" sz="1100" dirty="0"/>
@@ -12692,15 +12655,20 @@
             <a:ext cx="3429000" cy="731520"/>
           </a:xfrm>
           <a:prstGeom prst="rect">
-            <a:avLst>
-              <a:gd name="adj" fmla="val 15000"/>
-            </a:avLst>
+            <a:avLst/>
           </a:prstGeom>
           <a:solidFill>
             <a:schemeClr val="bg2"/>
           </a:solidFill>
           <a:ln/>
         </p:spPr>
+        <p:txBody>
+          <a:bodyPr/>
+          <a:lstStyle/>
+          <a:p>
+            <a:endParaRPr lang="en-AU"/>
+          </a:p>
+        </p:txBody>
       </p:sp>
       <p:sp>
         <p:nvSpPr>
@@ -12723,7 +12691,7 @@
           <a:bodyPr wrap="square" lIns="0" tIns="0" rIns="0" bIns="0" rtlCol="0" anchor="ctr"/>
           <a:lstStyle/>
           <a:p>
-            <a:pPr indent="0" marL="0">
+            <a:pPr marL="0" indent="0">
               <a:buNone/>
             </a:pPr>
             <a:r>
@@ -12737,7 +12705,7 @@
             <a:endParaRPr lang="en-US" sz="1400" dirty="0"/>
           </a:p>
           <a:p>
-            <a:pPr indent="0" marL="0">
+            <a:pPr marL="0" indent="0">
               <a:buNone/>
             </a:pPr>
             <a:r>
@@ -12764,15 +12732,20 @@
             <a:ext cx="3429000" cy="731520"/>
           </a:xfrm>
           <a:prstGeom prst="rect">
-            <a:avLst>
-              <a:gd name="adj" fmla="val 15000"/>
-            </a:avLst>
+            <a:avLst/>
           </a:prstGeom>
           <a:solidFill>
             <a:schemeClr val="bg2"/>
           </a:solidFill>
           <a:ln/>
         </p:spPr>
+        <p:txBody>
+          <a:bodyPr/>
+          <a:lstStyle/>
+          <a:p>
+            <a:endParaRPr lang="en-AU"/>
+          </a:p>
+        </p:txBody>
       </p:sp>
       <p:sp>
         <p:nvSpPr>
@@ -12795,7 +12768,7 @@
           <a:bodyPr wrap="square" lIns="0" tIns="0" rIns="0" bIns="0" rtlCol="0" anchor="ctr"/>
           <a:lstStyle/>
           <a:p>
-            <a:pPr indent="0" marL="0">
+            <a:pPr marL="0" indent="0">
               <a:buNone/>
             </a:pPr>
             <a:r>
@@ -12809,7 +12782,7 @@
             <a:endParaRPr lang="en-US" sz="1400" dirty="0"/>
           </a:p>
           <a:p>
-            <a:pPr indent="0" marL="0">
+            <a:pPr marL="0" indent="0">
               <a:buNone/>
             </a:pPr>
             <a:r>
@@ -12836,15 +12809,20 @@
             <a:ext cx="3429000" cy="731520"/>
           </a:xfrm>
           <a:prstGeom prst="rect">
-            <a:avLst>
-              <a:gd name="adj" fmla="val 15000"/>
-            </a:avLst>
+            <a:avLst/>
           </a:prstGeom>
           <a:solidFill>
             <a:schemeClr val="bg2"/>
           </a:solidFill>
           <a:ln/>
         </p:spPr>
+        <p:txBody>
+          <a:bodyPr/>
+          <a:lstStyle/>
+          <a:p>
+            <a:endParaRPr lang="en-AU"/>
+          </a:p>
+        </p:txBody>
       </p:sp>
       <p:sp>
         <p:nvSpPr>
@@ -12867,7 +12845,7 @@
           <a:bodyPr wrap="square" lIns="0" tIns="0" rIns="0" bIns="0" rtlCol="0" anchor="ctr"/>
           <a:lstStyle/>
           <a:p>
-            <a:pPr indent="0" marL="0">
+            <a:pPr marL="0" indent="0">
               <a:buNone/>
             </a:pPr>
             <a:r>
@@ -12881,7 +12859,7 @@
             <a:endParaRPr lang="en-US" sz="1400" dirty="0"/>
           </a:p>
           <a:p>
-            <a:pPr indent="0" marL="0">
+            <a:pPr marL="0" indent="0">
               <a:buNone/>
             </a:pPr>
             <a:r>
@@ -12908,15 +12886,20 @@
             <a:ext cx="3429000" cy="731520"/>
           </a:xfrm>
           <a:prstGeom prst="rect">
-            <a:avLst>
-              <a:gd name="adj" fmla="val 15000"/>
-            </a:avLst>
+            <a:avLst/>
           </a:prstGeom>
           <a:solidFill>
             <a:schemeClr val="accent1"/>
           </a:solidFill>
           <a:ln/>
         </p:spPr>
+        <p:txBody>
+          <a:bodyPr/>
+          <a:lstStyle/>
+          <a:p>
+            <a:endParaRPr lang="en-AU"/>
+          </a:p>
+        </p:txBody>
       </p:sp>
       <p:sp>
         <p:nvSpPr>
@@ -12939,7 +12922,7 @@
           <a:bodyPr wrap="square" lIns="0" tIns="0" rIns="0" bIns="0" rtlCol="0" anchor="ctr"/>
           <a:lstStyle/>
           <a:p>
-            <a:pPr indent="0" marL="0">
+            <a:pPr marL="0" indent="0">
               <a:buNone/>
             </a:pPr>
             <a:r>
@@ -12953,7 +12936,7 @@
             <a:endParaRPr lang="en-US" sz="1400" dirty="0"/>
           </a:p>
           <a:p>
-            <a:pPr indent="0" marL="0">
+            <a:pPr marL="0" indent="0">
               <a:buNone/>
             </a:pPr>
             <a:r>
@@ -12988,7 +12971,7 @@
           </a:prstGeom>
           <a:extLst>
             <a:ext uri="{C572A759-6A51-4108-AA02-DFA0A04FC94B}">
-              <ma14:wrappingTextBoxFlag xmlns:ma14="http://schemas.microsoft.com/office/mac/drawingml/2011/main" val="0"/>
+              <ma14:wrappingTextBoxFlag xmlns:ma14="http://schemas.microsoft.com/office/mac/drawingml/2011/main" xmlns="" val="0"/>
             </a:ext>
           </a:extLst>
         </p:spPr>
@@ -13006,7 +12989,7 @@
           <a:p>
             <a:pPr algn="r"/>
             <a:fld id="{F7021451-1387-4CA6-816F-3879F97B5CBC}" type="slidenum">
-              <a:rPr b="0" lang="en-US"/>
+              <a:rPr lang="en-US" b="0"/>
               <a:t>4</a:t>
             </a:fld>
             <a:endParaRPr lang="en-US"/>
@@ -13041,9 +13024,11 @@
       <p:sp>
         <p:nvSpPr>
           <p:cNvPr id="2" name="Text 0"/>
-          <p:cNvSpPr/>
+          <p:cNvSpPr>
+            <a:spLocks noGrp="1"/>
+          </p:cNvSpPr>
           <p:nvPr>
-            <p:ph idx="100" type="title" hasCustomPrompt="1"/>
+            <p:ph type="title" idx="100" hasCustomPrompt="1"/>
           </p:nvPr>
         </p:nvSpPr>
         <p:spPr>
@@ -13061,7 +13046,7 @@
           <a:bodyPr wrap="square" lIns="0" tIns="0" rIns="0" bIns="0" rtlCol="0" anchor="ctr"/>
           <a:lstStyle/>
           <a:p>
-            <a:pPr algn="l" indent="0" marL="0">
+            <a:pPr marL="0" indent="0" algn="l">
               <a:buNone/>
             </a:pPr>
             <a:r>
@@ -13097,7 +13082,7 @@
           <a:bodyPr wrap="square" lIns="0" tIns="0" rIns="0" bIns="0" rtlCol="0" anchor="ctr"/>
           <a:lstStyle/>
           <a:p>
-            <a:pPr algn="l" indent="0" marL="0">
+            <a:pPr marL="0" indent="0" algn="l">
               <a:buNone/>
             </a:pPr>
             <a:r>
@@ -13136,7 +13121,7 @@
           <a:bodyPr wrap="square" lIns="0" tIns="0" rIns="0" bIns="0" rtlCol="0" anchor="ctr"/>
           <a:lstStyle/>
           <a:p>
-            <a:pPr indent="0" marL="0">
+            <a:pPr marL="0" indent="0">
               <a:buNone/>
             </a:pPr>
             <a:r>
@@ -13150,7 +13135,7 @@
             <a:endParaRPr lang="en-US" sz="1500" dirty="0"/>
           </a:p>
           <a:p>
-            <a:pPr indent="0" marL="0">
+            <a:pPr marL="0" indent="0">
               <a:buNone/>
             </a:pPr>
             <a:r>
@@ -13186,7 +13171,7 @@
           <a:bodyPr wrap="square" lIns="0" tIns="0" rIns="0" bIns="0" rtlCol="0" anchor="ctr"/>
           <a:lstStyle/>
           <a:p>
-            <a:pPr algn="l" indent="0" marL="0">
+            <a:pPr marL="0" indent="0" algn="l">
               <a:buNone/>
             </a:pPr>
             <a:r>
@@ -13225,7 +13210,7 @@
           <a:bodyPr wrap="square" lIns="0" tIns="0" rIns="0" bIns="0" rtlCol="0" anchor="ctr"/>
           <a:lstStyle/>
           <a:p>
-            <a:pPr indent="0" marL="0">
+            <a:pPr marL="0" indent="0">
               <a:buNone/>
             </a:pPr>
             <a:r>
@@ -13239,7 +13224,7 @@
             <a:endParaRPr lang="en-US" sz="1500" dirty="0"/>
           </a:p>
           <a:p>
-            <a:pPr indent="0" marL="0">
+            <a:pPr marL="0" indent="0">
               <a:buNone/>
             </a:pPr>
             <a:r>
@@ -13275,7 +13260,7 @@
           <a:bodyPr wrap="square" lIns="0" tIns="0" rIns="0" bIns="0" rtlCol="0" anchor="ctr"/>
           <a:lstStyle/>
           <a:p>
-            <a:pPr algn="l" indent="0" marL="0">
+            <a:pPr marL="0" indent="0" algn="l">
               <a:buNone/>
             </a:pPr>
             <a:r>
@@ -13314,7 +13299,7 @@
           <a:bodyPr wrap="square" lIns="0" tIns="0" rIns="0" bIns="0" rtlCol="0" anchor="ctr"/>
           <a:lstStyle/>
           <a:p>
-            <a:pPr indent="0" marL="0">
+            <a:pPr marL="0" indent="0">
               <a:buNone/>
             </a:pPr>
             <a:r>
@@ -13328,7 +13313,7 @@
             <a:endParaRPr lang="en-US" sz="1500" dirty="0"/>
           </a:p>
           <a:p>
-            <a:pPr indent="0" marL="0">
+            <a:pPr marL="0" indent="0">
               <a:buNone/>
             </a:pPr>
             <a:r>
@@ -13364,7 +13349,7 @@
           <a:bodyPr wrap="square" lIns="0" tIns="0" rIns="0" bIns="0" rtlCol="0" anchor="ctr"/>
           <a:lstStyle/>
           <a:p>
-            <a:pPr algn="l" indent="0" marL="0">
+            <a:pPr marL="0" indent="0" algn="l">
               <a:buNone/>
             </a:pPr>
             <a:r>
@@ -13403,7 +13388,7 @@
           <a:bodyPr wrap="square" lIns="0" tIns="0" rIns="0" bIns="0" rtlCol="0" anchor="ctr"/>
           <a:lstStyle/>
           <a:p>
-            <a:pPr indent="0" marL="0">
+            <a:pPr marL="0" indent="0">
               <a:buNone/>
             </a:pPr>
             <a:r>
@@ -13417,7 +13402,7 @@
             <a:endParaRPr lang="en-US" sz="1500" dirty="0"/>
           </a:p>
           <a:p>
-            <a:pPr indent="0" marL="0">
+            <a:pPr marL="0" indent="0">
               <a:buNone/>
             </a:pPr>
             <a:r>
@@ -13444,15 +13429,20 @@
             <a:ext cx="4023360" cy="2148840"/>
           </a:xfrm>
           <a:prstGeom prst="rect">
-            <a:avLst>
-              <a:gd name="adj" fmla="val 5106"/>
-            </a:avLst>
+            <a:avLst/>
           </a:prstGeom>
           <a:solidFill>
             <a:schemeClr val="tx1"/>
           </a:solidFill>
           <a:ln/>
         </p:spPr>
+        <p:txBody>
+          <a:bodyPr/>
+          <a:lstStyle/>
+          <a:p>
+            <a:endParaRPr lang="en-AU"/>
+          </a:p>
+        </p:txBody>
       </p:sp>
       <p:sp>
         <p:nvSpPr>
@@ -13475,7 +13465,7 @@
           <a:bodyPr wrap="square" lIns="0" tIns="0" rIns="0" bIns="0" rtlCol="0" anchor="t"/>
           <a:lstStyle/>
           <a:p>
-            <a:pPr indent="0" marL="0">
+            <a:pPr marL="0" indent="0">
               <a:buNone/>
             </a:pPr>
             <a:r>
@@ -13511,7 +13501,7 @@
           <a:bodyPr wrap="square" lIns="0" tIns="0" rIns="0" bIns="0" rtlCol="0" anchor="ctr"/>
           <a:lstStyle/>
           <a:p>
-            <a:pPr indent="0" marL="0">
+            <a:pPr marL="0" indent="0">
               <a:buNone/>
             </a:pPr>
             <a:r>
@@ -13547,7 +13537,7 @@
           <a:bodyPr wrap="square" lIns="0" tIns="0" rIns="0" bIns="0" rtlCol="0" anchor="ctr"/>
           <a:lstStyle/>
           <a:p>
-            <a:pPr algn="ctr" indent="0" marL="0">
+            <a:pPr marL="0" indent="0" algn="ctr">
               <a:buNone/>
             </a:pPr>
             <a:r>
@@ -13583,7 +13573,7 @@
           <a:bodyPr wrap="square" lIns="0" tIns="0" rIns="0" bIns="0" rtlCol="0" anchor="ctr"/>
           <a:lstStyle/>
           <a:p>
-            <a:pPr indent="0" marL="0">
+            <a:pPr marL="0" indent="0">
               <a:buNone/>
             </a:pPr>
             <a:r>
@@ -13622,7 +13612,7 @@
           <a:bodyPr wrap="square" lIns="0" tIns="0" rIns="0" bIns="0" rtlCol="0" anchor="ctr"/>
           <a:lstStyle/>
           <a:p>
-            <a:pPr indent="0" marL="0">
+            <a:pPr marL="0" indent="0">
               <a:buNone/>
             </a:pPr>
             <a:r>
@@ -13658,7 +13648,7 @@
           <a:bodyPr wrap="square" lIns="0" tIns="0" rIns="0" bIns="0" rtlCol="0" anchor="ctr"/>
           <a:lstStyle/>
           <a:p>
-            <a:pPr algn="ctr" indent="0" marL="0">
+            <a:pPr marL="0" indent="0" algn="ctr">
               <a:buNone/>
             </a:pPr>
             <a:r>
@@ -13694,7 +13684,7 @@
           <a:bodyPr wrap="square" lIns="0" tIns="0" rIns="0" bIns="0" rtlCol="0" anchor="ctr"/>
           <a:lstStyle/>
           <a:p>
-            <a:pPr indent="0" marL="0">
+            <a:pPr marL="0" indent="0">
               <a:buNone/>
             </a:pPr>
             <a:r>
@@ -13733,7 +13723,7 @@
           <a:bodyPr wrap="square" lIns="0" tIns="0" rIns="0" bIns="0" rtlCol="0" anchor="ctr"/>
           <a:lstStyle/>
           <a:p>
-            <a:pPr indent="0" marL="0">
+            <a:pPr marL="0" indent="0">
               <a:buNone/>
             </a:pPr>
             <a:r>
@@ -13769,7 +13759,7 @@
           <a:bodyPr wrap="square" lIns="0" tIns="0" rIns="0" bIns="0" rtlCol="0" anchor="ctr"/>
           <a:lstStyle/>
           <a:p>
-            <a:pPr algn="ctr" indent="0" marL="0">
+            <a:pPr marL="0" indent="0" algn="ctr">
               <a:buNone/>
             </a:pPr>
             <a:r>
@@ -13805,7 +13795,7 @@
           <a:bodyPr wrap="square" lIns="0" tIns="0" rIns="0" bIns="0" rtlCol="0" anchor="ctr"/>
           <a:lstStyle/>
           <a:p>
-            <a:pPr indent="0" marL="0">
+            <a:pPr marL="0" indent="0">
               <a:buNone/>
             </a:pPr>
             <a:r>
@@ -13844,7 +13834,7 @@
           <a:bodyPr wrap="square" lIns="0" tIns="0" rIns="0" bIns="0" rtlCol="0" anchor="ctr"/>
           <a:lstStyle/>
           <a:p>
-            <a:pPr indent="0" marL="0">
+            <a:pPr marL="0" indent="0">
               <a:buNone/>
             </a:pPr>
             <a:r>
@@ -13880,7 +13870,7 @@
           <a:bodyPr wrap="square" lIns="0" tIns="0" rIns="0" bIns="0" rtlCol="0" anchor="ctr"/>
           <a:lstStyle/>
           <a:p>
-            <a:pPr algn="ctr" indent="0" marL="0">
+            <a:pPr marL="0" indent="0" algn="ctr">
               <a:buNone/>
             </a:pPr>
             <a:r>
@@ -13916,7 +13906,7 @@
           <a:bodyPr wrap="square" lIns="0" tIns="0" rIns="0" bIns="0" rtlCol="0" anchor="ctr"/>
           <a:lstStyle/>
           <a:p>
-            <a:pPr indent="0" marL="0">
+            <a:pPr marL="0" indent="0">
               <a:buNone/>
             </a:pPr>
             <a:r>
@@ -13946,9 +13936,7 @@
             <a:ext cx="4023360" cy="914400"/>
           </a:xfrm>
           <a:prstGeom prst="rect">
-            <a:avLst>
-              <a:gd name="adj" fmla="val 12000"/>
-            </a:avLst>
+            <a:avLst/>
           </a:prstGeom>
           <a:solidFill>
             <a:schemeClr val="bg2"/>
@@ -13959,7 +13947,7 @@
           <a:bodyPr wrap="square" lIns="101600" tIns="101600" rIns="101600" bIns="101600" rtlCol="0" anchor="ctr"/>
           <a:lstStyle/>
           <a:p>
-            <a:pPr algn="ctr" indent="0" marL="0">
+            <a:pPr marL="0" indent="0" algn="ctr">
               <a:buNone/>
             </a:pPr>
             <a:r>
@@ -13973,7 +13961,7 @@
             <a:endParaRPr lang="en-US" sz="2200" dirty="0"/>
           </a:p>
           <a:p>
-            <a:pPr algn="ctr" indent="0" marL="0">
+            <a:pPr marL="0" indent="0" algn="ctr">
               <a:buNone/>
             </a:pPr>
             <a:r>
@@ -13990,7 +13978,7 @@
       </p:sp>
       <p:sp>
         <p:nvSpPr>
-          <p:cNvPr id="25" name="Slide Number Placeholder 0"/>
+          <p:cNvPr id="3" name="Slide Number Placeholder 0"/>
           <p:cNvSpPr>
             <a:spLocks noGrp="1"/>
           </p:cNvSpPr>
@@ -14008,7 +13996,7 @@
           </a:prstGeom>
           <a:extLst>
             <a:ext uri="{C572A759-6A51-4108-AA02-DFA0A04FC94B}">
-              <ma14:wrappingTextBoxFlag xmlns:ma14="http://schemas.microsoft.com/office/mac/drawingml/2011/main" val="0"/>
+              <ma14:wrappingTextBoxFlag xmlns:ma14="http://schemas.microsoft.com/office/mac/drawingml/2011/main" xmlns="" val="0"/>
             </a:ext>
           </a:extLst>
         </p:spPr>
@@ -14026,7 +14014,7 @@
           <a:p>
             <a:pPr algn="r"/>
             <a:fld id="{F7021451-1387-4CA6-816F-3879F97B5CBC}" type="slidenum">
-              <a:rPr b="0" lang="en-US"/>
+              <a:rPr lang="en-US" b="0"/>
               <a:t>5</a:t>
             </a:fld>
             <a:endParaRPr lang="en-US"/>
@@ -14061,9 +14049,11 @@
       <p:sp>
         <p:nvSpPr>
           <p:cNvPr id="2" name="Text 0"/>
-          <p:cNvSpPr/>
+          <p:cNvSpPr>
+            <a:spLocks noGrp="1"/>
+          </p:cNvSpPr>
           <p:nvPr>
-            <p:ph idx="100" type="title" hasCustomPrompt="1"/>
+            <p:ph type="title" idx="100" hasCustomPrompt="1"/>
           </p:nvPr>
         </p:nvSpPr>
         <p:spPr>
@@ -14081,7 +14071,7 @@
           <a:bodyPr wrap="square" lIns="0" tIns="0" rIns="0" bIns="0" rtlCol="0" anchor="ctr"/>
           <a:lstStyle/>
           <a:p>
-            <a:pPr algn="l" indent="0" marL="0">
+            <a:pPr marL="0" indent="0" algn="l">
               <a:buNone/>
             </a:pPr>
             <a:r>
@@ -14090,7 +14080,7 @@
                   <a:schemeClr val="tx1"/>
                 </a:solidFill>
               </a:rPr>
-              <a:t>The same method in other fields</a:t>
+              <a:t>Applications in other fields</a:t>
             </a:r>
             <a:endParaRPr lang="en-US" sz="3400" dirty="0"/>
           </a:p>
@@ -14112,17 +14102,41 @@
         </p:nvGraphicFramePr>
         <p:xfrm>
           <a:off x="457200" y="1188720"/>
-          <a:ext cx="8229600" cy="914400"/>
+          <a:ext cx="8229600" cy="2624328"/>
         </p:xfrm>
         <a:graphic>
           <a:graphicData uri="http://schemas.openxmlformats.org/drawingml/2006/table">
             <a:tbl>
               <a:tblPr/>
               <a:tblGrid>
-                <a:gridCol w="1920240"/>
-                <a:gridCol w="2103120"/>
-                <a:gridCol w="2103120"/>
-                <a:gridCol w="2103120"/>
+                <a:gridCol w="1920240">
+                  <a:extLst>
+                    <a:ext uri="{9D8B030D-6E8A-4147-A177-3AD203B41FA5}">
+                      <a16:colId xmlns:a16="http://schemas.microsoft.com/office/drawing/2014/main" val="20000"/>
+                    </a:ext>
+                  </a:extLst>
+                </a:gridCol>
+                <a:gridCol w="2103120">
+                  <a:extLst>
+                    <a:ext uri="{9D8B030D-6E8A-4147-A177-3AD203B41FA5}">
+                      <a16:colId xmlns:a16="http://schemas.microsoft.com/office/drawing/2014/main" val="20001"/>
+                    </a:ext>
+                  </a:extLst>
+                </a:gridCol>
+                <a:gridCol w="2103120">
+                  <a:extLst>
+                    <a:ext uri="{9D8B030D-6E8A-4147-A177-3AD203B41FA5}">
+                      <a16:colId xmlns:a16="http://schemas.microsoft.com/office/drawing/2014/main" val="20002"/>
+                    </a:ext>
+                  </a:extLst>
+                </a:gridCol>
+                <a:gridCol w="2103120">
+                  <a:extLst>
+                    <a:ext uri="{9D8B030D-6E8A-4147-A177-3AD203B41FA5}">
+                      <a16:colId xmlns:a16="http://schemas.microsoft.com/office/drawing/2014/main" val="20003"/>
+                    </a:ext>
+                  </a:extLst>
+                </a:gridCol>
               </a:tblGrid>
               <a:tr h="374904">
                 <a:tc>
@@ -14130,7 +14144,7 @@
                     <a:bodyPr/>
                     <a:lstStyle/>
                     <a:p>
-                      <a:pPr algn="l" indent="0" marL="0">
+                      <a:pPr marL="0" indent="0" algn="l">
                         <a:buNone/>
                       </a:pPr>
                       <a:r>
@@ -14144,7 +14158,7 @@
                       <a:endParaRPr lang="en-US" sz="1300" dirty="0"/>
                     </a:p>
                   </a:txBody>
-                  <a:tcPr marL="91440" marR="91440" marT="0" marB="0" anchor="ctr">
+                  <a:tcPr marT="0" marB="0" anchor="ctr">
                     <a:lnL w="9525" cap="flat" cmpd="sng" algn="ctr">
                       <a:solidFill>
                         <a:srgbClr val="D4D6D8"/>
@@ -14191,7 +14205,7 @@
                     <a:bodyPr/>
                     <a:lstStyle/>
                     <a:p>
-                      <a:pPr algn="l" indent="0" marL="0">
+                      <a:pPr marL="0" indent="0" algn="l">
                         <a:buNone/>
                       </a:pPr>
                       <a:r>
@@ -14205,7 +14219,7 @@
                       <a:endParaRPr lang="en-US" sz="1300" dirty="0"/>
                     </a:p>
                   </a:txBody>
-                  <a:tcPr marL="91440" marR="91440" marT="0" marB="0" anchor="ctr">
+                  <a:tcPr marT="0" marB="0" anchor="ctr">
                     <a:lnL w="9525" cap="flat" cmpd="sng" algn="ctr">
                       <a:solidFill>
                         <a:srgbClr val="D4D6D8"/>
@@ -14252,7 +14266,7 @@
                     <a:bodyPr/>
                     <a:lstStyle/>
                     <a:p>
-                      <a:pPr algn="l" indent="0" marL="0">
+                      <a:pPr marL="0" indent="0" algn="l">
                         <a:buNone/>
                       </a:pPr>
                       <a:r>
@@ -14266,7 +14280,7 @@
                       <a:endParaRPr lang="en-US" sz="1300" dirty="0"/>
                     </a:p>
                   </a:txBody>
-                  <a:tcPr marL="91440" marR="91440" marT="0" marB="0" anchor="ctr">
+                  <a:tcPr marT="0" marB="0" anchor="ctr">
                     <a:lnL w="9525" cap="flat" cmpd="sng" algn="ctr">
                       <a:solidFill>
                         <a:srgbClr val="D4D6D8"/>
@@ -14313,7 +14327,7 @@
                     <a:bodyPr/>
                     <a:lstStyle/>
                     <a:p>
-                      <a:pPr algn="l" indent="0" marL="0">
+                      <a:pPr marL="0" indent="0" algn="l">
                         <a:buNone/>
                       </a:pPr>
                       <a:r>
@@ -14327,7 +14341,7 @@
                       <a:endParaRPr lang="en-US" sz="1300" dirty="0"/>
                     </a:p>
                   </a:txBody>
-                  <a:tcPr marL="91440" marR="91440" marT="0" marB="0" anchor="ctr">
+                  <a:tcPr marT="0" marB="0" anchor="ctr">
                     <a:lnL w="9525" cap="flat" cmpd="sng" algn="ctr">
                       <a:solidFill>
                         <a:srgbClr val="D4D6D8"/>
@@ -14369,6 +14383,11 @@
                     </a:solidFill>
                   </a:tcPr>
                 </a:tc>
+                <a:extLst>
+                  <a:ext uri="{0D108BD9-81ED-4DB2-BD59-A6C34878D82A}">
+                    <a16:rowId xmlns:a16="http://schemas.microsoft.com/office/drawing/2014/main" val="10000"/>
+                  </a:ext>
+                </a:extLst>
               </a:tr>
               <a:tr h="374904">
                 <a:tc>
@@ -14376,7 +14395,7 @@
                     <a:bodyPr/>
                     <a:lstStyle/>
                     <a:p>
-                      <a:pPr indent="0" marL="0">
+                      <a:pPr marL="0" indent="0">
                         <a:buNone/>
                       </a:pPr>
                       <a:r>
@@ -14390,7 +14409,7 @@
                       <a:endParaRPr lang="en-US" sz="1300" dirty="0"/>
                     </a:p>
                   </a:txBody>
-                  <a:tcPr marL="91440" marR="91440" marT="0" marB="0" anchor="ctr">
+                  <a:tcPr marT="0" marB="0" anchor="ctr">
                     <a:lnL w="9525" cap="flat" cmpd="sng" algn="ctr">
                       <a:solidFill>
                         <a:srgbClr val="D4D6D8"/>
@@ -14437,7 +14456,7 @@
                     <a:bodyPr/>
                     <a:lstStyle/>
                     <a:p>
-                      <a:pPr indent="0" marL="0">
+                      <a:pPr marL="0" indent="0">
                         <a:buNone/>
                       </a:pPr>
                       <a:r>
@@ -14451,7 +14470,7 @@
                       <a:endParaRPr lang="en-US" sz="1300" dirty="0"/>
                     </a:p>
                   </a:txBody>
-                  <a:tcPr marL="91440" marR="91440" marT="0" marB="0" anchor="ctr">
+                  <a:tcPr marT="0" marB="0" anchor="ctr">
                     <a:lnL w="9525" cap="flat" cmpd="sng" algn="ctr">
                       <a:solidFill>
                         <a:srgbClr val="D4D6D8"/>
@@ -14495,7 +14514,7 @@
                     <a:bodyPr/>
                     <a:lstStyle/>
                     <a:p>
-                      <a:pPr indent="0" marL="0">
+                      <a:pPr marL="0" indent="0">
                         <a:buNone/>
                       </a:pPr>
                       <a:r>
@@ -14509,7 +14528,7 @@
                       <a:endParaRPr lang="en-US" sz="1300" dirty="0"/>
                     </a:p>
                   </a:txBody>
-                  <a:tcPr marL="91440" marR="91440" marT="0" marB="0" anchor="ctr">
+                  <a:tcPr marT="0" marB="0" anchor="ctr">
                     <a:lnL w="9525" cap="flat" cmpd="sng" algn="ctr">
                       <a:solidFill>
                         <a:srgbClr val="D4D6D8"/>
@@ -14553,7 +14572,7 @@
                     <a:bodyPr/>
                     <a:lstStyle/>
                     <a:p>
-                      <a:pPr indent="0" marL="0">
+                      <a:pPr marL="0" indent="0">
                         <a:buNone/>
                       </a:pPr>
                       <a:r>
@@ -14567,7 +14586,7 @@
                       <a:endParaRPr lang="en-US" sz="1300" dirty="0"/>
                     </a:p>
                   </a:txBody>
-                  <a:tcPr marL="91440" marR="91440" marT="0" marB="0" anchor="ctr">
+                  <a:tcPr marT="0" marB="0" anchor="ctr">
                     <a:lnL w="9525" cap="flat" cmpd="sng" algn="ctr">
                       <a:solidFill>
                         <a:srgbClr val="D4D6D8"/>
@@ -14606,6 +14625,11 @@
                     </a:lnB>
                   </a:tcPr>
                 </a:tc>
+                <a:extLst>
+                  <a:ext uri="{0D108BD9-81ED-4DB2-BD59-A6C34878D82A}">
+                    <a16:rowId xmlns:a16="http://schemas.microsoft.com/office/drawing/2014/main" val="10001"/>
+                  </a:ext>
+                </a:extLst>
               </a:tr>
               <a:tr h="374904">
                 <a:tc>
@@ -14613,7 +14637,7 @@
                     <a:bodyPr/>
                     <a:lstStyle/>
                     <a:p>
-                      <a:pPr indent="0" marL="0">
+                      <a:pPr marL="0" indent="0">
                         <a:buNone/>
                       </a:pPr>
                       <a:r>
@@ -14627,7 +14651,7 @@
                       <a:endParaRPr lang="en-US" sz="1300" dirty="0"/>
                     </a:p>
                   </a:txBody>
-                  <a:tcPr marL="91440" marR="91440" marT="0" marB="0" anchor="ctr">
+                  <a:tcPr marT="0" marB="0" anchor="ctr">
                     <a:lnL w="9525" cap="flat" cmpd="sng" algn="ctr">
                       <a:solidFill>
                         <a:srgbClr val="D4D6D8"/>
@@ -14674,7 +14698,7 @@
                     <a:bodyPr/>
                     <a:lstStyle/>
                     <a:p>
-                      <a:pPr indent="0" marL="0">
+                      <a:pPr marL="0" indent="0">
                         <a:buNone/>
                       </a:pPr>
                       <a:r>
@@ -14688,7 +14712,7 @@
                       <a:endParaRPr lang="en-US" sz="1300" dirty="0"/>
                     </a:p>
                   </a:txBody>
-                  <a:tcPr marL="91440" marR="91440" marT="0" marB="0" anchor="ctr">
+                  <a:tcPr marT="0" marB="0" anchor="ctr">
                     <a:lnL w="9525" cap="flat" cmpd="sng" algn="ctr">
                       <a:solidFill>
                         <a:srgbClr val="D4D6D8"/>
@@ -14732,7 +14756,7 @@
                     <a:bodyPr/>
                     <a:lstStyle/>
                     <a:p>
-                      <a:pPr indent="0" marL="0">
+                      <a:pPr marL="0" indent="0">
                         <a:buNone/>
                       </a:pPr>
                       <a:r>
@@ -14746,7 +14770,7 @@
                       <a:endParaRPr lang="en-US" sz="1300" dirty="0"/>
                     </a:p>
                   </a:txBody>
-                  <a:tcPr marL="91440" marR="91440" marT="0" marB="0" anchor="ctr">
+                  <a:tcPr marT="0" marB="0" anchor="ctr">
                     <a:lnL w="9525" cap="flat" cmpd="sng" algn="ctr">
                       <a:solidFill>
                         <a:srgbClr val="D4D6D8"/>
@@ -14790,7 +14814,7 @@
                     <a:bodyPr/>
                     <a:lstStyle/>
                     <a:p>
-                      <a:pPr indent="0" marL="0">
+                      <a:pPr marL="0" indent="0">
                         <a:buNone/>
                       </a:pPr>
                       <a:r>
@@ -14804,7 +14828,7 @@
                       <a:endParaRPr lang="en-US" sz="1300" dirty="0"/>
                     </a:p>
                   </a:txBody>
-                  <a:tcPr marL="91440" marR="91440" marT="0" marB="0" anchor="ctr">
+                  <a:tcPr marT="0" marB="0" anchor="ctr">
                     <a:lnL w="9525" cap="flat" cmpd="sng" algn="ctr">
                       <a:solidFill>
                         <a:srgbClr val="D4D6D8"/>
@@ -14843,6 +14867,11 @@
                     </a:lnB>
                   </a:tcPr>
                 </a:tc>
+                <a:extLst>
+                  <a:ext uri="{0D108BD9-81ED-4DB2-BD59-A6C34878D82A}">
+                    <a16:rowId xmlns:a16="http://schemas.microsoft.com/office/drawing/2014/main" val="10002"/>
+                  </a:ext>
+                </a:extLst>
               </a:tr>
               <a:tr h="374904">
                 <a:tc>
@@ -14850,7 +14879,7 @@
                     <a:bodyPr/>
                     <a:lstStyle/>
                     <a:p>
-                      <a:pPr indent="0" marL="0">
+                      <a:pPr marL="0" indent="0">
                         <a:buNone/>
                       </a:pPr>
                       <a:r>
@@ -14864,7 +14893,7 @@
                       <a:endParaRPr lang="en-US" sz="1300" dirty="0"/>
                     </a:p>
                   </a:txBody>
-                  <a:tcPr marL="91440" marR="91440" marT="0" marB="0" anchor="ctr">
+                  <a:tcPr marT="0" marB="0" anchor="ctr">
                     <a:lnL w="9525" cap="flat" cmpd="sng" algn="ctr">
                       <a:solidFill>
                         <a:srgbClr val="D4D6D8"/>
@@ -14911,7 +14940,7 @@
                     <a:bodyPr/>
                     <a:lstStyle/>
                     <a:p>
-                      <a:pPr indent="0" marL="0">
+                      <a:pPr marL="0" indent="0">
                         <a:buNone/>
                       </a:pPr>
                       <a:r>
@@ -14925,7 +14954,7 @@
                       <a:endParaRPr lang="en-US" sz="1300" dirty="0"/>
                     </a:p>
                   </a:txBody>
-                  <a:tcPr marL="91440" marR="91440" marT="0" marB="0" anchor="ctr">
+                  <a:tcPr marT="0" marB="0" anchor="ctr">
                     <a:lnL w="9525" cap="flat" cmpd="sng" algn="ctr">
                       <a:solidFill>
                         <a:srgbClr val="D4D6D8"/>
@@ -14969,7 +14998,7 @@
                     <a:bodyPr/>
                     <a:lstStyle/>
                     <a:p>
-                      <a:pPr indent="0" marL="0">
+                      <a:pPr marL="0" indent="0">
                         <a:buNone/>
                       </a:pPr>
                       <a:r>
@@ -14983,7 +15012,7 @@
                       <a:endParaRPr lang="en-US" sz="1300" dirty="0"/>
                     </a:p>
                   </a:txBody>
-                  <a:tcPr marL="91440" marR="91440" marT="0" marB="0" anchor="ctr">
+                  <a:tcPr marT="0" marB="0" anchor="ctr">
                     <a:lnL w="9525" cap="flat" cmpd="sng" algn="ctr">
                       <a:solidFill>
                         <a:srgbClr val="D4D6D8"/>
@@ -15027,7 +15056,7 @@
                     <a:bodyPr/>
                     <a:lstStyle/>
                     <a:p>
-                      <a:pPr indent="0" marL="0">
+                      <a:pPr marL="0" indent="0">
                         <a:buNone/>
                       </a:pPr>
                       <a:r>
@@ -15041,7 +15070,7 @@
                       <a:endParaRPr lang="en-US" sz="1300" dirty="0"/>
                     </a:p>
                   </a:txBody>
-                  <a:tcPr marL="91440" marR="91440" marT="0" marB="0" anchor="ctr">
+                  <a:tcPr marT="0" marB="0" anchor="ctr">
                     <a:lnL w="9525" cap="flat" cmpd="sng" algn="ctr">
                       <a:solidFill>
                         <a:srgbClr val="D4D6D8"/>
@@ -15080,6 +15109,11 @@
                     </a:lnB>
                   </a:tcPr>
                 </a:tc>
+                <a:extLst>
+                  <a:ext uri="{0D108BD9-81ED-4DB2-BD59-A6C34878D82A}">
+                    <a16:rowId xmlns:a16="http://schemas.microsoft.com/office/drawing/2014/main" val="10003"/>
+                  </a:ext>
+                </a:extLst>
               </a:tr>
               <a:tr h="374904">
                 <a:tc>
@@ -15087,7 +15121,7 @@
                     <a:bodyPr/>
                     <a:lstStyle/>
                     <a:p>
-                      <a:pPr indent="0" marL="0">
+                      <a:pPr marL="0" indent="0">
                         <a:buNone/>
                       </a:pPr>
                       <a:r>
@@ -15101,7 +15135,7 @@
                       <a:endParaRPr lang="en-US" sz="1300" dirty="0"/>
                     </a:p>
                   </a:txBody>
-                  <a:tcPr marL="91440" marR="91440" marT="0" marB="0" anchor="ctr">
+                  <a:tcPr marT="0" marB="0" anchor="ctr">
                     <a:lnL w="9525" cap="flat" cmpd="sng" algn="ctr">
                       <a:solidFill>
                         <a:srgbClr val="D4D6D8"/>
@@ -15148,7 +15182,7 @@
                     <a:bodyPr/>
                     <a:lstStyle/>
                     <a:p>
-                      <a:pPr indent="0" marL="0">
+                      <a:pPr marL="0" indent="0">
                         <a:buNone/>
                       </a:pPr>
                       <a:r>
@@ -15162,7 +15196,7 @@
                       <a:endParaRPr lang="en-US" sz="1300" dirty="0"/>
                     </a:p>
                   </a:txBody>
-                  <a:tcPr marL="91440" marR="91440" marT="0" marB="0" anchor="ctr">
+                  <a:tcPr marT="0" marB="0" anchor="ctr">
                     <a:lnL w="9525" cap="flat" cmpd="sng" algn="ctr">
                       <a:solidFill>
                         <a:srgbClr val="D4D6D8"/>
@@ -15206,7 +15240,7 @@
                     <a:bodyPr/>
                     <a:lstStyle/>
                     <a:p>
-                      <a:pPr indent="0" marL="0">
+                      <a:pPr marL="0" indent="0">
                         <a:buNone/>
                       </a:pPr>
                       <a:r>
@@ -15220,7 +15254,7 @@
                       <a:endParaRPr lang="en-US" sz="1300" dirty="0"/>
                     </a:p>
                   </a:txBody>
-                  <a:tcPr marL="91440" marR="91440" marT="0" marB="0" anchor="ctr">
+                  <a:tcPr marT="0" marB="0" anchor="ctr">
                     <a:lnL w="9525" cap="flat" cmpd="sng" algn="ctr">
                       <a:solidFill>
                         <a:srgbClr val="D4D6D8"/>
@@ -15264,7 +15298,7 @@
                     <a:bodyPr/>
                     <a:lstStyle/>
                     <a:p>
-                      <a:pPr indent="0" marL="0">
+                      <a:pPr marL="0" indent="0">
                         <a:buNone/>
                       </a:pPr>
                       <a:r>
@@ -15278,7 +15312,7 @@
                       <a:endParaRPr lang="en-US" sz="1300" dirty="0"/>
                     </a:p>
                   </a:txBody>
-                  <a:tcPr marL="91440" marR="91440" marT="0" marB="0" anchor="ctr">
+                  <a:tcPr marT="0" marB="0" anchor="ctr">
                     <a:lnL w="9525" cap="flat" cmpd="sng" algn="ctr">
                       <a:solidFill>
                         <a:srgbClr val="D4D6D8"/>
@@ -15317,6 +15351,11 @@
                     </a:lnB>
                   </a:tcPr>
                 </a:tc>
+                <a:extLst>
+                  <a:ext uri="{0D108BD9-81ED-4DB2-BD59-A6C34878D82A}">
+                    <a16:rowId xmlns:a16="http://schemas.microsoft.com/office/drawing/2014/main" val="10004"/>
+                  </a:ext>
+                </a:extLst>
               </a:tr>
               <a:tr h="374904">
                 <a:tc>
@@ -15324,7 +15363,7 @@
                     <a:bodyPr/>
                     <a:lstStyle/>
                     <a:p>
-                      <a:pPr indent="0" marL="0">
+                      <a:pPr marL="0" indent="0">
                         <a:buNone/>
                       </a:pPr>
                       <a:r>
@@ -15338,7 +15377,7 @@
                       <a:endParaRPr lang="en-US" sz="1300" dirty="0"/>
                     </a:p>
                   </a:txBody>
-                  <a:tcPr marL="91440" marR="91440" marT="0" marB="0" anchor="ctr">
+                  <a:tcPr marT="0" marB="0" anchor="ctr">
                     <a:lnL w="9525" cap="flat" cmpd="sng" algn="ctr">
                       <a:solidFill>
                         <a:srgbClr val="D4D6D8"/>
@@ -15385,7 +15424,7 @@
                     <a:bodyPr/>
                     <a:lstStyle/>
                     <a:p>
-                      <a:pPr indent="0" marL="0">
+                      <a:pPr marL="0" indent="0">
                         <a:buNone/>
                       </a:pPr>
                       <a:r>
@@ -15399,7 +15438,7 @@
                       <a:endParaRPr lang="en-US" sz="1300" dirty="0"/>
                     </a:p>
                   </a:txBody>
-                  <a:tcPr marL="91440" marR="91440" marT="0" marB="0" anchor="ctr">
+                  <a:tcPr marT="0" marB="0" anchor="ctr">
                     <a:lnL w="9525" cap="flat" cmpd="sng" algn="ctr">
                       <a:solidFill>
                         <a:srgbClr val="D4D6D8"/>
@@ -15443,7 +15482,7 @@
                     <a:bodyPr/>
                     <a:lstStyle/>
                     <a:p>
-                      <a:pPr indent="0" marL="0">
+                      <a:pPr marL="0" indent="0">
                         <a:buNone/>
                       </a:pPr>
                       <a:r>
@@ -15457,7 +15496,7 @@
                       <a:endParaRPr lang="en-US" sz="1300" dirty="0"/>
                     </a:p>
                   </a:txBody>
-                  <a:tcPr marL="91440" marR="91440" marT="0" marB="0" anchor="ctr">
+                  <a:tcPr marT="0" marB="0" anchor="ctr">
                     <a:lnL w="9525" cap="flat" cmpd="sng" algn="ctr">
                       <a:solidFill>
                         <a:srgbClr val="D4D6D8"/>
@@ -15501,7 +15540,7 @@
                     <a:bodyPr/>
                     <a:lstStyle/>
                     <a:p>
-                      <a:pPr indent="0" marL="0">
+                      <a:pPr marL="0" indent="0">
                         <a:buNone/>
                       </a:pPr>
                       <a:r>
@@ -15515,7 +15554,7 @@
                       <a:endParaRPr lang="en-US" sz="1300" dirty="0"/>
                     </a:p>
                   </a:txBody>
-                  <a:tcPr marL="91440" marR="91440" marT="0" marB="0" anchor="ctr">
+                  <a:tcPr marT="0" marB="0" anchor="ctr">
                     <a:lnL w="9525" cap="flat" cmpd="sng" algn="ctr">
                       <a:solidFill>
                         <a:srgbClr val="D4D6D8"/>
@@ -15554,6 +15593,11 @@
                     </a:lnB>
                   </a:tcPr>
                 </a:tc>
+                <a:extLst>
+                  <a:ext uri="{0D108BD9-81ED-4DB2-BD59-A6C34878D82A}">
+                    <a16:rowId xmlns:a16="http://schemas.microsoft.com/office/drawing/2014/main" val="10005"/>
+                  </a:ext>
+                </a:extLst>
               </a:tr>
               <a:tr h="374904">
                 <a:tc>
@@ -15561,7 +15605,7 @@
                     <a:bodyPr/>
                     <a:lstStyle/>
                     <a:p>
-                      <a:pPr indent="0" marL="0">
+                      <a:pPr marL="0" indent="0">
                         <a:buNone/>
                       </a:pPr>
                       <a:r>
@@ -15575,7 +15619,7 @@
                       <a:endParaRPr lang="en-US" sz="1300" dirty="0"/>
                     </a:p>
                   </a:txBody>
-                  <a:tcPr marL="91440" marR="91440" marT="0" marB="0" anchor="ctr">
+                  <a:tcPr marT="0" marB="0" anchor="ctr">
                     <a:lnL w="9525" cap="flat" cmpd="sng" algn="ctr">
                       <a:solidFill>
                         <a:srgbClr val="D4D6D8"/>
@@ -15622,7 +15666,7 @@
                     <a:bodyPr/>
                     <a:lstStyle/>
                     <a:p>
-                      <a:pPr indent="0" marL="0">
+                      <a:pPr marL="0" indent="0">
                         <a:buNone/>
                       </a:pPr>
                       <a:r>
@@ -15636,7 +15680,7 @@
                       <a:endParaRPr lang="en-US" sz="1300" dirty="0"/>
                     </a:p>
                   </a:txBody>
-                  <a:tcPr marL="91440" marR="91440" marT="0" marB="0" anchor="ctr">
+                  <a:tcPr marT="0" marB="0" anchor="ctr">
                     <a:lnL w="9525" cap="flat" cmpd="sng" algn="ctr">
                       <a:solidFill>
                         <a:srgbClr val="D4D6D8"/>
@@ -15680,7 +15724,7 @@
                     <a:bodyPr/>
                     <a:lstStyle/>
                     <a:p>
-                      <a:pPr indent="0" marL="0">
+                      <a:pPr marL="0" indent="0">
                         <a:buNone/>
                       </a:pPr>
                       <a:r>
@@ -15694,7 +15738,7 @@
                       <a:endParaRPr lang="en-US" sz="1300" dirty="0"/>
                     </a:p>
                   </a:txBody>
-                  <a:tcPr marL="91440" marR="91440" marT="0" marB="0" anchor="ctr">
+                  <a:tcPr marT="0" marB="0" anchor="ctr">
                     <a:lnL w="9525" cap="flat" cmpd="sng" algn="ctr">
                       <a:solidFill>
                         <a:srgbClr val="D4D6D8"/>
@@ -15738,7 +15782,7 @@
                     <a:bodyPr/>
                     <a:lstStyle/>
                     <a:p>
-                      <a:pPr indent="0" marL="0">
+                      <a:pPr marL="0" indent="0">
                         <a:buNone/>
                       </a:pPr>
                       <a:r>
@@ -15752,7 +15796,7 @@
                       <a:endParaRPr lang="en-US" sz="1300" dirty="0"/>
                     </a:p>
                   </a:txBody>
-                  <a:tcPr marL="91440" marR="91440" marT="0" marB="0" anchor="ctr">
+                  <a:tcPr marT="0" marB="0" anchor="ctr">
                     <a:lnL w="9525" cap="flat" cmpd="sng" algn="ctr">
                       <a:solidFill>
                         <a:srgbClr val="D4D6D8"/>
@@ -15791,6 +15835,11 @@
                     </a:lnB>
                   </a:tcPr>
                 </a:tc>
+                <a:extLst>
+                  <a:ext uri="{0D108BD9-81ED-4DB2-BD59-A6C34878D82A}">
+                    <a16:rowId xmlns:a16="http://schemas.microsoft.com/office/drawing/2014/main" val="10006"/>
+                  </a:ext>
+                </a:extLst>
               </a:tr>
             </a:tbl>
           </a:graphicData>
@@ -15808,15 +15857,20 @@
             <a:ext cx="8229600" cy="548640"/>
           </a:xfrm>
           <a:prstGeom prst="rect">
-            <a:avLst>
-              <a:gd name="adj" fmla="val 20000"/>
-            </a:avLst>
+            <a:avLst/>
           </a:prstGeom>
           <a:solidFill>
             <a:schemeClr val="accent1"/>
           </a:solidFill>
           <a:ln/>
         </p:spPr>
+        <p:txBody>
+          <a:bodyPr/>
+          <a:lstStyle/>
+          <a:p>
+            <a:endParaRPr lang="en-AU"/>
+          </a:p>
+        </p:txBody>
       </p:sp>
       <p:sp>
         <p:nvSpPr>
@@ -15839,7 +15893,7 @@
           <a:bodyPr wrap="square" lIns="0" tIns="0" rIns="0" bIns="0" rtlCol="0" anchor="ctr"/>
           <a:lstStyle/>
           <a:p>
-            <a:pPr indent="0" marL="0">
+            <a:pPr marL="0" indent="0">
               <a:buNone/>
             </a:pPr>
             <a:r>
@@ -15874,7 +15928,7 @@
           </a:prstGeom>
           <a:extLst>
             <a:ext uri="{C572A759-6A51-4108-AA02-DFA0A04FC94B}">
-              <ma14:wrappingTextBoxFlag xmlns:ma14="http://schemas.microsoft.com/office/mac/drawingml/2011/main" val="0"/>
+              <ma14:wrappingTextBoxFlag xmlns:ma14="http://schemas.microsoft.com/office/mac/drawingml/2011/main" xmlns="" val="0"/>
             </a:ext>
           </a:extLst>
         </p:spPr>
@@ -15892,7 +15946,7 @@
           <a:p>
             <a:pPr algn="r"/>
             <a:fld id="{F7021451-1387-4CA6-816F-3879F97B5CBC}" type="slidenum">
-              <a:rPr b="0" lang="en-US"/>
+              <a:rPr lang="en-US" b="0"/>
               <a:t>6</a:t>
             </a:fld>
             <a:endParaRPr lang="en-US"/>
@@ -15927,9 +15981,11 @@
       <p:sp>
         <p:nvSpPr>
           <p:cNvPr id="2" name="Text 0"/>
-          <p:cNvSpPr/>
+          <p:cNvSpPr>
+            <a:spLocks noGrp="1"/>
+          </p:cNvSpPr>
           <p:nvPr>
-            <p:ph idx="100" type="title" hasCustomPrompt="1"/>
+            <p:ph type="title" idx="100" hasCustomPrompt="1"/>
           </p:nvPr>
         </p:nvSpPr>
         <p:spPr>
@@ -15947,7 +16003,7 @@
           <a:bodyPr wrap="square" lIns="0" tIns="0" rIns="0" bIns="0" rtlCol="0" anchor="ctr"/>
           <a:lstStyle/>
           <a:p>
-            <a:pPr algn="l" indent="0" marL="0">
+            <a:pPr marL="0" indent="0" algn="l">
               <a:buNone/>
             </a:pPr>
             <a:r>
@@ -15983,7 +16039,7 @@
           <a:bodyPr wrap="square" lIns="0" tIns="0" rIns="0" bIns="0" rtlCol="0" anchor="t"/>
           <a:lstStyle/>
           <a:p>
-            <a:pPr indent="0" marL="0">
+            <a:pPr marL="0" indent="0">
               <a:buNone/>
             </a:pPr>
             <a:r>
@@ -16014,16 +16070,34 @@
         </p:nvGraphicFramePr>
         <p:xfrm>
           <a:off x="457200" y="1600200"/>
-          <a:ext cx="3566160" cy="914400"/>
+          <a:ext cx="3566160" cy="1371600"/>
         </p:xfrm>
         <a:graphic>
           <a:graphicData uri="http://schemas.openxmlformats.org/drawingml/2006/table">
             <a:tbl>
               <a:tblPr/>
               <a:tblGrid>
-                <a:gridCol w="1188720"/>
-                <a:gridCol w="1188720"/>
-                <a:gridCol w="1188720"/>
+                <a:gridCol w="1188720">
+                  <a:extLst>
+                    <a:ext uri="{9D8B030D-6E8A-4147-A177-3AD203B41FA5}">
+                      <a16:colId xmlns:a16="http://schemas.microsoft.com/office/drawing/2014/main" val="20000"/>
+                    </a:ext>
+                  </a:extLst>
+                </a:gridCol>
+                <a:gridCol w="1188720">
+                  <a:extLst>
+                    <a:ext uri="{9D8B030D-6E8A-4147-A177-3AD203B41FA5}">
+                      <a16:colId xmlns:a16="http://schemas.microsoft.com/office/drawing/2014/main" val="20001"/>
+                    </a:ext>
+                  </a:extLst>
+                </a:gridCol>
+                <a:gridCol w="1188720">
+                  <a:extLst>
+                    <a:ext uri="{9D8B030D-6E8A-4147-A177-3AD203B41FA5}">
+                      <a16:colId xmlns:a16="http://schemas.microsoft.com/office/drawing/2014/main" val="20002"/>
+                    </a:ext>
+                  </a:extLst>
+                </a:gridCol>
               </a:tblGrid>
               <a:tr h="457200">
                 <a:tc>
@@ -16031,7 +16105,7 @@
                     <a:bodyPr/>
                     <a:lstStyle/>
                     <a:p>
-                      <a:pPr algn="ctr" indent="0" marL="0">
+                      <a:pPr marL="0" indent="0" algn="ctr">
                         <a:buNone/>
                       </a:pPr>
                       <a:r>
@@ -16052,7 +16126,7 @@
                       </a:endParaRPr>
                     </a:p>
                   </a:txBody>
-                  <a:tcPr marL="91440" marR="91440" marT="45720" marB="45720" anchor="ctr">
+                  <a:tcPr anchor="ctr">
                     <a:lnL w="12700" cap="flat" cmpd="sng" algn="ctr">
                       <a:solidFill>
                         <a:srgbClr val="FFFFFF"/>
@@ -16099,7 +16173,7 @@
                     <a:bodyPr/>
                     <a:lstStyle/>
                     <a:p>
-                      <a:pPr algn="ctr" indent="0" marL="0">
+                      <a:pPr marL="0" indent="0" algn="ctr">
                         <a:buNone/>
                       </a:pPr>
                       <a:r>
@@ -16120,7 +16194,7 @@
                       </a:endParaRPr>
                     </a:p>
                   </a:txBody>
-                  <a:tcPr marL="91440" marR="91440" marT="45720" marB="45720" anchor="ctr">
+                  <a:tcPr anchor="ctr">
                     <a:lnL w="12700" cap="flat" cmpd="sng" algn="ctr">
                       <a:solidFill>
                         <a:srgbClr val="FFFFFF"/>
@@ -16167,7 +16241,7 @@
                     <a:bodyPr/>
                     <a:lstStyle/>
                     <a:p>
-                      <a:pPr algn="ctr" indent="0" marL="0">
+                      <a:pPr marL="0" indent="0" algn="ctr">
                         <a:buNone/>
                       </a:pPr>
                       <a:r>
@@ -16188,7 +16262,7 @@
                       </a:endParaRPr>
                     </a:p>
                   </a:txBody>
-                  <a:tcPr marL="91440" marR="91440" marT="45720" marB="45720" anchor="ctr">
+                  <a:tcPr anchor="ctr">
                     <a:lnL w="12700" cap="flat" cmpd="sng" algn="ctr">
                       <a:solidFill>
                         <a:srgbClr val="FFFFFF"/>
@@ -16230,6 +16304,11 @@
                     </a:solidFill>
                   </a:tcPr>
                 </a:tc>
+                <a:extLst>
+                  <a:ext uri="{0D108BD9-81ED-4DB2-BD59-A6C34878D82A}">
+                    <a16:rowId xmlns:a16="http://schemas.microsoft.com/office/drawing/2014/main" val="10000"/>
+                  </a:ext>
+                </a:extLst>
               </a:tr>
               <a:tr h="457200">
                 <a:tc>
@@ -16237,7 +16316,7 @@
                     <a:bodyPr/>
                     <a:lstStyle/>
                     <a:p>
-                      <a:pPr algn="ctr" indent="0" marL="0">
+                      <a:pPr marL="0" indent="0" algn="ctr">
                         <a:buNone/>
                       </a:pPr>
                       <a:r>
@@ -16258,7 +16337,7 @@
                       </a:endParaRPr>
                     </a:p>
                   </a:txBody>
-                  <a:tcPr marL="91440" marR="91440" marT="45720" marB="45720" anchor="ctr">
+                  <a:tcPr anchor="ctr">
                     <a:lnL w="12700" cap="flat" cmpd="sng" algn="ctr">
                       <a:solidFill>
                         <a:srgbClr val="FFFFFF"/>
@@ -16305,7 +16384,7 @@
                     <a:bodyPr/>
                     <a:lstStyle/>
                     <a:p>
-                      <a:pPr algn="ctr" indent="0" marL="0">
+                      <a:pPr marL="0" indent="0" algn="ctr">
                         <a:buNone/>
                       </a:pPr>
                       <a:r>
@@ -16326,7 +16405,7 @@
                       </a:endParaRPr>
                     </a:p>
                   </a:txBody>
-                  <a:tcPr marL="91440" marR="91440" marT="45720" marB="45720" anchor="ctr">
+                  <a:tcPr anchor="ctr">
                     <a:lnL w="12700" cap="flat" cmpd="sng" algn="ctr">
                       <a:solidFill>
                         <a:srgbClr val="FFFFFF"/>
@@ -16373,7 +16452,7 @@
                     <a:bodyPr/>
                     <a:lstStyle/>
                     <a:p>
-                      <a:pPr algn="ctr" indent="0" marL="0">
+                      <a:pPr marL="0" indent="0" algn="ctr">
                         <a:buNone/>
                       </a:pPr>
                       <a:r>
@@ -16394,7 +16473,7 @@
                       </a:endParaRPr>
                     </a:p>
                   </a:txBody>
-                  <a:tcPr marL="91440" marR="91440" marT="45720" marB="45720" anchor="ctr">
+                  <a:tcPr anchor="ctr">
                     <a:lnL w="12700" cap="flat" cmpd="sng" algn="ctr">
                       <a:solidFill>
                         <a:srgbClr val="FFFFFF"/>
@@ -16436,6 +16515,11 @@
                     </a:solidFill>
                   </a:tcPr>
                 </a:tc>
+                <a:extLst>
+                  <a:ext uri="{0D108BD9-81ED-4DB2-BD59-A6C34878D82A}">
+                    <a16:rowId xmlns:a16="http://schemas.microsoft.com/office/drawing/2014/main" val="10001"/>
+                  </a:ext>
+                </a:extLst>
               </a:tr>
               <a:tr h="457200">
                 <a:tc>
@@ -16443,7 +16527,7 @@
                     <a:bodyPr/>
                     <a:lstStyle/>
                     <a:p>
-                      <a:pPr algn="ctr" indent="0" marL="0">
+                      <a:pPr marL="0" indent="0" algn="ctr">
                         <a:buNone/>
                       </a:pPr>
                       <a:r>
@@ -16464,7 +16548,7 @@
                       </a:endParaRPr>
                     </a:p>
                   </a:txBody>
-                  <a:tcPr marL="91440" marR="91440" marT="45720" marB="45720" anchor="ctr">
+                  <a:tcPr anchor="ctr">
                     <a:lnL w="12700" cap="flat" cmpd="sng" algn="ctr">
                       <a:solidFill>
                         <a:srgbClr val="FFFFFF"/>
@@ -16511,7 +16595,7 @@
                     <a:bodyPr/>
                     <a:lstStyle/>
                     <a:p>
-                      <a:pPr algn="ctr" indent="0" marL="0">
+                      <a:pPr marL="0" indent="0" algn="ctr">
                         <a:buNone/>
                       </a:pPr>
                       <a:r>
@@ -16532,7 +16616,7 @@
                       </a:endParaRPr>
                     </a:p>
                   </a:txBody>
-                  <a:tcPr marL="91440" marR="91440" marT="45720" marB="45720" anchor="ctr">
+                  <a:tcPr anchor="ctr">
                     <a:lnL w="12700" cap="flat" cmpd="sng" algn="ctr">
                       <a:solidFill>
                         <a:srgbClr val="FFFFFF"/>
@@ -16579,7 +16663,7 @@
                     <a:bodyPr/>
                     <a:lstStyle/>
                     <a:p>
-                      <a:pPr algn="ctr" indent="0" marL="0">
+                      <a:pPr marL="0" indent="0" algn="ctr">
                         <a:buNone/>
                       </a:pPr>
                       <a:r>
@@ -16600,7 +16684,7 @@
                       </a:endParaRPr>
                     </a:p>
                   </a:txBody>
-                  <a:tcPr marL="91440" marR="91440" marT="45720" marB="45720" anchor="ctr">
+                  <a:tcPr anchor="ctr">
                     <a:lnL w="12700" cap="flat" cmpd="sng" algn="ctr">
                       <a:solidFill>
                         <a:srgbClr val="FFFFFF"/>
@@ -16642,6 +16726,11 @@
                     </a:solidFill>
                   </a:tcPr>
                 </a:tc>
+                <a:extLst>
+                  <a:ext uri="{0D108BD9-81ED-4DB2-BD59-A6C34878D82A}">
+                    <a16:rowId xmlns:a16="http://schemas.microsoft.com/office/drawing/2014/main" val="10002"/>
+                  </a:ext>
+                </a:extLst>
               </a:tr>
             </a:tbl>
           </a:graphicData>
@@ -16668,7 +16757,7 @@
           <a:bodyPr wrap="square" lIns="0" tIns="0" rIns="0" bIns="0" rtlCol="0" anchor="ctr"/>
           <a:lstStyle/>
           <a:p>
-            <a:pPr algn="ctr" indent="0" marL="0">
+            <a:pPr marL="0" indent="0" algn="ctr">
               <a:buNone/>
             </a:pPr>
             <a:r>
@@ -16699,14 +16788,20 @@
         </p:nvGraphicFramePr>
         <p:xfrm>
           <a:off x="4389120" y="1600200"/>
-          <a:ext cx="1097280" cy="914400"/>
+          <a:ext cx="1097280" cy="1371600"/>
         </p:xfrm>
         <a:graphic>
           <a:graphicData uri="http://schemas.openxmlformats.org/drawingml/2006/table">
             <a:tbl>
               <a:tblPr/>
               <a:tblGrid>
-                <a:gridCol w="1097280"/>
+                <a:gridCol w="1097280">
+                  <a:extLst>
+                    <a:ext uri="{9D8B030D-6E8A-4147-A177-3AD203B41FA5}">
+                      <a16:colId xmlns:a16="http://schemas.microsoft.com/office/drawing/2014/main" val="20000"/>
+                    </a:ext>
+                  </a:extLst>
+                </a:gridCol>
               </a:tblGrid>
               <a:tr h="457200">
                 <a:tc>
@@ -16714,7 +16809,7 @@
                     <a:bodyPr/>
                     <a:lstStyle/>
                     <a:p>
-                      <a:pPr algn="ctr" indent="0" marL="0">
+                      <a:pPr marL="0" indent="0" algn="ctr">
                         <a:buNone/>
                       </a:pPr>
                       <a:r>
@@ -16735,7 +16830,7 @@
                       </a:endParaRPr>
                     </a:p>
                   </a:txBody>
-                  <a:tcPr marL="91440" marR="91440" marT="45720" marB="45720" anchor="ctr">
+                  <a:tcPr anchor="ctr">
                     <a:lnL w="12700" cap="flat" cmpd="sng" algn="ctr">
                       <a:solidFill>
                         <a:srgbClr val="FFFFFF"/>
@@ -16777,6 +16872,11 @@
                     </a:solidFill>
                   </a:tcPr>
                 </a:tc>
+                <a:extLst>
+                  <a:ext uri="{0D108BD9-81ED-4DB2-BD59-A6C34878D82A}">
+                    <a16:rowId xmlns:a16="http://schemas.microsoft.com/office/drawing/2014/main" val="10000"/>
+                  </a:ext>
+                </a:extLst>
               </a:tr>
               <a:tr h="457200">
                 <a:tc>
@@ -16784,7 +16884,7 @@
                     <a:bodyPr/>
                     <a:lstStyle/>
                     <a:p>
-                      <a:pPr algn="ctr" indent="0" marL="0">
+                      <a:pPr marL="0" indent="0" algn="ctr">
                         <a:buNone/>
                       </a:pPr>
                       <a:r>
@@ -16805,7 +16905,7 @@
                       </a:endParaRPr>
                     </a:p>
                   </a:txBody>
-                  <a:tcPr marL="91440" marR="91440" marT="45720" marB="45720" anchor="ctr">
+                  <a:tcPr anchor="ctr">
                     <a:lnL w="12700" cap="flat" cmpd="sng" algn="ctr">
                       <a:solidFill>
                         <a:srgbClr val="FFFFFF"/>
@@ -16847,6 +16947,11 @@
                     </a:solidFill>
                   </a:tcPr>
                 </a:tc>
+                <a:extLst>
+                  <a:ext uri="{0D108BD9-81ED-4DB2-BD59-A6C34878D82A}">
+                    <a16:rowId xmlns:a16="http://schemas.microsoft.com/office/drawing/2014/main" val="10001"/>
+                  </a:ext>
+                </a:extLst>
               </a:tr>
               <a:tr h="457200">
                 <a:tc>
@@ -16854,7 +16959,7 @@
                     <a:bodyPr/>
                     <a:lstStyle/>
                     <a:p>
-                      <a:pPr algn="ctr" indent="0" marL="0">
+                      <a:pPr marL="0" indent="0" algn="ctr">
                         <a:buNone/>
                       </a:pPr>
                       <a:r>
@@ -16875,7 +16980,7 @@
                       </a:endParaRPr>
                     </a:p>
                   </a:txBody>
-                  <a:tcPr marL="91440" marR="91440" marT="45720" marB="45720" anchor="ctr">
+                  <a:tcPr anchor="ctr">
                     <a:lnL w="12700" cap="flat" cmpd="sng" algn="ctr">
                       <a:solidFill>
                         <a:srgbClr val="FFFFFF"/>
@@ -16917,6 +17022,11 @@
                     </a:solidFill>
                   </a:tcPr>
                 </a:tc>
+                <a:extLst>
+                  <a:ext uri="{0D108BD9-81ED-4DB2-BD59-A6C34878D82A}">
+                    <a16:rowId xmlns:a16="http://schemas.microsoft.com/office/drawing/2014/main" val="10002"/>
+                  </a:ext>
+                </a:extLst>
               </a:tr>
             </a:tbl>
           </a:graphicData>
@@ -16924,7 +17034,7 @@
       </p:graphicFrame>
       <p:sp>
         <p:nvSpPr>
-          <p:cNvPr id="8" name="Text 3"/>
+          <p:cNvPr id="3" name="Text 3"/>
           <p:cNvSpPr txBox="1"/>
           <p:nvPr/>
         </p:nvSpPr>
@@ -16943,7 +17053,7 @@
           <a:bodyPr wrap="square" lIns="0" tIns="0" rIns="0" bIns="0" rtlCol="0" anchor="ctr"/>
           <a:lstStyle/>
           <a:p>
-            <a:pPr algn="ctr" indent="0" marL="0">
+            <a:pPr marL="0" indent="0" algn="ctr">
               <a:buNone/>
             </a:pPr>
             <a:r>
@@ -16974,14 +17084,20 @@
         </p:nvGraphicFramePr>
         <p:xfrm>
           <a:off x="5852160" y="1600200"/>
-          <a:ext cx="731520" cy="914400"/>
+          <a:ext cx="731520" cy="1371600"/>
         </p:xfrm>
         <a:graphic>
           <a:graphicData uri="http://schemas.openxmlformats.org/drawingml/2006/table">
             <a:tbl>
               <a:tblPr/>
               <a:tblGrid>
-                <a:gridCol w="731520"/>
+                <a:gridCol w="731520">
+                  <a:extLst>
+                    <a:ext uri="{9D8B030D-6E8A-4147-A177-3AD203B41FA5}">
+                      <a16:colId xmlns:a16="http://schemas.microsoft.com/office/drawing/2014/main" val="20000"/>
+                    </a:ext>
+                  </a:extLst>
+                </a:gridCol>
               </a:tblGrid>
               <a:tr h="457200">
                 <a:tc>
@@ -16989,7 +17105,7 @@
                     <a:bodyPr/>
                     <a:lstStyle/>
                     <a:p>
-                      <a:pPr algn="ctr" indent="0" marL="0">
+                      <a:pPr marL="0" indent="0" algn="ctr">
                         <a:buNone/>
                       </a:pPr>
                       <a:r>
@@ -17010,7 +17126,7 @@
                       </a:endParaRPr>
                     </a:p>
                   </a:txBody>
-                  <a:tcPr marL="91440" marR="91440" marT="45720" marB="45720" anchor="ctr">
+                  <a:tcPr anchor="ctr">
                     <a:lnL w="12700" cap="flat" cmpd="sng" algn="ctr">
                       <a:solidFill>
                         <a:srgbClr val="FFFFFF"/>
@@ -17052,6 +17168,11 @@
                     </a:solidFill>
                   </a:tcPr>
                 </a:tc>
+                <a:extLst>
+                  <a:ext uri="{0D108BD9-81ED-4DB2-BD59-A6C34878D82A}">
+                    <a16:rowId xmlns:a16="http://schemas.microsoft.com/office/drawing/2014/main" val="10000"/>
+                  </a:ext>
+                </a:extLst>
               </a:tr>
               <a:tr h="457200">
                 <a:tc>
@@ -17059,7 +17180,7 @@
                     <a:bodyPr/>
                     <a:lstStyle/>
                     <a:p>
-                      <a:pPr algn="ctr" indent="0" marL="0">
+                      <a:pPr marL="0" indent="0" algn="ctr">
                         <a:buNone/>
                       </a:pPr>
                       <a:r>
@@ -17080,7 +17201,7 @@
                       </a:endParaRPr>
                     </a:p>
                   </a:txBody>
-                  <a:tcPr marL="91440" marR="91440" marT="45720" marB="45720" anchor="ctr">
+                  <a:tcPr anchor="ctr">
                     <a:lnL w="12700" cap="flat" cmpd="sng" algn="ctr">
                       <a:solidFill>
                         <a:srgbClr val="FFFFFF"/>
@@ -17122,6 +17243,11 @@
                     </a:solidFill>
                   </a:tcPr>
                 </a:tc>
+                <a:extLst>
+                  <a:ext uri="{0D108BD9-81ED-4DB2-BD59-A6C34878D82A}">
+                    <a16:rowId xmlns:a16="http://schemas.microsoft.com/office/drawing/2014/main" val="10001"/>
+                  </a:ext>
+                </a:extLst>
               </a:tr>
               <a:tr h="457200">
                 <a:tc>
@@ -17129,7 +17255,7 @@
                     <a:bodyPr/>
                     <a:lstStyle/>
                     <a:p>
-                      <a:pPr algn="ctr" indent="0" marL="0">
+                      <a:pPr marL="0" indent="0" algn="ctr">
                         <a:buNone/>
                       </a:pPr>
                       <a:r>
@@ -17150,7 +17276,7 @@
                       </a:endParaRPr>
                     </a:p>
                   </a:txBody>
-                  <a:tcPr marL="91440" marR="91440" marT="45720" marB="45720" anchor="ctr">
+                  <a:tcPr anchor="ctr">
                     <a:lnL w="12700" cap="flat" cmpd="sng" algn="ctr">
                       <a:solidFill>
                         <a:srgbClr val="FFFFFF"/>
@@ -17192,6 +17318,11 @@
                     </a:solidFill>
                   </a:tcPr>
                 </a:tc>
+                <a:extLst>
+                  <a:ext uri="{0D108BD9-81ED-4DB2-BD59-A6C34878D82A}">
+                    <a16:rowId xmlns:a16="http://schemas.microsoft.com/office/drawing/2014/main" val="10002"/>
+                  </a:ext>
+                </a:extLst>
               </a:tr>
             </a:tbl>
           </a:graphicData>
@@ -17209,15 +17340,20 @@
             <a:ext cx="1737360" cy="1371600"/>
           </a:xfrm>
           <a:prstGeom prst="rect">
-            <a:avLst>
-              <a:gd name="adj" fmla="val 8000"/>
-            </a:avLst>
+            <a:avLst/>
           </a:prstGeom>
           <a:solidFill>
             <a:schemeClr val="tx1"/>
           </a:solidFill>
           <a:ln/>
         </p:spPr>
+        <p:txBody>
+          <a:bodyPr/>
+          <a:lstStyle/>
+          <a:p>
+            <a:endParaRPr lang="en-AU"/>
+          </a:p>
+        </p:txBody>
       </p:sp>
       <p:sp>
         <p:nvSpPr>
@@ -17240,7 +17376,7 @@
           <a:bodyPr wrap="square" lIns="0" tIns="0" rIns="0" bIns="0" rtlCol="0" anchor="ctr"/>
           <a:lstStyle/>
           <a:p>
-            <a:pPr indent="0" marL="0">
+            <a:pPr marL="0" indent="0">
               <a:buNone/>
             </a:pPr>
             <a:r>
@@ -17254,7 +17390,7 @@
             <a:endParaRPr lang="en-US" sz="1200" dirty="0"/>
           </a:p>
           <a:p>
-            <a:pPr indent="0" marL="0">
+            <a:pPr marL="0" indent="0">
               <a:buNone/>
             </a:pPr>
             <a:r>
@@ -17268,7 +17404,7 @@
             <a:endParaRPr lang="en-US" sz="1200" dirty="0"/>
           </a:p>
           <a:p>
-            <a:pPr indent="0" marL="0">
+            <a:pPr marL="0" indent="0">
               <a:buNone/>
             </a:pPr>
             <a:r>
@@ -17282,7 +17418,7 @@
             <a:endParaRPr lang="en-US" sz="1200" dirty="0"/>
           </a:p>
           <a:p>
-            <a:pPr indent="0" marL="0">
+            <a:pPr marL="0" indent="0">
               <a:buNone/>
             </a:pPr>
             <a:r>
@@ -17309,15 +17445,20 @@
             <a:ext cx="2651760" cy="1188720"/>
           </a:xfrm>
           <a:prstGeom prst="rect">
-            <a:avLst>
-              <a:gd name="adj" fmla="val 9231"/>
-            </a:avLst>
+            <a:avLst/>
           </a:prstGeom>
           <a:solidFill>
             <a:schemeClr val="bg2"/>
           </a:solidFill>
           <a:ln/>
         </p:spPr>
+        <p:txBody>
+          <a:bodyPr/>
+          <a:lstStyle/>
+          <a:p>
+            <a:endParaRPr lang="en-AU"/>
+          </a:p>
+        </p:txBody>
       </p:sp>
       <p:sp>
         <p:nvSpPr>
@@ -17340,7 +17481,7 @@
           <a:bodyPr wrap="square" lIns="0" tIns="0" rIns="0" bIns="0" rtlCol="0" anchor="ctr"/>
           <a:lstStyle/>
           <a:p>
-            <a:pPr algn="l" indent="0" marL="0">
+            <a:pPr marL="0" indent="0" algn="l">
               <a:buNone/>
             </a:pPr>
             <a:r>
@@ -17379,7 +17520,7 @@
           <a:bodyPr wrap="square" lIns="0" tIns="0" rIns="0" bIns="0" rtlCol="0" anchor="t"/>
           <a:lstStyle/>
           <a:p>
-            <a:pPr indent="0" marL="0">
+            <a:pPr marL="0" indent="0">
               <a:buNone/>
             </a:pPr>
             <a:r>
@@ -17393,7 +17534,7 @@
             <a:endParaRPr lang="en-US" sz="1400" dirty="0"/>
           </a:p>
           <a:p>
-            <a:pPr indent="0" marL="0">
+            <a:pPr marL="0" indent="0">
               <a:buNone/>
             </a:pPr>
             <a:r>
@@ -17410,7 +17551,7 @@
       </p:sp>
       <p:sp>
         <p:nvSpPr>
-          <p:cNvPr id="15" name="Row note 2"/>
+          <p:cNvPr id="5" name="Row note 2"/>
           <p:cNvSpPr/>
           <p:nvPr/>
         </p:nvSpPr>
@@ -17420,15 +17561,20 @@
             <a:ext cx="2651760" cy="1188720"/>
           </a:xfrm>
           <a:prstGeom prst="rect">
-            <a:avLst>
-              <a:gd name="adj" fmla="val 9231"/>
-            </a:avLst>
+            <a:avLst/>
           </a:prstGeom>
           <a:solidFill>
             <a:schemeClr val="bg2"/>
           </a:solidFill>
           <a:ln/>
         </p:spPr>
+        <p:txBody>
+          <a:bodyPr/>
+          <a:lstStyle/>
+          <a:p>
+            <a:endParaRPr lang="en-AU"/>
+          </a:p>
+        </p:txBody>
       </p:sp>
       <p:sp>
         <p:nvSpPr>
@@ -17451,7 +17597,7 @@
           <a:bodyPr wrap="square" lIns="0" tIns="0" rIns="0" bIns="0" rtlCol="0" anchor="ctr"/>
           <a:lstStyle/>
           <a:p>
-            <a:pPr algn="l" indent="0" marL="0">
+            <a:pPr marL="0" indent="0" algn="l">
               <a:buNone/>
             </a:pPr>
             <a:r>
@@ -17490,7 +17636,7 @@
           <a:bodyPr wrap="square" lIns="0" tIns="0" rIns="0" bIns="0" rtlCol="0" anchor="t"/>
           <a:lstStyle/>
           <a:p>
-            <a:pPr indent="0" marL="0">
+            <a:pPr marL="0" indent="0">
               <a:buNone/>
             </a:pPr>
             <a:r>
@@ -17504,7 +17650,7 @@
             <a:endParaRPr lang="en-US" sz="1400" dirty="0"/>
           </a:p>
           <a:p>
-            <a:pPr indent="0" marL="0">
+            <a:pPr marL="0" indent="0">
               <a:buNone/>
             </a:pPr>
             <a:r>
@@ -17531,15 +17677,20 @@
             <a:ext cx="2651760" cy="1188720"/>
           </a:xfrm>
           <a:prstGeom prst="rect">
-            <a:avLst>
-              <a:gd name="adj" fmla="val 9231"/>
-            </a:avLst>
+            <a:avLst/>
           </a:prstGeom>
           <a:solidFill>
             <a:schemeClr val="bg2"/>
           </a:solidFill>
           <a:ln/>
         </p:spPr>
+        <p:txBody>
+          <a:bodyPr/>
+          <a:lstStyle/>
+          <a:p>
+            <a:endParaRPr lang="en-AU"/>
+          </a:p>
+        </p:txBody>
       </p:sp>
       <p:sp>
         <p:nvSpPr>
@@ -17562,7 +17713,7 @@
           <a:bodyPr wrap="square" lIns="0" tIns="0" rIns="0" bIns="0" rtlCol="0" anchor="ctr"/>
           <a:lstStyle/>
           <a:p>
-            <a:pPr algn="l" indent="0" marL="0">
+            <a:pPr marL="0" indent="0" algn="l">
               <a:buNone/>
             </a:pPr>
             <a:r>
@@ -17601,7 +17752,7 @@
           <a:bodyPr wrap="square" lIns="0" tIns="0" rIns="0" bIns="0" rtlCol="0" anchor="t"/>
           <a:lstStyle/>
           <a:p>
-            <a:pPr indent="0" marL="0">
+            <a:pPr marL="0" indent="0">
               <a:buNone/>
             </a:pPr>
             <a:r>
@@ -17615,7 +17766,7 @@
             <a:endParaRPr lang="en-US" sz="1400" dirty="0"/>
           </a:p>
           <a:p>
-            <a:pPr indent="0" marL="0">
+            <a:pPr marL="0" indent="0">
               <a:buNone/>
             </a:pPr>
             <a:r>
@@ -17650,7 +17801,7 @@
           </a:prstGeom>
           <a:extLst>
             <a:ext uri="{C572A759-6A51-4108-AA02-DFA0A04FC94B}">
-              <ma14:wrappingTextBoxFlag xmlns:ma14="http://schemas.microsoft.com/office/mac/drawingml/2011/main" val="0"/>
+              <ma14:wrappingTextBoxFlag xmlns:ma14="http://schemas.microsoft.com/office/mac/drawingml/2011/main" xmlns="" val="0"/>
             </a:ext>
           </a:extLst>
         </p:spPr>
@@ -17668,7 +17819,7 @@
           <a:p>
             <a:pPr algn="r"/>
             <a:fld id="{F7021451-1387-4CA6-816F-3879F97B5CBC}" type="slidenum">
-              <a:rPr b="0" lang="en-US"/>
+              <a:rPr lang="en-US" b="0"/>
               <a:t>7</a:t>
             </a:fld>
             <a:endParaRPr lang="en-US"/>
@@ -17703,9 +17854,11 @@
       <p:sp>
         <p:nvSpPr>
           <p:cNvPr id="2" name="Text 0"/>
-          <p:cNvSpPr/>
+          <p:cNvSpPr>
+            <a:spLocks noGrp="1"/>
+          </p:cNvSpPr>
           <p:nvPr>
-            <p:ph idx="100" type="title" hasCustomPrompt="1"/>
+            <p:ph type="title" idx="100" hasCustomPrompt="1"/>
           </p:nvPr>
         </p:nvSpPr>
         <p:spPr>
@@ -17723,7 +17876,7 @@
           <a:bodyPr wrap="square" lIns="0" tIns="0" rIns="0" bIns="0" rtlCol="0" anchor="ctr"/>
           <a:lstStyle/>
           <a:p>
-            <a:pPr algn="l" indent="0" marL="0">
+            <a:pPr marL="0" indent="0" algn="l">
               <a:buNone/>
             </a:pPr>
             <a:r>
@@ -17750,15 +17903,20 @@
             <a:ext cx="3200400" cy="3246120"/>
           </a:xfrm>
           <a:prstGeom prst="rect">
-            <a:avLst>
-              <a:gd name="adj" fmla="val 3429"/>
-            </a:avLst>
+            <a:avLst/>
           </a:prstGeom>
           <a:solidFill>
             <a:schemeClr val="tx1"/>
           </a:solidFill>
           <a:ln/>
         </p:spPr>
+        <p:txBody>
+          <a:bodyPr/>
+          <a:lstStyle/>
+          <a:p>
+            <a:endParaRPr lang="en-AU"/>
+          </a:p>
+        </p:txBody>
       </p:sp>
       <p:sp>
         <p:nvSpPr>
@@ -17781,7 +17939,7 @@
           <a:bodyPr wrap="square" lIns="0" tIns="0" rIns="0" bIns="0" rtlCol="0" anchor="t"/>
           <a:lstStyle/>
           <a:p>
-            <a:pPr indent="0" marL="0">
+            <a:pPr marL="0" indent="0">
               <a:buNone/>
             </a:pPr>
             <a:r>
@@ -17795,7 +17953,7 @@
             <a:endParaRPr lang="en-US" sz="1600" dirty="0"/>
           </a:p>
           <a:p>
-            <a:pPr indent="0" marL="0">
+            <a:pPr marL="0" indent="0">
               <a:buNone/>
             </a:pPr>
             <a:r>
@@ -17809,7 +17967,7 @@
             <a:endParaRPr lang="en-US" sz="1600" dirty="0"/>
           </a:p>
           <a:p>
-            <a:pPr indent="0" marL="0">
+            <a:pPr marL="0" indent="0">
               <a:buNone/>
             </a:pPr>
             <a:r>
@@ -17823,7 +17981,7 @@
             <a:endParaRPr lang="en-US" sz="1600" dirty="0"/>
           </a:p>
           <a:p>
-            <a:pPr indent="0" marL="0">
+            <a:pPr marL="0" indent="0">
               <a:buNone/>
             </a:pPr>
             <a:r>
@@ -17837,7 +17995,7 @@
             <a:endParaRPr lang="en-US" sz="1600" dirty="0"/>
           </a:p>
           <a:p>
-            <a:pPr indent="0" marL="0">
+            <a:pPr marL="0" indent="0">
               <a:buNone/>
             </a:pPr>
             <a:r>
@@ -17851,7 +18009,7 @@
             <a:endParaRPr lang="en-US" sz="1600" dirty="0"/>
           </a:p>
           <a:p>
-            <a:pPr indent="0" marL="0">
+            <a:pPr marL="0" indent="0">
               <a:buNone/>
             </a:pPr>
             <a:r>
@@ -17882,15 +18040,27 @@
         </p:nvGraphicFramePr>
         <p:xfrm>
           <a:off x="3886200" y="1234440"/>
-          <a:ext cx="4800600" cy="914400"/>
+          <a:ext cx="4800600" cy="3246120"/>
         </p:xfrm>
         <a:graphic>
           <a:graphicData uri="http://schemas.openxmlformats.org/drawingml/2006/table">
             <a:tbl>
               <a:tblPr/>
               <a:tblGrid>
-                <a:gridCol w="1325880"/>
-                <a:gridCol w="3474720"/>
+                <a:gridCol w="1325880">
+                  <a:extLst>
+                    <a:ext uri="{9D8B030D-6E8A-4147-A177-3AD203B41FA5}">
+                      <a16:colId xmlns:a16="http://schemas.microsoft.com/office/drawing/2014/main" val="20000"/>
+                    </a:ext>
+                  </a:extLst>
+                </a:gridCol>
+                <a:gridCol w="3474720">
+                  <a:extLst>
+                    <a:ext uri="{9D8B030D-6E8A-4147-A177-3AD203B41FA5}">
+                      <a16:colId xmlns:a16="http://schemas.microsoft.com/office/drawing/2014/main" val="20001"/>
+                    </a:ext>
+                  </a:extLst>
+                </a:gridCol>
               </a:tblGrid>
               <a:tr h="365760">
                 <a:tc>
@@ -17898,7 +18068,7 @@
                     <a:bodyPr/>
                     <a:lstStyle/>
                     <a:p>
-                      <a:pPr indent="0" marL="0">
+                      <a:pPr marL="0" indent="0">
                         <a:buNone/>
                       </a:pPr>
                       <a:r>
@@ -17912,7 +18082,7 @@
                       <a:endParaRPr lang="en-US" sz="1300" dirty="0"/>
                     </a:p>
                   </a:txBody>
-                  <a:tcPr marL="91440" marR="91440" marT="0" marB="0" anchor="ctr">
+                  <a:tcPr marT="0" marB="0" anchor="ctr">
                     <a:lnL w="9525" cap="flat" cmpd="sng" algn="ctr">
                       <a:solidFill>
                         <a:srgbClr val="D4D6D8"/>
@@ -17959,7 +18129,7 @@
                     <a:bodyPr/>
                     <a:lstStyle/>
                     <a:p>
-                      <a:pPr indent="0" marL="0">
+                      <a:pPr marL="0" indent="0">
                         <a:buNone/>
                       </a:pPr>
                       <a:r>
@@ -17973,7 +18143,7 @@
                       <a:endParaRPr lang="en-US" sz="1300" dirty="0"/>
                     </a:p>
                   </a:txBody>
-                  <a:tcPr marL="91440" marR="91440" marT="0" marB="0" anchor="ctr">
+                  <a:tcPr marT="0" marB="0" anchor="ctr">
                     <a:lnL w="9525" cap="flat" cmpd="sng" algn="ctr">
                       <a:solidFill>
                         <a:srgbClr val="D4D6D8"/>
@@ -18015,6 +18185,11 @@
                     </a:solidFill>
                   </a:tcPr>
                 </a:tc>
+                <a:extLst>
+                  <a:ext uri="{0D108BD9-81ED-4DB2-BD59-A6C34878D82A}">
+                    <a16:rowId xmlns:a16="http://schemas.microsoft.com/office/drawing/2014/main" val="10000"/>
+                  </a:ext>
+                </a:extLst>
               </a:tr>
               <a:tr h="566928">
                 <a:tc>
@@ -18022,7 +18197,7 @@
                     <a:bodyPr/>
                     <a:lstStyle/>
                     <a:p>
-                      <a:pPr indent="0" marL="0">
+                      <a:pPr marL="0" indent="0">
                         <a:buNone/>
                       </a:pPr>
                       <a:r>
@@ -18036,7 +18211,7 @@
                       <a:endParaRPr lang="en-US" sz="1300" dirty="0"/>
                     </a:p>
                   </a:txBody>
-                  <a:tcPr marL="91440" marR="91440" marT="0" marB="0" anchor="ctr">
+                  <a:tcPr marT="0" marB="0" anchor="ctr">
                     <a:lnL w="9525" cap="flat" cmpd="sng" algn="ctr">
                       <a:solidFill>
                         <a:srgbClr val="D4D6D8"/>
@@ -18083,7 +18258,7 @@
                     <a:bodyPr/>
                     <a:lstStyle/>
                     <a:p>
-                      <a:pPr indent="0" marL="0">
+                      <a:pPr marL="0" indent="0">
                         <a:buNone/>
                       </a:pPr>
                       <a:r>
@@ -18097,7 +18272,7 @@
                       <a:endParaRPr lang="en-US" sz="1200" dirty="0"/>
                     </a:p>
                   </a:txBody>
-                  <a:tcPr marL="91440" marR="91440" marT="0" marB="0" anchor="ctr">
+                  <a:tcPr marT="0" marB="0" anchor="ctr">
                     <a:lnL w="9525" cap="flat" cmpd="sng" algn="ctr">
                       <a:solidFill>
                         <a:srgbClr val="D4D6D8"/>
@@ -18136,6 +18311,11 @@
                     </a:lnB>
                   </a:tcPr>
                 </a:tc>
+                <a:extLst>
+                  <a:ext uri="{0D108BD9-81ED-4DB2-BD59-A6C34878D82A}">
+                    <a16:rowId xmlns:a16="http://schemas.microsoft.com/office/drawing/2014/main" val="10001"/>
+                  </a:ext>
+                </a:extLst>
               </a:tr>
               <a:tr h="502920">
                 <a:tc>
@@ -18143,7 +18323,7 @@
                     <a:bodyPr/>
                     <a:lstStyle/>
                     <a:p>
-                      <a:pPr indent="0" marL="0">
+                      <a:pPr marL="0" indent="0">
                         <a:buNone/>
                       </a:pPr>
                       <a:r>
@@ -18157,7 +18337,7 @@
                       <a:endParaRPr lang="en-US" sz="1300" dirty="0"/>
                     </a:p>
                   </a:txBody>
-                  <a:tcPr marL="91440" marR="91440" marT="0" marB="0" anchor="ctr">
+                  <a:tcPr marT="0" marB="0" anchor="ctr">
                     <a:lnL w="9525" cap="flat" cmpd="sng" algn="ctr">
                       <a:solidFill>
                         <a:srgbClr val="D4D6D8"/>
@@ -18204,7 +18384,7 @@
                     <a:bodyPr/>
                     <a:lstStyle/>
                     <a:p>
-                      <a:pPr indent="0" marL="0">
+                      <a:pPr marL="0" indent="0">
                         <a:buNone/>
                       </a:pPr>
                       <a:r>
@@ -18218,7 +18398,7 @@
                       <a:endParaRPr lang="en-US" sz="1200" dirty="0"/>
                     </a:p>
                   </a:txBody>
-                  <a:tcPr marL="91440" marR="91440" marT="0" marB="0" anchor="ctr">
+                  <a:tcPr marT="0" marB="0" anchor="ctr">
                     <a:lnL w="9525" cap="flat" cmpd="sng" algn="ctr">
                       <a:solidFill>
                         <a:srgbClr val="D4D6D8"/>
@@ -18257,6 +18437,11 @@
                     </a:lnB>
                   </a:tcPr>
                 </a:tc>
+                <a:extLst>
+                  <a:ext uri="{0D108BD9-81ED-4DB2-BD59-A6C34878D82A}">
+                    <a16:rowId xmlns:a16="http://schemas.microsoft.com/office/drawing/2014/main" val="10002"/>
+                  </a:ext>
+                </a:extLst>
               </a:tr>
               <a:tr h="566928">
                 <a:tc>
@@ -18264,7 +18449,7 @@
                     <a:bodyPr/>
                     <a:lstStyle/>
                     <a:p>
-                      <a:pPr indent="0" marL="0">
+                      <a:pPr marL="0" indent="0">
                         <a:buNone/>
                       </a:pPr>
                       <a:r>
@@ -18278,7 +18463,7 @@
                       <a:endParaRPr lang="en-US" sz="1300" dirty="0"/>
                     </a:p>
                   </a:txBody>
-                  <a:tcPr marL="91440" marR="91440" marT="0" marB="0" anchor="ctr">
+                  <a:tcPr marT="0" marB="0" anchor="ctr">
                     <a:lnL w="9525" cap="flat" cmpd="sng" algn="ctr">
                       <a:solidFill>
                         <a:srgbClr val="D4D6D8"/>
@@ -18325,7 +18510,7 @@
                     <a:bodyPr/>
                     <a:lstStyle/>
                     <a:p>
-                      <a:pPr indent="0" marL="0">
+                      <a:pPr marL="0" indent="0">
                         <a:buNone/>
                       </a:pPr>
                       <a:r>
@@ -18339,7 +18524,7 @@
                       <a:endParaRPr lang="en-US" sz="1200" dirty="0"/>
                     </a:p>
                   </a:txBody>
-                  <a:tcPr marL="91440" marR="91440" marT="0" marB="0" anchor="ctr">
+                  <a:tcPr marT="0" marB="0" anchor="ctr">
                     <a:lnL w="9525" cap="flat" cmpd="sng" algn="ctr">
                       <a:solidFill>
                         <a:srgbClr val="D4D6D8"/>
@@ -18378,6 +18563,11 @@
                     </a:lnB>
                   </a:tcPr>
                 </a:tc>
+                <a:extLst>
+                  <a:ext uri="{0D108BD9-81ED-4DB2-BD59-A6C34878D82A}">
+                    <a16:rowId xmlns:a16="http://schemas.microsoft.com/office/drawing/2014/main" val="10003"/>
+                  </a:ext>
+                </a:extLst>
               </a:tr>
               <a:tr h="640080">
                 <a:tc>
@@ -18385,7 +18575,7 @@
                     <a:bodyPr/>
                     <a:lstStyle/>
                     <a:p>
-                      <a:pPr indent="0" marL="0">
+                      <a:pPr marL="0" indent="0">
                         <a:buNone/>
                       </a:pPr>
                       <a:r>
@@ -18399,7 +18589,7 @@
                       <a:endParaRPr lang="en-US" sz="1300" dirty="0"/>
                     </a:p>
                   </a:txBody>
-                  <a:tcPr marL="91440" marR="91440" marT="0" marB="0" anchor="ctr">
+                  <a:tcPr marT="0" marB="0" anchor="ctr">
                     <a:lnL w="9525" cap="flat" cmpd="sng" algn="ctr">
                       <a:solidFill>
                         <a:srgbClr val="D4D6D8"/>
@@ -18446,7 +18636,7 @@
                     <a:bodyPr/>
                     <a:lstStyle/>
                     <a:p>
-                      <a:pPr indent="0" marL="0">
+                      <a:pPr marL="0" indent="0">
                         <a:buNone/>
                       </a:pPr>
                       <a:r>
@@ -18460,7 +18650,7 @@
                       <a:endParaRPr lang="en-US" sz="1200" dirty="0"/>
                     </a:p>
                   </a:txBody>
-                  <a:tcPr marL="91440" marR="91440" marT="0" marB="0" anchor="ctr">
+                  <a:tcPr marT="0" marB="0" anchor="ctr">
                     <a:lnL w="9525" cap="flat" cmpd="sng" algn="ctr">
                       <a:solidFill>
                         <a:srgbClr val="D4D6D8"/>
@@ -18499,6 +18689,11 @@
                     </a:lnB>
                   </a:tcPr>
                 </a:tc>
+                <a:extLst>
+                  <a:ext uri="{0D108BD9-81ED-4DB2-BD59-A6C34878D82A}">
+                    <a16:rowId xmlns:a16="http://schemas.microsoft.com/office/drawing/2014/main" val="10004"/>
+                  </a:ext>
+                </a:extLst>
               </a:tr>
               <a:tr h="603504">
                 <a:tc>
@@ -18506,7 +18701,7 @@
                     <a:bodyPr/>
                     <a:lstStyle/>
                     <a:p>
-                      <a:pPr indent="0" marL="0">
+                      <a:pPr marL="0" indent="0">
                         <a:buNone/>
                       </a:pPr>
                       <a:r>
@@ -18520,7 +18715,7 @@
                       <a:endParaRPr lang="en-US" sz="1300" dirty="0"/>
                     </a:p>
                   </a:txBody>
-                  <a:tcPr marL="91440" marR="91440" marT="0" marB="0" anchor="ctr">
+                  <a:tcPr marT="0" marB="0" anchor="ctr">
                     <a:lnL w="9525" cap="flat" cmpd="sng" algn="ctr">
                       <a:solidFill>
                         <a:srgbClr val="D4D6D8"/>
@@ -18567,7 +18762,7 @@
                     <a:bodyPr/>
                     <a:lstStyle/>
                     <a:p>
-                      <a:pPr indent="0" marL="0">
+                      <a:pPr marL="0" indent="0">
                         <a:buNone/>
                       </a:pPr>
                       <a:r>
@@ -18581,7 +18776,7 @@
                       <a:endParaRPr lang="en-US" sz="1200" dirty="0"/>
                     </a:p>
                   </a:txBody>
-                  <a:tcPr marL="91440" marR="91440" marT="0" marB="0" anchor="ctr">
+                  <a:tcPr marT="0" marB="0" anchor="ctr">
                     <a:lnL w="9525" cap="flat" cmpd="sng" algn="ctr">
                       <a:solidFill>
                         <a:srgbClr val="D4D6D8"/>
@@ -18620,6 +18815,11 @@
                     </a:lnB>
                   </a:tcPr>
                 </a:tc>
+                <a:extLst>
+                  <a:ext uri="{0D108BD9-81ED-4DB2-BD59-A6C34878D82A}">
+                    <a16:rowId xmlns:a16="http://schemas.microsoft.com/office/drawing/2014/main" val="10005"/>
+                  </a:ext>
+                </a:extLst>
               </a:tr>
             </a:tbl>
           </a:graphicData>
@@ -18645,7 +18845,7 @@
           </a:prstGeom>
           <a:extLst>
             <a:ext uri="{C572A759-6A51-4108-AA02-DFA0A04FC94B}">
-              <ma14:wrappingTextBoxFlag xmlns:ma14="http://schemas.microsoft.com/office/mac/drawingml/2011/main" val="0"/>
+              <ma14:wrappingTextBoxFlag xmlns:ma14="http://schemas.microsoft.com/office/mac/drawingml/2011/main" xmlns="" val="0"/>
             </a:ext>
           </a:extLst>
         </p:spPr>
@@ -18663,7 +18863,7 @@
           <a:p>
             <a:pPr algn="r"/>
             <a:fld id="{F7021451-1387-4CA6-816F-3879F97B5CBC}" type="slidenum">
-              <a:rPr b="0" lang="en-US"/>
+              <a:rPr lang="en-US" b="0"/>
               <a:t>8</a:t>
             </a:fld>
             <a:endParaRPr lang="en-US"/>
@@ -18698,9 +18898,11 @@
       <p:sp>
         <p:nvSpPr>
           <p:cNvPr id="2" name="Text 0"/>
-          <p:cNvSpPr/>
+          <p:cNvSpPr>
+            <a:spLocks noGrp="1"/>
+          </p:cNvSpPr>
           <p:nvPr>
-            <p:ph idx="100" type="title" hasCustomPrompt="1"/>
+            <p:ph type="title" idx="100" hasCustomPrompt="1"/>
           </p:nvPr>
         </p:nvSpPr>
         <p:spPr>
@@ -18718,7 +18920,7 @@
           <a:bodyPr wrap="square" lIns="0" tIns="0" rIns="0" bIns="0" rtlCol="0" anchor="ctr"/>
           <a:lstStyle/>
           <a:p>
-            <a:pPr algn="l" indent="0" marL="0">
+            <a:pPr marL="0" indent="0" algn="l">
               <a:buNone/>
             </a:pPr>
             <a:r>
@@ -18745,15 +18947,20 @@
             <a:ext cx="4023360" cy="777240"/>
           </a:xfrm>
           <a:prstGeom prst="rect">
-            <a:avLst>
-              <a:gd name="adj" fmla="val 14118"/>
-            </a:avLst>
+            <a:avLst/>
           </a:prstGeom>
           <a:solidFill>
             <a:schemeClr val="tx1"/>
           </a:solidFill>
           <a:ln/>
         </p:spPr>
+        <p:txBody>
+          <a:bodyPr/>
+          <a:lstStyle/>
+          <a:p>
+            <a:endParaRPr lang="en-AU"/>
+          </a:p>
+        </p:txBody>
       </p:sp>
       <p:sp>
         <p:nvSpPr>
@@ -18776,7 +18983,7 @@
           <a:bodyPr wrap="square" lIns="0" tIns="0" rIns="0" bIns="0" rtlCol="0" anchor="ctr"/>
           <a:lstStyle/>
           <a:p>
-            <a:pPr algn="ctr" indent="0" marL="0">
+            <a:pPr marL="0" indent="0" algn="ctr">
               <a:buNone/>
             </a:pPr>
             <a:r>
@@ -18806,15 +19013,20 @@
             <a:ext cx="4023360" cy="1097280"/>
           </a:xfrm>
           <a:prstGeom prst="rect">
-            <a:avLst>
-              <a:gd name="adj" fmla="val 10000"/>
-            </a:avLst>
+            <a:avLst/>
           </a:prstGeom>
           <a:solidFill>
             <a:schemeClr val="bg2"/>
           </a:solidFill>
           <a:ln/>
         </p:spPr>
+        <p:txBody>
+          <a:bodyPr/>
+          <a:lstStyle/>
+          <a:p>
+            <a:endParaRPr lang="en-AU"/>
+          </a:p>
+        </p:txBody>
       </p:sp>
       <p:sp>
         <p:nvSpPr>
@@ -18837,7 +19049,7 @@
           <a:bodyPr wrap="square" lIns="0" tIns="0" rIns="0" bIns="0" rtlCol="0" anchor="ctr"/>
           <a:lstStyle/>
           <a:p>
-            <a:pPr indent="0" marL="0">
+            <a:pPr marL="0" indent="0">
               <a:buNone/>
             </a:pPr>
             <a:r>
@@ -18851,7 +19063,7 @@
             <a:endParaRPr lang="en-US" sz="1500" dirty="0"/>
           </a:p>
           <a:p>
-            <a:pPr indent="0" marL="0">
+            <a:pPr marL="0" indent="0">
               <a:buNone/>
             </a:pPr>
             <a:r>
@@ -18878,15 +19090,20 @@
             <a:ext cx="4023360" cy="1097280"/>
           </a:xfrm>
           <a:prstGeom prst="rect">
-            <a:avLst>
-              <a:gd name="adj" fmla="val 10000"/>
-            </a:avLst>
+            <a:avLst/>
           </a:prstGeom>
           <a:solidFill>
             <a:schemeClr val="bg2"/>
           </a:solidFill>
           <a:ln/>
         </p:spPr>
+        <p:txBody>
+          <a:bodyPr/>
+          <a:lstStyle/>
+          <a:p>
+            <a:endParaRPr lang="en-AU"/>
+          </a:p>
+        </p:txBody>
       </p:sp>
       <p:sp>
         <p:nvSpPr>
@@ -18909,7 +19126,7 @@
           <a:bodyPr wrap="square" lIns="0" tIns="0" rIns="0" bIns="0" rtlCol="0" anchor="ctr"/>
           <a:lstStyle/>
           <a:p>
-            <a:pPr indent="0" marL="0">
+            <a:pPr marL="0" indent="0">
               <a:buNone/>
             </a:pPr>
             <a:r>
@@ -18923,7 +19140,7 @@
             <a:endParaRPr lang="en-US" sz="1500" dirty="0"/>
           </a:p>
           <a:p>
-            <a:pPr indent="0" marL="0">
+            <a:pPr marL="0" indent="0">
               <a:buNone/>
             </a:pPr>
             <a:r>
@@ -18940,7 +19157,7 @@
       </p:sp>
       <p:graphicFrame>
         <p:nvGraphicFramePr>
-          <p:cNvPr id="10" name="Chart 0" descr=""/>
+          <p:cNvPr id="10" name="Chart 0"/>
           <p:cNvGraphicFramePr/>
           <p:nvPr/>
         </p:nvGraphicFramePr>
@@ -18948,9 +19165,9 @@
           <a:off x="4663440" y="1188720"/>
           <a:ext cx="4023360" cy="2834640"/>
         </p:xfrm>
-        <a:graphic xmlns:a="http://schemas.openxmlformats.org/drawingml/2006/main">
+        <a:graphic>
           <a:graphicData uri="http://schemas.openxmlformats.org/drawingml/2006/chart">
-            <c:chart xmlns:c="http://schemas.openxmlformats.org/drawingml/2006/chart" r:id="rId1"/>
+            <c:chart xmlns:c="http://schemas.openxmlformats.org/drawingml/2006/chart" xmlns:r="http://schemas.openxmlformats.org/officeDocument/2006/relationships" r:id="rId3"/>
           </a:graphicData>
         </a:graphic>
       </p:graphicFrame>
@@ -18966,15 +19183,20 @@
             <a:ext cx="4023360" cy="365760"/>
           </a:xfrm>
           <a:prstGeom prst="rect">
-            <a:avLst>
-              <a:gd name="adj" fmla="val 30000"/>
-            </a:avLst>
+            <a:avLst/>
           </a:prstGeom>
           <a:solidFill>
             <a:schemeClr val="accent1"/>
           </a:solidFill>
           <a:ln/>
         </p:spPr>
+        <p:txBody>
+          <a:bodyPr/>
+          <a:lstStyle/>
+          <a:p>
+            <a:endParaRPr lang="en-AU"/>
+          </a:p>
+        </p:txBody>
       </p:sp>
       <p:sp>
         <p:nvSpPr>
@@ -18997,7 +19219,7 @@
           <a:bodyPr wrap="square" lIns="0" tIns="0" rIns="0" bIns="0" rtlCol="0" anchor="ctr"/>
           <a:lstStyle/>
           <a:p>
-            <a:pPr algn="ctr" indent="0" marL="0">
+            <a:pPr marL="0" indent="0" algn="ctr">
               <a:buNone/>
             </a:pPr>
             <a:r>
@@ -19032,7 +19254,7 @@
           </a:prstGeom>
           <a:extLst>
             <a:ext uri="{C572A759-6A51-4108-AA02-DFA0A04FC94B}">
-              <ma14:wrappingTextBoxFlag xmlns:ma14="http://schemas.microsoft.com/office/mac/drawingml/2011/main" val="0"/>
+              <ma14:wrappingTextBoxFlag xmlns:ma14="http://schemas.microsoft.com/office/mac/drawingml/2011/main" xmlns="" val="0"/>
             </a:ext>
           </a:extLst>
         </p:spPr>
@@ -19050,7 +19272,7 @@
           <a:p>
             <a:pPr algn="r"/>
             <a:fld id="{F7021451-1387-4CA6-816F-3879F97B5CBC}" type="slidenum">
-              <a:rPr b="0" lang="en-US"/>
+              <a:rPr lang="en-US" b="0"/>
               <a:t>9</a:t>
             </a:fld>
             <a:endParaRPr lang="en-US"/>
@@ -19358,4 +19580,319 @@
     </a:ext>
   </a:extLst>
 </a:theme>
+</file>
+
+<file path=ppt/theme/theme2.xml><?xml version="1.0" encoding="utf-8"?>
+<a:theme xmlns:a="http://schemas.openxmlformats.org/drawingml/2006/main" name="Office Theme">
+  <a:themeElements>
+    <a:clrScheme name="Office">
+      <a:dk1>
+        <a:sysClr val="windowText" lastClr="000000"/>
+      </a:dk1>
+      <a:lt1>
+        <a:sysClr val="window" lastClr="FFFFFF"/>
+      </a:lt1>
+      <a:dk2>
+        <a:srgbClr val="0E2841"/>
+      </a:dk2>
+      <a:lt2>
+        <a:srgbClr val="E8E8E8"/>
+      </a:lt2>
+      <a:accent1>
+        <a:srgbClr val="156082"/>
+      </a:accent1>
+      <a:accent2>
+        <a:srgbClr val="E97132"/>
+      </a:accent2>
+      <a:accent3>
+        <a:srgbClr val="196B24"/>
+      </a:accent3>
+      <a:accent4>
+        <a:srgbClr val="0F9ED5"/>
+      </a:accent4>
+      <a:accent5>
+        <a:srgbClr val="A02B93"/>
+      </a:accent5>
+      <a:accent6>
+        <a:srgbClr val="4EA72E"/>
+      </a:accent6>
+      <a:hlink>
+        <a:srgbClr val="467886"/>
+      </a:hlink>
+      <a:folHlink>
+        <a:srgbClr val="96607D"/>
+      </a:folHlink>
+    </a:clrScheme>
+    <a:fontScheme name="Office">
+      <a:majorFont>
+        <a:latin typeface="Aptos Display" panose="02110004020202020204"/>
+        <a:ea typeface=""/>
+        <a:cs typeface=""/>
+        <a:font script="Jpan" typeface="游ゴシック Light"/>
+        <a:font script="Hang" typeface="맑은 고딕"/>
+        <a:font script="Hans" typeface="等线 Light"/>
+        <a:font script="Hant" typeface="新細明體"/>
+        <a:font script="Arab" typeface="Times New Roman"/>
+        <a:font script="Hebr" typeface="Times New Roman"/>
+        <a:font script="Thai" typeface="Angsana New"/>
+        <a:font script="Ethi" typeface="Nyala"/>
+        <a:font script="Beng" typeface="Vrinda"/>
+        <a:font script="Gujr" typeface="Shruti"/>
+        <a:font script="Khmr" typeface="MoolBoran"/>
+        <a:font script="Knda" typeface="Tunga"/>
+        <a:font script="Guru" typeface="Raavi"/>
+        <a:font script="Cans" typeface="Euphemia"/>
+        <a:font script="Cher" typeface="Plantagenet Cherokee"/>
+        <a:font script="Yiii" typeface="Microsoft Yi Baiti"/>
+        <a:font script="Tibt" typeface="Microsoft Himalaya"/>
+        <a:font script="Thaa" typeface="MV Boli"/>
+        <a:font script="Deva" typeface="Mangal"/>
+        <a:font script="Telu" typeface="Gautami"/>
+        <a:font script="Taml" typeface="Latha"/>
+        <a:font script="Syrc" typeface="Estrangelo Edessa"/>
+        <a:font script="Orya" typeface="Kalinga"/>
+        <a:font script="Mlym" typeface="Kartika"/>
+        <a:font script="Laoo" typeface="DokChampa"/>
+        <a:font script="Sinh" typeface="Iskoola Pota"/>
+        <a:font script="Mong" typeface="Mongolian Baiti"/>
+        <a:font script="Viet" typeface="Times New Roman"/>
+        <a:font script="Uigh" typeface="Microsoft Uighur"/>
+        <a:font script="Geor" typeface="Sylfaen"/>
+        <a:font script="Armn" typeface="Arial"/>
+        <a:font script="Bugi" typeface="Leelawadee UI"/>
+        <a:font script="Bopo" typeface="Microsoft JhengHei"/>
+        <a:font script="Java" typeface="Javanese Text"/>
+        <a:font script="Lisu" typeface="Segoe UI"/>
+        <a:font script="Mymr" typeface="Myanmar Text"/>
+        <a:font script="Nkoo" typeface="Ebrima"/>
+        <a:font script="Olck" typeface="Nirmala UI"/>
+        <a:font script="Osma" typeface="Ebrima"/>
+        <a:font script="Phag" typeface="Phagspa"/>
+        <a:font script="Syrn" typeface="Estrangelo Edessa"/>
+        <a:font script="Syrj" typeface="Estrangelo Edessa"/>
+        <a:font script="Syre" typeface="Estrangelo Edessa"/>
+        <a:font script="Sora" typeface="Nirmala UI"/>
+        <a:font script="Tale" typeface="Microsoft Tai Le"/>
+        <a:font script="Talu" typeface="Microsoft New Tai Lue"/>
+        <a:font script="Tfng" typeface="Ebrima"/>
+      </a:majorFont>
+      <a:minorFont>
+        <a:latin typeface="Aptos" panose="02110004020202020204"/>
+        <a:ea typeface=""/>
+        <a:cs typeface=""/>
+        <a:font script="Jpan" typeface="游ゴシック"/>
+        <a:font script="Hang" typeface="맑은 고딕"/>
+        <a:font script="Hans" typeface="等线"/>
+        <a:font script="Hant" typeface="新細明體"/>
+        <a:font script="Arab" typeface="Arial"/>
+        <a:font script="Hebr" typeface="Arial"/>
+        <a:font script="Thai" typeface="Cordia New"/>
+        <a:font script="Ethi" typeface="Nyala"/>
+        <a:font script="Beng" typeface="Vrinda"/>
+        <a:font script="Gujr" typeface="Shruti"/>
+        <a:font script="Khmr" typeface="DaunPenh"/>
+        <a:font script="Knda" typeface="Tunga"/>
+        <a:font script="Guru" typeface="Raavi"/>
+        <a:font script="Cans" typeface="Euphemia"/>
+        <a:font script="Cher" typeface="Plantagenet Cherokee"/>
+        <a:font script="Yiii" typeface="Microsoft Yi Baiti"/>
+        <a:font script="Tibt" typeface="Microsoft Himalaya"/>
+        <a:font script="Thaa" typeface="MV Boli"/>
+        <a:font script="Deva" typeface="Mangal"/>
+        <a:font script="Telu" typeface="Gautami"/>
+        <a:font script="Taml" typeface="Latha"/>
+        <a:font script="Syrc" typeface="Estrangelo Edessa"/>
+        <a:font script="Orya" typeface="Kalinga"/>
+        <a:font script="Mlym" typeface="Kartika"/>
+        <a:font script="Laoo" typeface="DokChampa"/>
+        <a:font script="Sinh" typeface="Iskoola Pota"/>
+        <a:font script="Mong" typeface="Mongolian Baiti"/>
+        <a:font script="Viet" typeface="Arial"/>
+        <a:font script="Uigh" typeface="Microsoft Uighur"/>
+        <a:font script="Geor" typeface="Sylfaen"/>
+        <a:font script="Armn" typeface="Arial"/>
+        <a:font script="Bugi" typeface="Leelawadee UI"/>
+        <a:font script="Bopo" typeface="Microsoft JhengHei"/>
+        <a:font script="Java" typeface="Javanese Text"/>
+        <a:font script="Lisu" typeface="Segoe UI"/>
+        <a:font script="Mymr" typeface="Myanmar Text"/>
+        <a:font script="Nkoo" typeface="Ebrima"/>
+        <a:font script="Olck" typeface="Nirmala UI"/>
+        <a:font script="Osma" typeface="Ebrima"/>
+        <a:font script="Phag" typeface="Phagspa"/>
+        <a:font script="Syrn" typeface="Estrangelo Edessa"/>
+        <a:font script="Syrj" typeface="Estrangelo Edessa"/>
+        <a:font script="Syre" typeface="Estrangelo Edessa"/>
+        <a:font script="Sora" typeface="Nirmala UI"/>
+        <a:font script="Tale" typeface="Microsoft Tai Le"/>
+        <a:font script="Talu" typeface="Microsoft New Tai Lue"/>
+        <a:font script="Tfng" typeface="Ebrima"/>
+      </a:minorFont>
+    </a:fontScheme>
+    <a:fmtScheme name="Office">
+      <a:fillStyleLst>
+        <a:solidFill>
+          <a:schemeClr val="phClr"/>
+        </a:solidFill>
+        <a:gradFill rotWithShape="1">
+          <a:gsLst>
+            <a:gs pos="0">
+              <a:schemeClr val="phClr">
+                <a:lumMod val="110000"/>
+                <a:satMod val="105000"/>
+                <a:tint val="67000"/>
+              </a:schemeClr>
+            </a:gs>
+            <a:gs pos="50000">
+              <a:schemeClr val="phClr">
+                <a:lumMod val="105000"/>
+                <a:satMod val="103000"/>
+                <a:tint val="73000"/>
+              </a:schemeClr>
+            </a:gs>
+            <a:gs pos="100000">
+              <a:schemeClr val="phClr">
+                <a:lumMod val="105000"/>
+                <a:satMod val="109000"/>
+                <a:tint val="81000"/>
+              </a:schemeClr>
+            </a:gs>
+          </a:gsLst>
+          <a:lin ang="5400000" scaled="0"/>
+        </a:gradFill>
+        <a:gradFill rotWithShape="1">
+          <a:gsLst>
+            <a:gs pos="0">
+              <a:schemeClr val="phClr">
+                <a:satMod val="103000"/>
+                <a:lumMod val="102000"/>
+                <a:tint val="94000"/>
+              </a:schemeClr>
+            </a:gs>
+            <a:gs pos="50000">
+              <a:schemeClr val="phClr">
+                <a:satMod val="110000"/>
+                <a:lumMod val="100000"/>
+                <a:shade val="100000"/>
+              </a:schemeClr>
+            </a:gs>
+            <a:gs pos="100000">
+              <a:schemeClr val="phClr">
+                <a:lumMod val="99000"/>
+                <a:satMod val="120000"/>
+                <a:shade val="78000"/>
+              </a:schemeClr>
+            </a:gs>
+          </a:gsLst>
+          <a:lin ang="5400000" scaled="0"/>
+        </a:gradFill>
+      </a:fillStyleLst>
+      <a:lnStyleLst>
+        <a:ln w="12700" cap="flat" cmpd="sng" algn="ctr">
+          <a:solidFill>
+            <a:schemeClr val="phClr"/>
+          </a:solidFill>
+          <a:prstDash val="solid"/>
+          <a:miter lim="800000"/>
+        </a:ln>
+        <a:ln w="19050" cap="flat" cmpd="sng" algn="ctr">
+          <a:solidFill>
+            <a:schemeClr val="phClr"/>
+          </a:solidFill>
+          <a:prstDash val="solid"/>
+          <a:miter lim="800000"/>
+        </a:ln>
+        <a:ln w="25400" cap="flat" cmpd="sng" algn="ctr">
+          <a:solidFill>
+            <a:schemeClr val="phClr"/>
+          </a:solidFill>
+          <a:prstDash val="solid"/>
+          <a:miter lim="800000"/>
+        </a:ln>
+      </a:lnStyleLst>
+      <a:effectStyleLst>
+        <a:effectStyle>
+          <a:effectLst/>
+        </a:effectStyle>
+        <a:effectStyle>
+          <a:effectLst/>
+        </a:effectStyle>
+        <a:effectStyle>
+          <a:effectLst>
+            <a:outerShdw blurRad="57150" dist="19050" dir="5400000" algn="ctr" rotWithShape="0">
+              <a:srgbClr val="000000">
+                <a:alpha val="63000"/>
+              </a:srgbClr>
+            </a:outerShdw>
+          </a:effectLst>
+        </a:effectStyle>
+      </a:effectStyleLst>
+      <a:bgFillStyleLst>
+        <a:solidFill>
+          <a:schemeClr val="phClr"/>
+        </a:solidFill>
+        <a:solidFill>
+          <a:schemeClr val="phClr">
+            <a:tint val="95000"/>
+            <a:satMod val="170000"/>
+          </a:schemeClr>
+        </a:solidFill>
+        <a:gradFill rotWithShape="1">
+          <a:gsLst>
+            <a:gs pos="0">
+              <a:schemeClr val="phClr">
+                <a:tint val="93000"/>
+                <a:satMod val="150000"/>
+                <a:shade val="98000"/>
+                <a:lumMod val="102000"/>
+              </a:schemeClr>
+            </a:gs>
+            <a:gs pos="50000">
+              <a:schemeClr val="phClr">
+                <a:tint val="98000"/>
+                <a:satMod val="130000"/>
+                <a:shade val="90000"/>
+                <a:lumMod val="103000"/>
+              </a:schemeClr>
+            </a:gs>
+            <a:gs pos="100000">
+              <a:schemeClr val="phClr">
+                <a:shade val="63000"/>
+                <a:satMod val="120000"/>
+              </a:schemeClr>
+            </a:gs>
+          </a:gsLst>
+          <a:lin ang="5400000" scaled="0"/>
+        </a:gradFill>
+      </a:bgFillStyleLst>
+    </a:fmtScheme>
+  </a:themeElements>
+  <a:objectDefaults>
+    <a:lnDef>
+      <a:spPr/>
+      <a:bodyPr/>
+      <a:lstStyle/>
+      <a:style>
+        <a:lnRef idx="2">
+          <a:schemeClr val="accent1"/>
+        </a:lnRef>
+        <a:fillRef idx="0">
+          <a:schemeClr val="accent1"/>
+        </a:fillRef>
+        <a:effectRef idx="1">
+          <a:schemeClr val="accent1"/>
+        </a:effectRef>
+        <a:fontRef idx="minor">
+          <a:schemeClr val="tx1"/>
+        </a:fontRef>
+      </a:style>
+    </a:lnDef>
+  </a:objectDefaults>
+  <a:extraClrSchemeLst/>
+  <a:extLst>
+    <a:ext uri="{05A4C25C-085E-4340-85A3-A5531E510DB2}">
+      <thm15:themeFamily xmlns:thm15="http://schemas.microsoft.com/office/thememl/2012/main" name="Office Theme" id="{2E142A2C-CD16-42D6-873A-C26D2A0506FA}" vid="{1BDDFF52-6CD6-40A5-AB3C-68EB2F1E4D0A}"/>
+    </a:ext>
+  </a:extLst>
+</a:theme>
 </file>